--- a/slides/What to use when - Copilot, Cowork, Studio and Scout (Technical - full).pptx
+++ b/slides/What to use when - Copilot, Cowork, Studio and Scout (Technical - full).pptx
@@ -11921,7 +11921,7 @@
           <a:noFill/>
         </p:spPr>
         <p:txBody>
-          <a:bodyPr wrap="none" lIns="73152" rIns="73152" tIns="36576">
+          <a:bodyPr wrap="square" lIns="73152" rIns="73152" tIns="36576">
             <a:spAutoFit/>
           </a:bodyPr>
           <a:lstStyle/>
@@ -11930,15 +11930,25 @@
               <a:spcAft>
                 <a:spcPts val="500"/>
               </a:spcAft>
-              <a:defRPr sz="1200">
+            </a:pPr>
+            <a:r>
+              <a:rPr sz="1200">
                 <a:solidFill>
                   <a:srgbClr val="F5F7FF"/>
                 </a:solidFill>
                 <a:latin typeface="Segoe UI"/>
-              </a:defRPr>
-            </a:pPr>
-            <a:r>
-              <a:t>• learn.microsoft.com/microsoft-365/copilot/which-copilot-for-your-organization</a:t>
+              </a:rPr>
+              <a:t>• </a:t>
+            </a:r>
+            <a:r>
+              <a:rPr sz="1200" u="sng">
+                <a:solidFill>
+                  <a:srgbClr val="00B7C3"/>
+                </a:solidFill>
+                <a:latin typeface="Segoe UI"/>
+                <a:hlinkClick r:id="rId2"/>
+              </a:rPr>
+              <a:t>learn.microsoft.com/microsoft-365/copilot/which-copilot-for-your-organization</a:t>
             </a:r>
           </a:p>
           <a:p>
@@ -11946,15 +11956,25 @@
               <a:spcAft>
                 <a:spcPts val="500"/>
               </a:spcAft>
-              <a:defRPr sz="1200">
+            </a:pPr>
+            <a:r>
+              <a:rPr sz="1200">
                 <a:solidFill>
                   <a:srgbClr val="F5F7FF"/>
                 </a:solidFill>
                 <a:latin typeface="Segoe UI"/>
-              </a:defRPr>
-            </a:pPr>
-            <a:r>
-              <a:t>• learn.microsoft.com/microsoft-365/copilot/cowork</a:t>
+              </a:rPr>
+              <a:t>• </a:t>
+            </a:r>
+            <a:r>
+              <a:rPr sz="1200" u="sng">
+                <a:solidFill>
+                  <a:srgbClr val="00B7C3"/>
+                </a:solidFill>
+                <a:latin typeface="Segoe UI"/>
+                <a:hlinkClick r:id="rId3"/>
+              </a:rPr>
+              <a:t>learn.microsoft.com/microsoft-365/copilot/cowork</a:t>
             </a:r>
           </a:p>
           <a:p>
@@ -11962,15 +11982,25 @@
               <a:spcAft>
                 <a:spcPts val="500"/>
               </a:spcAft>
-              <a:defRPr sz="1200">
+            </a:pPr>
+            <a:r>
+              <a:rPr sz="1200">
                 <a:solidFill>
                   <a:srgbClr val="F5F7FF"/>
                 </a:solidFill>
                 <a:latin typeface="Segoe UI"/>
-              </a:defRPr>
-            </a:pPr>
-            <a:r>
-              <a:t>• learn.microsoft.com/microsoft-365/copilot/cowork/cowork-faq</a:t>
+              </a:rPr>
+              <a:t>• </a:t>
+            </a:r>
+            <a:r>
+              <a:rPr sz="1200" u="sng">
+                <a:solidFill>
+                  <a:srgbClr val="00B7C3"/>
+                </a:solidFill>
+                <a:latin typeface="Segoe UI"/>
+                <a:hlinkClick r:id="rId4"/>
+              </a:rPr>
+              <a:t>learn.microsoft.com/microsoft-365/copilot/cowork/cowork-faq</a:t>
             </a:r>
           </a:p>
           <a:p>
@@ -11978,15 +12008,25 @@
               <a:spcAft>
                 <a:spcPts val="500"/>
               </a:spcAft>
-              <a:defRPr sz="1200">
+            </a:pPr>
+            <a:r>
+              <a:rPr sz="1200">
                 <a:solidFill>
                   <a:srgbClr val="F5F7FF"/>
                 </a:solidFill>
                 <a:latin typeface="Segoe UI"/>
-              </a:defRPr>
-            </a:pPr>
-            <a:r>
-              <a:t>• learn.microsoft.com/microsoft-copilot-studio/fundamentals-what-is-copilot-studio</a:t>
+              </a:rPr>
+              <a:t>• </a:t>
+            </a:r>
+            <a:r>
+              <a:rPr sz="1200" u="sng">
+                <a:solidFill>
+                  <a:srgbClr val="00B7C3"/>
+                </a:solidFill>
+                <a:latin typeface="Segoe UI"/>
+                <a:hlinkClick r:id="rId5"/>
+              </a:rPr>
+              <a:t>learn.microsoft.com/microsoft-copilot-studio/fundamentals-what-is-copilot-studio</a:t>
             </a:r>
           </a:p>
           <a:p>
@@ -11994,15 +12034,25 @@
               <a:spcAft>
                 <a:spcPts val="500"/>
               </a:spcAft>
-              <a:defRPr sz="1200">
+            </a:pPr>
+            <a:r>
+              <a:rPr sz="1200">
                 <a:solidFill>
                   <a:srgbClr val="F5F7FF"/>
                 </a:solidFill>
                 <a:latin typeface="Segoe UI"/>
-              </a:defRPr>
-            </a:pPr>
-            <a:r>
-              <a:t>• learn.microsoft.com/microsoft-365/copilot/extensibility/copilot-studio-experience</a:t>
+              </a:rPr>
+              <a:t>• </a:t>
+            </a:r>
+            <a:r>
+              <a:rPr sz="1200" u="sng">
+                <a:solidFill>
+                  <a:srgbClr val="00B7C3"/>
+                </a:solidFill>
+                <a:latin typeface="Segoe UI"/>
+                <a:hlinkClick r:id="rId6"/>
+              </a:rPr>
+              <a:t>learn.microsoft.com/microsoft-365/copilot/extensibility/copilot-studio-experience</a:t>
             </a:r>
           </a:p>
           <a:p>
@@ -12010,15 +12060,25 @@
               <a:spcAft>
                 <a:spcPts val="500"/>
               </a:spcAft>
-              <a:defRPr sz="1200">
+            </a:pPr>
+            <a:r>
+              <a:rPr sz="1200">
                 <a:solidFill>
                   <a:srgbClr val="F5F7FF"/>
                 </a:solidFill>
                 <a:latin typeface="Segoe UI"/>
-              </a:defRPr>
-            </a:pPr>
-            <a:r>
-              <a:t>• learn.microsoft.com/microsoft-365/copilot/researcher-agent</a:t>
+              </a:rPr>
+              <a:t>• </a:t>
+            </a:r>
+            <a:r>
+              <a:rPr sz="1200" u="sng">
+                <a:solidFill>
+                  <a:srgbClr val="00B7C3"/>
+                </a:solidFill>
+                <a:latin typeface="Segoe UI"/>
+                <a:hlinkClick r:id="rId7"/>
+              </a:rPr>
+              <a:t>learn.microsoft.com/microsoft-365/copilot/researcher-agent</a:t>
             </a:r>
           </a:p>
           <a:p>
@@ -12026,15 +12086,25 @@
               <a:spcAft>
                 <a:spcPts val="500"/>
               </a:spcAft>
-              <a:defRPr sz="1200">
+            </a:pPr>
+            <a:r>
+              <a:rPr sz="1200">
                 <a:solidFill>
                   <a:srgbClr val="F5F7FF"/>
                 </a:solidFill>
                 <a:latin typeface="Segoe UI"/>
-              </a:defRPr>
-            </a:pPr>
-            <a:r>
-              <a:t>• learn.microsoft.com/copilot/agents</a:t>
+              </a:rPr>
+              <a:t>• </a:t>
+            </a:r>
+            <a:r>
+              <a:rPr sz="1200" u="sng">
+                <a:solidFill>
+                  <a:srgbClr val="00B7C3"/>
+                </a:solidFill>
+                <a:latin typeface="Segoe UI"/>
+                <a:hlinkClick r:id="rId8"/>
+              </a:rPr>
+              <a:t>learn.microsoft.com/copilot/agents</a:t>
             </a:r>
           </a:p>
           <a:p>
@@ -12042,15 +12112,25 @@
               <a:spcAft>
                 <a:spcPts val="500"/>
               </a:spcAft>
-              <a:defRPr sz="1200">
+            </a:pPr>
+            <a:r>
+              <a:rPr sz="1200">
                 <a:solidFill>
                   <a:srgbClr val="F5F7FF"/>
                 </a:solidFill>
                 <a:latin typeface="Segoe UI"/>
-              </a:defRPr>
-            </a:pPr>
-            <a:r>
-              <a:t>• learn.microsoft.com/microsoft-scout</a:t>
+              </a:rPr>
+              <a:t>• </a:t>
+            </a:r>
+            <a:r>
+              <a:rPr sz="1200" u="sng">
+                <a:solidFill>
+                  <a:srgbClr val="00B7C3"/>
+                </a:solidFill>
+                <a:latin typeface="Segoe UI"/>
+                <a:hlinkClick r:id="rId9"/>
+              </a:rPr>
+              <a:t>learn.microsoft.com/microsoft-scout</a:t>
             </a:r>
           </a:p>
         </p:txBody>

--- a/slides/What to use when - Copilot, Cowork, Studio and Scout (Technical - full).pptx
+++ b/slides/What to use when - Copilot, Cowork, Studio and Scout (Technical - full).pptx
@@ -3179,7 +3179,7 @@
                 </a:solidFill>
                 <a:latin typeface="Segoe UI"/>
               </a:rPr>
-              <a:t>Most tasks work in more than one place. This guide shows the quickest path for everyday work and where to graduate when things get bigger. Every claim is grounded in Microsoft Learn or microsoft.com, with links at the bottom.</a:t>
+              <a:t>Most tasks work in more than one place. This guide shows the quickest path for everyday work and where to graduate when things get bigger. Every claim is grounded in Microsoft Learn or microsoft.com, with links at the bottom. Preview features are labelled and may change.</a:t>
             </a:r>
           </a:p>
         </p:txBody>
@@ -6036,7 +6036,7 @@
                 </a:solidFill>
                 <a:latin typeface="Segoe UI"/>
               </a:rPr>
-              <a:t>You can schedule this to run automatically by starting your prompt with "Create a skill where this occurs every Monday morning."</a:t>
+              <a:t>To automate this, save the prompt, then in Microsoft 365 Copilot hover the saved prompt and choose "Schedule this prompt". Use a skill separately when you want the...</a:t>
             </a:r>
           </a:p>
         </p:txBody>
@@ -8030,7 +8030,7 @@
                 </a:solidFill>
                 <a:latin typeface="Segoe UI"/>
               </a:rPr>
-              <a:t>This task features a scheduled prompt, which tells Cowork you want it to run automatically on a recurring basis. To create a scheduled prompt, simply describe what...</a:t>
+              <a:t>This task can use a scheduled prompt. In Microsoft 365 Copilot, save the prompt, hover it, choose "Schedule this prompt", and set the recurrence.</a:t>
             </a:r>
           </a:p>
         </p:txBody>
@@ -9339,7 +9339,7 @@
               </a:defRPr>
             </a:pPr>
             <a:r>
-              <a:t>• Microsoft Copilot Studio</a:t>
+              <a:t>• Copilot Studio</a:t>
             </a:r>
           </a:p>
           <a:p>
@@ -12475,7 +12475,7 @@
               </a:defRPr>
             </a:pPr>
             <a:r>
-              <a:t>• Take real action across M365 (send emails, schedule meetings, post in Teams, organise files)</a:t>
+              <a:t>• Take real action across Microsoft 365 (send emails, schedule meetings, post in Teams, organise files)</a:t>
             </a:r>
           </a:p>
         </p:txBody>

--- a/slides/What to use when - Copilot, Cowork, Studio and Scout (Technical - full).pptx
+++ b/slides/What to use when - Copilot, Cowork, Studio and Scout (Technical - full).pptx
@@ -31,7 +31,7 @@
     <p:sldId id="279" r:id="rId30"/>
     <p:sldId id="280" r:id="rId31"/>
   </p:sldIdLst>
-  <p:sldSz cx="9144000" cy="5143500" type="screen4x3"/>
+  <p:sldSz cx="12191695" cy="6858000" type="screen4x3"/>
   <p:notesSz cx="6858000" cy="9144000"/>
   <p:defaultTextStyle>
     <a:defPPr>
@@ -3132,16 +3132,16 @@
         </p:nvSpPr>
         <p:spPr>
           <a:xfrm>
-            <a:off x="640080" y="868680"/>
-            <a:ext cx="6995160" cy="1234440"/>
-          </a:xfrm>
-        </p:spPr>
-        <p:txBody>
-          <a:bodyPr/>
-          <a:lstStyle/>
-          <a:p>
-            <a:r>
-              <a:rPr sz="2600" b="1">
+            <a:off x="822960" y="1828800"/>
+            <a:ext cx="9601200" cy="1645920"/>
+          </a:xfrm>
+        </p:spPr>
+        <p:txBody>
+          <a:bodyPr wrap="square"/>
+          <a:lstStyle/>
+          <a:p>
+            <a:r>
+              <a:rPr sz="3800" b="1">
                 <a:solidFill>
                   <a:srgbClr val="F5F7FF"/>
                 </a:solidFill>
@@ -3164,16 +3164,16 @@
         </p:nvSpPr>
         <p:spPr>
           <a:xfrm>
-            <a:off x="658368" y="2212848"/>
-            <a:ext cx="7726679" cy="1005840"/>
-          </a:xfrm>
-        </p:spPr>
-        <p:txBody>
-          <a:bodyPr/>
-          <a:lstStyle/>
-          <a:p>
-            <a:r>
-              <a:rPr sz="1400">
+            <a:off x="841248" y="3703320"/>
+            <a:ext cx="10058400" cy="1463040"/>
+          </a:xfrm>
+        </p:spPr>
+        <p:txBody>
+          <a:bodyPr wrap="square"/>
+          <a:lstStyle/>
+          <a:p>
+            <a:r>
+              <a:rPr sz="1800">
                 <a:solidFill>
                   <a:srgbClr val="AEB8E0"/>
                 </a:solidFill>
@@ -3192,8 +3192,8 @@
         </p:nvSpPr>
         <p:spPr>
           <a:xfrm>
-            <a:off x="7680960" y="-365760"/>
-            <a:ext cx="2011680" cy="2011680"/>
+            <a:off x="10241280" y="-548640"/>
+            <a:ext cx="2560320" cy="2560320"/>
           </a:xfrm>
           <a:prstGeom prst="ellipse">
             <a:avLst/>
@@ -3235,8 +3235,8 @@
         </p:nvSpPr>
         <p:spPr>
           <a:xfrm>
-            <a:off x="658368" y="4389120"/>
-            <a:ext cx="4114800" cy="274320"/>
+            <a:off x="841248" y="5897880"/>
+            <a:ext cx="5486400" cy="365760"/>
           </a:xfrm>
           <a:prstGeom prst="rect">
             <a:avLst/>
@@ -3244,13 +3244,13 @@
           <a:noFill/>
         </p:spPr>
         <p:txBody>
-          <a:bodyPr wrap="square" lIns="27432" rIns="27432" tIns="18288" bIns="18288">
+          <a:bodyPr wrap="square" lIns="45720" rIns="45720" tIns="27432" bIns="27432">
             <a:spAutoFit/>
           </a:bodyPr>
           <a:lstStyle/>
           <a:p>
             <a:r>
-              <a:rPr sz="1200" b="1">
+              <a:rPr sz="1400" b="1">
                 <a:solidFill>
                   <a:srgbClr val="00B7C3"/>
                 </a:solidFill>
@@ -3299,8 +3299,8 @@
         </p:nvSpPr>
         <p:spPr>
           <a:xfrm>
-            <a:off x="502920" y="384048"/>
-            <a:ext cx="8138160" cy="713232"/>
+            <a:off x="640080" y="502920"/>
+            <a:ext cx="10972800" cy="822960"/>
           </a:xfrm>
         </p:spPr>
         <p:txBody>
@@ -3309,7 +3309,7 @@
           <a:p>
             <a:pPr algn="l"/>
             <a:r>
-              <a:rPr sz="2200" b="1">
+              <a:rPr sz="2800" b="1">
                 <a:solidFill>
                   <a:srgbClr val="F5F7FF"/>
                 </a:solidFill>
@@ -3328,8 +3328,8 @@
         </p:nvSpPr>
         <p:spPr>
           <a:xfrm>
-            <a:off x="502920" y="201168"/>
-            <a:ext cx="6400800" cy="201168"/>
+            <a:off x="640080" y="256032"/>
+            <a:ext cx="9144000" cy="256032"/>
           </a:xfrm>
           <a:prstGeom prst="rect">
             <a:avLst/>
@@ -3337,13 +3337,13 @@
           <a:noFill/>
         </p:spPr>
         <p:txBody>
-          <a:bodyPr wrap="square" lIns="27432" rIns="27432" tIns="18288" bIns="18288">
+          <a:bodyPr wrap="square" lIns="45720" rIns="45720" tIns="27432" bIns="27432">
             <a:spAutoFit/>
           </a:bodyPr>
           <a:lstStyle/>
           <a:p>
             <a:r>
-              <a:rPr sz="900" b="1">
+              <a:rPr sz="1100" b="1">
                 <a:solidFill>
                   <a:srgbClr val="AEB8E0"/>
                 </a:solidFill>
@@ -3362,8 +3362,8 @@
         </p:nvSpPr>
         <p:spPr>
           <a:xfrm>
-            <a:off x="502920" y="1115568"/>
-            <a:ext cx="1097280" cy="45720"/>
+            <a:off x="640080" y="1371600"/>
+            <a:ext cx="1463040" cy="54864"/>
           </a:xfrm>
           <a:prstGeom prst="rect">
             <a:avLst/>
@@ -3405,8 +3405,8 @@
         </p:nvSpPr>
         <p:spPr>
           <a:xfrm>
-            <a:off x="548640" y="1261872"/>
-            <a:ext cx="3977640" cy="3456432"/>
+            <a:off x="640080" y="1691640"/>
+            <a:ext cx="5646420" cy="4709160"/>
           </a:xfrm>
           <a:prstGeom prst="roundRect">
             <a:avLst/>
@@ -3414,7 +3414,7 @@
           <a:solidFill>
             <a:srgbClr val="1B2241"/>
           </a:solidFill>
-          <a:ln>
+          <a:ln w="9525">
             <a:solidFill>
               <a:srgbClr val="161E45"/>
             </a:solidFill>
@@ -3450,8 +3450,8 @@
         </p:nvSpPr>
         <p:spPr>
           <a:xfrm>
-            <a:off x="548640" y="1261872"/>
-            <a:ext cx="3977640" cy="64008"/>
+            <a:off x="640080" y="1691640"/>
+            <a:ext cx="5646420" cy="82296"/>
           </a:xfrm>
           <a:prstGeom prst="rect">
             <a:avLst/>
@@ -3493,8 +3493,8 @@
         </p:nvSpPr>
         <p:spPr>
           <a:xfrm>
-            <a:off x="685800" y="1463040"/>
-            <a:ext cx="3703320" cy="274320"/>
+            <a:off x="822959" y="1874520"/>
+            <a:ext cx="5280659" cy="365760"/>
           </a:xfrm>
           <a:prstGeom prst="rect">
             <a:avLst/>
@@ -3502,13 +3502,13 @@
           <a:noFill/>
         </p:spPr>
         <p:txBody>
-          <a:bodyPr wrap="square" lIns="27432" rIns="27432" tIns="18288" bIns="18288">
+          <a:bodyPr wrap="square" lIns="45720" rIns="45720" tIns="27432" bIns="27432">
             <a:spAutoFit/>
           </a:bodyPr>
           <a:lstStyle/>
           <a:p>
             <a:r>
-              <a:rPr sz="1300" b="1">
+              <a:rPr sz="1600" b="1">
                 <a:solidFill>
                   <a:srgbClr val="0E8E92"/>
                 </a:solidFill>
@@ -3527,8 +3527,8 @@
         </p:nvSpPr>
         <p:spPr>
           <a:xfrm>
-            <a:off x="713232" y="1828800"/>
-            <a:ext cx="3648456" cy="228600"/>
+            <a:off x="822959" y="2423160"/>
+            <a:ext cx="5280659" cy="640080"/>
           </a:xfrm>
           <a:prstGeom prst="rect">
             <a:avLst/>
@@ -3536,13 +3536,13 @@
           <a:noFill/>
         </p:spPr>
         <p:txBody>
-          <a:bodyPr wrap="square" lIns="27432" rIns="27432" tIns="18288" bIns="18288">
+          <a:bodyPr wrap="square" lIns="45720" rIns="45720" tIns="27432" bIns="27432">
             <a:spAutoFit/>
           </a:bodyPr>
           <a:lstStyle/>
           <a:p>
             <a:r>
-              <a:rPr sz="1000" b="1">
+              <a:rPr sz="1400" b="1">
                 <a:solidFill>
                   <a:srgbClr val="F5F7FF"/>
                 </a:solidFill>
@@ -3561,8 +3561,8 @@
         </p:nvSpPr>
         <p:spPr>
           <a:xfrm>
-            <a:off x="713232" y="2048256"/>
-            <a:ext cx="3648456" cy="301752"/>
+            <a:off x="822959" y="3063240"/>
+            <a:ext cx="5280659" cy="685800"/>
           </a:xfrm>
           <a:prstGeom prst="rect">
             <a:avLst/>
@@ -3570,13 +3570,13 @@
           <a:noFill/>
         </p:spPr>
         <p:txBody>
-          <a:bodyPr wrap="square" lIns="27432" rIns="27432" tIns="18288" bIns="18288">
+          <a:bodyPr wrap="square" lIns="45720" rIns="45720" tIns="27432" bIns="27432">
             <a:spAutoFit/>
           </a:bodyPr>
           <a:lstStyle/>
           <a:p>
             <a:r>
-              <a:rPr sz="900" b="0">
+              <a:rPr sz="1200" b="0">
                 <a:solidFill>
                   <a:srgbClr val="AEB8E0"/>
                 </a:solidFill>
@@ -3595,8 +3595,8 @@
         </p:nvSpPr>
         <p:spPr>
           <a:xfrm>
-            <a:off x="4681728" y="1261872"/>
-            <a:ext cx="3977640" cy="3456432"/>
+            <a:off x="6515100" y="1691640"/>
+            <a:ext cx="5646420" cy="4709160"/>
           </a:xfrm>
           <a:prstGeom prst="roundRect">
             <a:avLst/>
@@ -3604,7 +3604,7 @@
           <a:solidFill>
             <a:srgbClr val="1B2241"/>
           </a:solidFill>
-          <a:ln>
+          <a:ln w="9525">
             <a:solidFill>
               <a:srgbClr val="161E45"/>
             </a:solidFill>
@@ -3640,8 +3640,8 @@
         </p:nvSpPr>
         <p:spPr>
           <a:xfrm>
-            <a:off x="4681728" y="1261872"/>
-            <a:ext cx="3977640" cy="64008"/>
+            <a:off x="6515100" y="1691640"/>
+            <a:ext cx="5646420" cy="82296"/>
           </a:xfrm>
           <a:prstGeom prst="rect">
             <a:avLst/>
@@ -3683,8 +3683,8 @@
         </p:nvSpPr>
         <p:spPr>
           <a:xfrm>
-            <a:off x="4818888" y="1463040"/>
-            <a:ext cx="3703320" cy="274320"/>
+            <a:off x="6697980" y="1874520"/>
+            <a:ext cx="5280659" cy="365760"/>
           </a:xfrm>
           <a:prstGeom prst="rect">
             <a:avLst/>
@@ -3692,13 +3692,13 @@
           <a:noFill/>
         </p:spPr>
         <p:txBody>
-          <a:bodyPr wrap="square" lIns="27432" rIns="27432" tIns="18288" bIns="18288">
+          <a:bodyPr wrap="square" lIns="45720" rIns="45720" tIns="27432" bIns="27432">
             <a:spAutoFit/>
           </a:bodyPr>
           <a:lstStyle/>
           <a:p>
             <a:r>
-              <a:rPr sz="1300" b="1">
+              <a:rPr sz="1600" b="1">
                 <a:solidFill>
                   <a:srgbClr val="0E8E92"/>
                 </a:solidFill>
@@ -3717,8 +3717,8 @@
         </p:nvSpPr>
         <p:spPr>
           <a:xfrm>
-            <a:off x="4846320" y="1828800"/>
-            <a:ext cx="3648456" cy="228600"/>
+            <a:off x="6697980" y="2423160"/>
+            <a:ext cx="5280659" cy="640080"/>
           </a:xfrm>
           <a:prstGeom prst="rect">
             <a:avLst/>
@@ -3726,13 +3726,13 @@
           <a:noFill/>
         </p:spPr>
         <p:txBody>
-          <a:bodyPr wrap="square" lIns="27432" rIns="27432" tIns="18288" bIns="18288">
+          <a:bodyPr wrap="square" lIns="45720" rIns="45720" tIns="27432" bIns="27432">
             <a:spAutoFit/>
           </a:bodyPr>
           <a:lstStyle/>
           <a:p>
             <a:r>
-              <a:rPr sz="1000" b="1">
+              <a:rPr sz="1400" b="1">
                 <a:solidFill>
                   <a:srgbClr val="F5F7FF"/>
                 </a:solidFill>
@@ -3751,8 +3751,8 @@
         </p:nvSpPr>
         <p:spPr>
           <a:xfrm>
-            <a:off x="4846320" y="2048256"/>
-            <a:ext cx="3648456" cy="301752"/>
+            <a:off x="6697980" y="3063240"/>
+            <a:ext cx="5280659" cy="685800"/>
           </a:xfrm>
           <a:prstGeom prst="rect">
             <a:avLst/>
@@ -3760,13 +3760,13 @@
           <a:noFill/>
         </p:spPr>
         <p:txBody>
-          <a:bodyPr wrap="square" lIns="27432" rIns="27432" tIns="18288" bIns="18288">
+          <a:bodyPr wrap="square" lIns="45720" rIns="45720" tIns="27432" bIns="27432">
             <a:spAutoFit/>
           </a:bodyPr>
           <a:lstStyle/>
           <a:p>
             <a:r>
-              <a:rPr sz="900" b="0">
+              <a:rPr sz="1200" b="0">
                 <a:solidFill>
                   <a:srgbClr val="AEB8E0"/>
                 </a:solidFill>
@@ -3815,8 +3815,8 @@
         </p:nvSpPr>
         <p:spPr>
           <a:xfrm>
-            <a:off x="502920" y="384048"/>
-            <a:ext cx="8138160" cy="713232"/>
+            <a:off x="640080" y="502920"/>
+            <a:ext cx="10972800" cy="822960"/>
           </a:xfrm>
         </p:spPr>
         <p:txBody>
@@ -3825,7 +3825,7 @@
           <a:p>
             <a:pPr algn="l"/>
             <a:r>
-              <a:rPr sz="2200" b="1">
+              <a:rPr sz="2800" b="1">
                 <a:solidFill>
                   <a:srgbClr val="F5F7FF"/>
                 </a:solidFill>
@@ -3844,8 +3844,8 @@
         </p:nvSpPr>
         <p:spPr>
           <a:xfrm>
-            <a:off x="502920" y="201168"/>
-            <a:ext cx="6400800" cy="201168"/>
+            <a:off x="640080" y="256032"/>
+            <a:ext cx="9144000" cy="256032"/>
           </a:xfrm>
           <a:prstGeom prst="rect">
             <a:avLst/>
@@ -3853,13 +3853,13 @@
           <a:noFill/>
         </p:spPr>
         <p:txBody>
-          <a:bodyPr wrap="square" lIns="27432" rIns="27432" tIns="18288" bIns="18288">
+          <a:bodyPr wrap="square" lIns="45720" rIns="45720" tIns="27432" bIns="27432">
             <a:spAutoFit/>
           </a:bodyPr>
           <a:lstStyle/>
           <a:p>
             <a:r>
-              <a:rPr sz="900" b="1">
+              <a:rPr sz="1100" b="1">
                 <a:solidFill>
                   <a:srgbClr val="AEB8E0"/>
                 </a:solidFill>
@@ -3878,8 +3878,8 @@
         </p:nvSpPr>
         <p:spPr>
           <a:xfrm>
-            <a:off x="502920" y="1115568"/>
-            <a:ext cx="1097280" cy="45720"/>
+            <a:off x="640080" y="1371600"/>
+            <a:ext cx="1463040" cy="54864"/>
           </a:xfrm>
           <a:prstGeom prst="rect">
             <a:avLst/>
@@ -3921,8 +3921,8 @@
         </p:nvSpPr>
         <p:spPr>
           <a:xfrm>
-            <a:off x="548640" y="1261872"/>
-            <a:ext cx="2636520" cy="3456432"/>
+            <a:off x="640080" y="1691640"/>
+            <a:ext cx="3688080" cy="4709160"/>
           </a:xfrm>
           <a:prstGeom prst="roundRect">
             <a:avLst/>
@@ -3930,7 +3930,7 @@
           <a:solidFill>
             <a:srgbClr val="1B2241"/>
           </a:solidFill>
-          <a:ln>
+          <a:ln w="9525">
             <a:solidFill>
               <a:srgbClr val="161E45"/>
             </a:solidFill>
@@ -3966,8 +3966,8 @@
         </p:nvSpPr>
         <p:spPr>
           <a:xfrm>
-            <a:off x="548640" y="1261872"/>
-            <a:ext cx="2636520" cy="64008"/>
+            <a:off x="640080" y="1691640"/>
+            <a:ext cx="3688080" cy="82296"/>
           </a:xfrm>
           <a:prstGeom prst="rect">
             <a:avLst/>
@@ -4009,8 +4009,8 @@
         </p:nvSpPr>
         <p:spPr>
           <a:xfrm>
-            <a:off x="685800" y="1463040"/>
-            <a:ext cx="2362200" cy="274320"/>
+            <a:off x="822959" y="1874520"/>
+            <a:ext cx="3322320" cy="365760"/>
           </a:xfrm>
           <a:prstGeom prst="rect">
             <a:avLst/>
@@ -4018,13 +4018,13 @@
           <a:noFill/>
         </p:spPr>
         <p:txBody>
-          <a:bodyPr wrap="square" lIns="27432" rIns="27432" tIns="18288" bIns="18288">
+          <a:bodyPr wrap="square" lIns="45720" rIns="45720" tIns="27432" bIns="27432">
             <a:spAutoFit/>
           </a:bodyPr>
           <a:lstStyle/>
           <a:p>
             <a:r>
-              <a:rPr sz="1300" b="1">
+              <a:rPr sz="1600" b="1">
                 <a:solidFill>
                   <a:srgbClr val="C73E78"/>
                 </a:solidFill>
@@ -4043,8 +4043,8 @@
         </p:nvSpPr>
         <p:spPr>
           <a:xfrm>
-            <a:off x="713232" y="1828800"/>
-            <a:ext cx="2307336" cy="384048"/>
+            <a:off x="822959" y="2423160"/>
+            <a:ext cx="3322320" cy="548640"/>
           </a:xfrm>
           <a:prstGeom prst="rect">
             <a:avLst/>
@@ -4052,13 +4052,13 @@
           <a:noFill/>
         </p:spPr>
         <p:txBody>
-          <a:bodyPr wrap="square" lIns="27432" rIns="27432" tIns="18288" bIns="18288">
+          <a:bodyPr wrap="square" lIns="45720" rIns="45720" tIns="27432" bIns="27432">
             <a:spAutoFit/>
           </a:bodyPr>
           <a:lstStyle/>
           <a:p>
             <a:r>
-              <a:rPr sz="800" b="1">
+              <a:rPr sz="1200" b="1">
                 <a:solidFill>
                   <a:srgbClr val="F5F7FF"/>
                 </a:solidFill>
@@ -4077,8 +4077,8 @@
         </p:nvSpPr>
         <p:spPr>
           <a:xfrm>
-            <a:off x="713232" y="2139696"/>
-            <a:ext cx="2307336" cy="310896"/>
+            <a:off x="822959" y="2971800"/>
+            <a:ext cx="3322320" cy="365760"/>
           </a:xfrm>
           <a:prstGeom prst="rect">
             <a:avLst/>
@@ -4086,13 +4086,13 @@
           <a:noFill/>
         </p:spPr>
         <p:txBody>
-          <a:bodyPr wrap="square" lIns="27432" rIns="27432" tIns="18288" bIns="18288">
+          <a:bodyPr wrap="square" lIns="45720" rIns="45720" tIns="27432" bIns="27432">
             <a:spAutoFit/>
           </a:bodyPr>
           <a:lstStyle/>
           <a:p>
             <a:r>
-              <a:rPr sz="700" b="0">
+              <a:rPr sz="1000" b="0">
                 <a:solidFill>
                   <a:srgbClr val="AEB8E0"/>
                 </a:solidFill>
@@ -4111,8 +4111,8 @@
         </p:nvSpPr>
         <p:spPr>
           <a:xfrm>
-            <a:off x="713232" y="2523744"/>
-            <a:ext cx="2307336" cy="384048"/>
+            <a:off x="822959" y="3383280"/>
+            <a:ext cx="3322320" cy="548640"/>
           </a:xfrm>
           <a:prstGeom prst="rect">
             <a:avLst/>
@@ -4120,13 +4120,13 @@
           <a:noFill/>
         </p:spPr>
         <p:txBody>
-          <a:bodyPr wrap="square" lIns="27432" rIns="27432" tIns="18288" bIns="18288">
+          <a:bodyPr wrap="square" lIns="45720" rIns="45720" tIns="27432" bIns="27432">
             <a:spAutoFit/>
           </a:bodyPr>
           <a:lstStyle/>
           <a:p>
             <a:r>
-              <a:rPr sz="800" b="1">
+              <a:rPr sz="1200" b="1">
                 <a:solidFill>
                   <a:srgbClr val="F5F7FF"/>
                 </a:solidFill>
@@ -4145,8 +4145,8 @@
         </p:nvSpPr>
         <p:spPr>
           <a:xfrm>
-            <a:off x="713232" y="2834639"/>
-            <a:ext cx="2307336" cy="310896"/>
+            <a:off x="822959" y="3931920"/>
+            <a:ext cx="3322320" cy="365760"/>
           </a:xfrm>
           <a:prstGeom prst="rect">
             <a:avLst/>
@@ -4154,13 +4154,13 @@
           <a:noFill/>
         </p:spPr>
         <p:txBody>
-          <a:bodyPr wrap="square" lIns="27432" rIns="27432" tIns="18288" bIns="18288">
+          <a:bodyPr wrap="square" lIns="45720" rIns="45720" tIns="27432" bIns="27432">
             <a:spAutoFit/>
           </a:bodyPr>
           <a:lstStyle/>
           <a:p>
             <a:r>
-              <a:rPr sz="700" b="0">
+              <a:rPr sz="1000" b="0">
                 <a:solidFill>
                   <a:srgbClr val="AEB8E0"/>
                 </a:solidFill>
@@ -4179,8 +4179,8 @@
         </p:nvSpPr>
         <p:spPr>
           <a:xfrm>
-            <a:off x="713232" y="3218687"/>
-            <a:ext cx="2307336" cy="384048"/>
+            <a:off x="822959" y="4343400"/>
+            <a:ext cx="3322320" cy="548640"/>
           </a:xfrm>
           <a:prstGeom prst="rect">
             <a:avLst/>
@@ -4188,13 +4188,13 @@
           <a:noFill/>
         </p:spPr>
         <p:txBody>
-          <a:bodyPr wrap="square" lIns="27432" rIns="27432" tIns="18288" bIns="18288">
+          <a:bodyPr wrap="square" lIns="45720" rIns="45720" tIns="27432" bIns="27432">
             <a:spAutoFit/>
           </a:bodyPr>
           <a:lstStyle/>
           <a:p>
             <a:r>
-              <a:rPr sz="800" b="1">
+              <a:rPr sz="1200" b="1">
                 <a:solidFill>
                   <a:srgbClr val="F5F7FF"/>
                 </a:solidFill>
@@ -4213,8 +4213,8 @@
         </p:nvSpPr>
         <p:spPr>
           <a:xfrm>
-            <a:off x="713232" y="3529583"/>
-            <a:ext cx="2307336" cy="310896"/>
+            <a:off x="822959" y="4892040"/>
+            <a:ext cx="3322320" cy="365760"/>
           </a:xfrm>
           <a:prstGeom prst="rect">
             <a:avLst/>
@@ -4222,13 +4222,13 @@
           <a:noFill/>
         </p:spPr>
         <p:txBody>
-          <a:bodyPr wrap="square" lIns="27432" rIns="27432" tIns="18288" bIns="18288">
+          <a:bodyPr wrap="square" lIns="45720" rIns="45720" tIns="27432" bIns="27432">
             <a:spAutoFit/>
           </a:bodyPr>
           <a:lstStyle/>
           <a:p>
             <a:r>
-              <a:rPr sz="700" b="0">
+              <a:rPr sz="1000" b="0">
                 <a:solidFill>
                   <a:srgbClr val="AEB8E0"/>
                 </a:solidFill>
@@ -4247,8 +4247,8 @@
         </p:nvSpPr>
         <p:spPr>
           <a:xfrm>
-            <a:off x="713232" y="3913631"/>
-            <a:ext cx="2307336" cy="384048"/>
+            <a:off x="822959" y="5303520"/>
+            <a:ext cx="3322320" cy="548640"/>
           </a:xfrm>
           <a:prstGeom prst="rect">
             <a:avLst/>
@@ -4256,13 +4256,13 @@
           <a:noFill/>
         </p:spPr>
         <p:txBody>
-          <a:bodyPr wrap="square" lIns="27432" rIns="27432" tIns="18288" bIns="18288">
+          <a:bodyPr wrap="square" lIns="45720" rIns="45720" tIns="27432" bIns="27432">
             <a:spAutoFit/>
           </a:bodyPr>
           <a:lstStyle/>
           <a:p>
             <a:r>
-              <a:rPr sz="800" b="1">
+              <a:rPr sz="1200" b="1">
                 <a:solidFill>
                   <a:srgbClr val="F5F7FF"/>
                 </a:solidFill>
@@ -4281,8 +4281,8 @@
         </p:nvSpPr>
         <p:spPr>
           <a:xfrm>
-            <a:off x="713232" y="4224527"/>
-            <a:ext cx="2307336" cy="310896"/>
+            <a:off x="822959" y="5852159"/>
+            <a:ext cx="3322320" cy="365760"/>
           </a:xfrm>
           <a:prstGeom prst="rect">
             <a:avLst/>
@@ -4290,13 +4290,13 @@
           <a:noFill/>
         </p:spPr>
         <p:txBody>
-          <a:bodyPr wrap="square" lIns="27432" rIns="27432" tIns="18288" bIns="18288">
+          <a:bodyPr wrap="square" lIns="45720" rIns="45720" tIns="27432" bIns="27432">
             <a:spAutoFit/>
           </a:bodyPr>
           <a:lstStyle/>
           <a:p>
             <a:r>
-              <a:rPr sz="700" b="0">
+              <a:rPr sz="1000" b="0">
                 <a:solidFill>
                   <a:srgbClr val="AEB8E0"/>
                 </a:solidFill>
@@ -4315,8 +4315,8 @@
         </p:nvSpPr>
         <p:spPr>
           <a:xfrm>
-            <a:off x="3340608" y="1261872"/>
-            <a:ext cx="2636520" cy="3456432"/>
+            <a:off x="4556760" y="1691640"/>
+            <a:ext cx="3688080" cy="4709160"/>
           </a:xfrm>
           <a:prstGeom prst="roundRect">
             <a:avLst/>
@@ -4324,7 +4324,7 @@
           <a:solidFill>
             <a:srgbClr val="1B2241"/>
           </a:solidFill>
-          <a:ln>
+          <a:ln w="9525">
             <a:solidFill>
               <a:srgbClr val="161E45"/>
             </a:solidFill>
@@ -4360,8 +4360,8 @@
         </p:nvSpPr>
         <p:spPr>
           <a:xfrm>
-            <a:off x="3340608" y="1261872"/>
-            <a:ext cx="2636520" cy="64008"/>
+            <a:off x="4556760" y="1691640"/>
+            <a:ext cx="3688080" cy="82296"/>
           </a:xfrm>
           <a:prstGeom prst="rect">
             <a:avLst/>
@@ -4403,8 +4403,8 @@
         </p:nvSpPr>
         <p:spPr>
           <a:xfrm>
-            <a:off x="3477768" y="1463040"/>
-            <a:ext cx="2362200" cy="274320"/>
+            <a:off x="4739640" y="1874520"/>
+            <a:ext cx="3322320" cy="365760"/>
           </a:xfrm>
           <a:prstGeom prst="rect">
             <a:avLst/>
@@ -4412,13 +4412,13 @@
           <a:noFill/>
         </p:spPr>
         <p:txBody>
-          <a:bodyPr wrap="square" lIns="27432" rIns="27432" tIns="18288" bIns="18288">
+          <a:bodyPr wrap="square" lIns="45720" rIns="45720" tIns="27432" bIns="27432">
             <a:spAutoFit/>
           </a:bodyPr>
           <a:lstStyle/>
           <a:p>
             <a:r>
-              <a:rPr sz="1300" b="1">
+              <a:rPr sz="1600" b="1">
                 <a:solidFill>
                   <a:srgbClr val="C73E78"/>
                 </a:solidFill>
@@ -4437,8 +4437,8 @@
         </p:nvSpPr>
         <p:spPr>
           <a:xfrm>
-            <a:off x="3505200" y="1828800"/>
-            <a:ext cx="2307336" cy="384048"/>
+            <a:off x="4739640" y="2423160"/>
+            <a:ext cx="3322320" cy="548640"/>
           </a:xfrm>
           <a:prstGeom prst="rect">
             <a:avLst/>
@@ -4446,13 +4446,13 @@
           <a:noFill/>
         </p:spPr>
         <p:txBody>
-          <a:bodyPr wrap="square" lIns="27432" rIns="27432" tIns="18288" bIns="18288">
+          <a:bodyPr wrap="square" lIns="45720" rIns="45720" tIns="27432" bIns="27432">
             <a:spAutoFit/>
           </a:bodyPr>
           <a:lstStyle/>
           <a:p>
             <a:r>
-              <a:rPr sz="800" b="1">
+              <a:rPr sz="1200" b="1">
                 <a:solidFill>
                   <a:srgbClr val="F5F7FF"/>
                 </a:solidFill>
@@ -4471,8 +4471,8 @@
         </p:nvSpPr>
         <p:spPr>
           <a:xfrm>
-            <a:off x="3505200" y="2139696"/>
-            <a:ext cx="2307336" cy="310896"/>
+            <a:off x="4739640" y="2971800"/>
+            <a:ext cx="3322320" cy="365760"/>
           </a:xfrm>
           <a:prstGeom prst="rect">
             <a:avLst/>
@@ -4480,13 +4480,13 @@
           <a:noFill/>
         </p:spPr>
         <p:txBody>
-          <a:bodyPr wrap="square" lIns="27432" rIns="27432" tIns="18288" bIns="18288">
+          <a:bodyPr wrap="square" lIns="45720" rIns="45720" tIns="27432" bIns="27432">
             <a:spAutoFit/>
           </a:bodyPr>
           <a:lstStyle/>
           <a:p>
             <a:r>
-              <a:rPr sz="700" b="0">
+              <a:rPr sz="1000" b="0">
                 <a:solidFill>
                   <a:srgbClr val="AEB8E0"/>
                 </a:solidFill>
@@ -4505,8 +4505,8 @@
         </p:nvSpPr>
         <p:spPr>
           <a:xfrm>
-            <a:off x="3505200" y="2523744"/>
-            <a:ext cx="2307336" cy="384048"/>
+            <a:off x="4739640" y="3383280"/>
+            <a:ext cx="3322320" cy="548640"/>
           </a:xfrm>
           <a:prstGeom prst="rect">
             <a:avLst/>
@@ -4514,13 +4514,13 @@
           <a:noFill/>
         </p:spPr>
         <p:txBody>
-          <a:bodyPr wrap="square" lIns="27432" rIns="27432" tIns="18288" bIns="18288">
+          <a:bodyPr wrap="square" lIns="45720" rIns="45720" tIns="27432" bIns="27432">
             <a:spAutoFit/>
           </a:bodyPr>
           <a:lstStyle/>
           <a:p>
             <a:r>
-              <a:rPr sz="800" b="1">
+              <a:rPr sz="1200" b="1">
                 <a:solidFill>
                   <a:srgbClr val="F5F7FF"/>
                 </a:solidFill>
@@ -4539,8 +4539,8 @@
         </p:nvSpPr>
         <p:spPr>
           <a:xfrm>
-            <a:off x="3505200" y="2834639"/>
-            <a:ext cx="2307336" cy="310896"/>
+            <a:off x="4739640" y="3931920"/>
+            <a:ext cx="3322320" cy="365760"/>
           </a:xfrm>
           <a:prstGeom prst="rect">
             <a:avLst/>
@@ -4548,13 +4548,13 @@
           <a:noFill/>
         </p:spPr>
         <p:txBody>
-          <a:bodyPr wrap="square" lIns="27432" rIns="27432" tIns="18288" bIns="18288">
+          <a:bodyPr wrap="square" lIns="45720" rIns="45720" tIns="27432" bIns="27432">
             <a:spAutoFit/>
           </a:bodyPr>
           <a:lstStyle/>
           <a:p>
             <a:r>
-              <a:rPr sz="700" b="0">
+              <a:rPr sz="1000" b="0">
                 <a:solidFill>
                   <a:srgbClr val="AEB8E0"/>
                 </a:solidFill>
@@ -4573,8 +4573,8 @@
         </p:nvSpPr>
         <p:spPr>
           <a:xfrm>
-            <a:off x="3505200" y="3218687"/>
-            <a:ext cx="2307336" cy="384048"/>
+            <a:off x="4739640" y="4343400"/>
+            <a:ext cx="3322320" cy="548640"/>
           </a:xfrm>
           <a:prstGeom prst="rect">
             <a:avLst/>
@@ -4582,13 +4582,13 @@
           <a:noFill/>
         </p:spPr>
         <p:txBody>
-          <a:bodyPr wrap="square" lIns="27432" rIns="27432" tIns="18288" bIns="18288">
+          <a:bodyPr wrap="square" lIns="45720" rIns="45720" tIns="27432" bIns="27432">
             <a:spAutoFit/>
           </a:bodyPr>
           <a:lstStyle/>
           <a:p>
             <a:r>
-              <a:rPr sz="800" b="1">
+              <a:rPr sz="1200" b="1">
                 <a:solidFill>
                   <a:srgbClr val="F5F7FF"/>
                 </a:solidFill>
@@ -4607,8 +4607,8 @@
         </p:nvSpPr>
         <p:spPr>
           <a:xfrm>
-            <a:off x="3505200" y="3529583"/>
-            <a:ext cx="2307336" cy="310896"/>
+            <a:off x="4739640" y="4892040"/>
+            <a:ext cx="3322320" cy="365760"/>
           </a:xfrm>
           <a:prstGeom prst="rect">
             <a:avLst/>
@@ -4616,13 +4616,13 @@
           <a:noFill/>
         </p:spPr>
         <p:txBody>
-          <a:bodyPr wrap="square" lIns="27432" rIns="27432" tIns="18288" bIns="18288">
+          <a:bodyPr wrap="square" lIns="45720" rIns="45720" tIns="27432" bIns="27432">
             <a:spAutoFit/>
           </a:bodyPr>
           <a:lstStyle/>
           <a:p>
             <a:r>
-              <a:rPr sz="700" b="0">
+              <a:rPr sz="1000" b="0">
                 <a:solidFill>
                   <a:srgbClr val="AEB8E0"/>
                 </a:solidFill>
@@ -4641,8 +4641,8 @@
         </p:nvSpPr>
         <p:spPr>
           <a:xfrm>
-            <a:off x="3505200" y="3913631"/>
-            <a:ext cx="2307336" cy="384048"/>
+            <a:off x="4739640" y="5303520"/>
+            <a:ext cx="3322320" cy="548640"/>
           </a:xfrm>
           <a:prstGeom prst="rect">
             <a:avLst/>
@@ -4650,13 +4650,13 @@
           <a:noFill/>
         </p:spPr>
         <p:txBody>
-          <a:bodyPr wrap="square" lIns="27432" rIns="27432" tIns="18288" bIns="18288">
+          <a:bodyPr wrap="square" lIns="45720" rIns="45720" tIns="27432" bIns="27432">
             <a:spAutoFit/>
           </a:bodyPr>
           <a:lstStyle/>
           <a:p>
             <a:r>
-              <a:rPr sz="800" b="1">
+              <a:rPr sz="1200" b="1">
                 <a:solidFill>
                   <a:srgbClr val="F5F7FF"/>
                 </a:solidFill>
@@ -4675,8 +4675,8 @@
         </p:nvSpPr>
         <p:spPr>
           <a:xfrm>
-            <a:off x="3505200" y="4224527"/>
-            <a:ext cx="2307336" cy="310896"/>
+            <a:off x="4739640" y="5852159"/>
+            <a:ext cx="3322320" cy="365760"/>
           </a:xfrm>
           <a:prstGeom prst="rect">
             <a:avLst/>
@@ -4684,13 +4684,13 @@
           <a:noFill/>
         </p:spPr>
         <p:txBody>
-          <a:bodyPr wrap="square" lIns="27432" rIns="27432" tIns="18288" bIns="18288">
+          <a:bodyPr wrap="square" lIns="45720" rIns="45720" tIns="27432" bIns="27432">
             <a:spAutoFit/>
           </a:bodyPr>
           <a:lstStyle/>
           <a:p>
             <a:r>
-              <a:rPr sz="700" b="0">
+              <a:rPr sz="1000" b="0">
                 <a:solidFill>
                   <a:srgbClr val="AEB8E0"/>
                 </a:solidFill>
@@ -4709,8 +4709,8 @@
         </p:nvSpPr>
         <p:spPr>
           <a:xfrm>
-            <a:off x="6132576" y="1261872"/>
-            <a:ext cx="2636520" cy="3456432"/>
+            <a:off x="8473440" y="1691640"/>
+            <a:ext cx="3688080" cy="4709160"/>
           </a:xfrm>
           <a:prstGeom prst="roundRect">
             <a:avLst/>
@@ -4718,7 +4718,7 @@
           <a:solidFill>
             <a:srgbClr val="1B2241"/>
           </a:solidFill>
-          <a:ln>
+          <a:ln w="9525">
             <a:solidFill>
               <a:srgbClr val="161E45"/>
             </a:solidFill>
@@ -4754,8 +4754,8 @@
         </p:nvSpPr>
         <p:spPr>
           <a:xfrm>
-            <a:off x="6132576" y="1261872"/>
-            <a:ext cx="2636520" cy="64008"/>
+            <a:off x="8473440" y="1691640"/>
+            <a:ext cx="3688080" cy="82296"/>
           </a:xfrm>
           <a:prstGeom prst="rect">
             <a:avLst/>
@@ -4797,8 +4797,8 @@
         </p:nvSpPr>
         <p:spPr>
           <a:xfrm>
-            <a:off x="6269736" y="1463040"/>
-            <a:ext cx="2362200" cy="274320"/>
+            <a:off x="8656319" y="1874520"/>
+            <a:ext cx="3322320" cy="365760"/>
           </a:xfrm>
           <a:prstGeom prst="rect">
             <a:avLst/>
@@ -4806,13 +4806,13 @@
           <a:noFill/>
         </p:spPr>
         <p:txBody>
-          <a:bodyPr wrap="square" lIns="27432" rIns="27432" tIns="18288" bIns="18288">
+          <a:bodyPr wrap="square" lIns="45720" rIns="45720" tIns="27432" bIns="27432">
             <a:spAutoFit/>
           </a:bodyPr>
           <a:lstStyle/>
           <a:p>
             <a:r>
-              <a:rPr sz="1300" b="1">
+              <a:rPr sz="1600" b="1">
                 <a:solidFill>
                   <a:srgbClr val="C73E78"/>
                 </a:solidFill>
@@ -4831,8 +4831,8 @@
         </p:nvSpPr>
         <p:spPr>
           <a:xfrm>
-            <a:off x="6297168" y="1828800"/>
-            <a:ext cx="2307336" cy="384048"/>
+            <a:off x="8656319" y="2423160"/>
+            <a:ext cx="3322320" cy="594360"/>
           </a:xfrm>
           <a:prstGeom prst="rect">
             <a:avLst/>
@@ -4840,13 +4840,13 @@
           <a:noFill/>
         </p:spPr>
         <p:txBody>
-          <a:bodyPr wrap="square" lIns="27432" rIns="27432" tIns="18288" bIns="18288">
+          <a:bodyPr wrap="square" lIns="45720" rIns="45720" tIns="27432" bIns="27432">
             <a:spAutoFit/>
           </a:bodyPr>
           <a:lstStyle/>
           <a:p>
             <a:r>
-              <a:rPr sz="800" b="1">
+              <a:rPr sz="1300" b="1">
                 <a:solidFill>
                   <a:srgbClr val="F5F7FF"/>
                 </a:solidFill>
@@ -4865,8 +4865,8 @@
         </p:nvSpPr>
         <p:spPr>
           <a:xfrm>
-            <a:off x="6297168" y="2139696"/>
-            <a:ext cx="2307336" cy="310896"/>
+            <a:off x="8656319" y="3017520"/>
+            <a:ext cx="3322320" cy="502919"/>
           </a:xfrm>
           <a:prstGeom prst="rect">
             <a:avLst/>
@@ -4874,13 +4874,13 @@
           <a:noFill/>
         </p:spPr>
         <p:txBody>
-          <a:bodyPr wrap="square" lIns="27432" rIns="27432" tIns="18288" bIns="18288">
+          <a:bodyPr wrap="square" lIns="45720" rIns="45720" tIns="27432" bIns="27432">
             <a:spAutoFit/>
           </a:bodyPr>
           <a:lstStyle/>
           <a:p>
             <a:r>
-              <a:rPr sz="700" b="0">
+              <a:rPr sz="1100" b="0">
                 <a:solidFill>
                   <a:srgbClr val="AEB8E0"/>
                 </a:solidFill>
@@ -4899,8 +4899,8 @@
         </p:nvSpPr>
         <p:spPr>
           <a:xfrm>
-            <a:off x="6297168" y="2523744"/>
-            <a:ext cx="2307336" cy="384048"/>
+            <a:off x="8656319" y="3566160"/>
+            <a:ext cx="3322320" cy="594360"/>
           </a:xfrm>
           <a:prstGeom prst="rect">
             <a:avLst/>
@@ -4908,13 +4908,13 @@
           <a:noFill/>
         </p:spPr>
         <p:txBody>
-          <a:bodyPr wrap="square" lIns="27432" rIns="27432" tIns="18288" bIns="18288">
+          <a:bodyPr wrap="square" lIns="45720" rIns="45720" tIns="27432" bIns="27432">
             <a:spAutoFit/>
           </a:bodyPr>
           <a:lstStyle/>
           <a:p>
             <a:r>
-              <a:rPr sz="800" b="1">
+              <a:rPr sz="1300" b="1">
                 <a:solidFill>
                   <a:srgbClr val="F5F7FF"/>
                 </a:solidFill>
@@ -4933,8 +4933,8 @@
         </p:nvSpPr>
         <p:spPr>
           <a:xfrm>
-            <a:off x="6297168" y="2834639"/>
-            <a:ext cx="2307336" cy="310896"/>
+            <a:off x="8656319" y="4160520"/>
+            <a:ext cx="3322320" cy="502919"/>
           </a:xfrm>
           <a:prstGeom prst="rect">
             <a:avLst/>
@@ -4942,13 +4942,13 @@
           <a:noFill/>
         </p:spPr>
         <p:txBody>
-          <a:bodyPr wrap="square" lIns="27432" rIns="27432" tIns="18288" bIns="18288">
+          <a:bodyPr wrap="square" lIns="45720" rIns="45720" tIns="27432" bIns="27432">
             <a:spAutoFit/>
           </a:bodyPr>
           <a:lstStyle/>
           <a:p>
             <a:r>
-              <a:rPr sz="700" b="0">
+              <a:rPr sz="1100" b="0">
                 <a:solidFill>
                   <a:srgbClr val="AEB8E0"/>
                 </a:solidFill>
@@ -4967,8 +4967,8 @@
         </p:nvSpPr>
         <p:spPr>
           <a:xfrm>
-            <a:off x="6297168" y="3218687"/>
-            <a:ext cx="2307336" cy="384048"/>
+            <a:off x="8656319" y="4709160"/>
+            <a:ext cx="3322320" cy="594360"/>
           </a:xfrm>
           <a:prstGeom prst="rect">
             <a:avLst/>
@@ -4976,13 +4976,13 @@
           <a:noFill/>
         </p:spPr>
         <p:txBody>
-          <a:bodyPr wrap="square" lIns="27432" rIns="27432" tIns="18288" bIns="18288">
+          <a:bodyPr wrap="square" lIns="45720" rIns="45720" tIns="27432" bIns="27432">
             <a:spAutoFit/>
           </a:bodyPr>
           <a:lstStyle/>
           <a:p>
             <a:r>
-              <a:rPr sz="800" b="1">
+              <a:rPr sz="1300" b="1">
                 <a:solidFill>
                   <a:srgbClr val="F5F7FF"/>
                 </a:solidFill>
@@ -5001,8 +5001,8 @@
         </p:nvSpPr>
         <p:spPr>
           <a:xfrm>
-            <a:off x="6297168" y="3529583"/>
-            <a:ext cx="2307336" cy="310896"/>
+            <a:off x="8656319" y="5303520"/>
+            <a:ext cx="3322320" cy="502919"/>
           </a:xfrm>
           <a:prstGeom prst="rect">
             <a:avLst/>
@@ -5010,13 +5010,13 @@
           <a:noFill/>
         </p:spPr>
         <p:txBody>
-          <a:bodyPr wrap="square" lIns="27432" rIns="27432" tIns="18288" bIns="18288">
+          <a:bodyPr wrap="square" lIns="45720" rIns="45720" tIns="27432" bIns="27432">
             <a:spAutoFit/>
           </a:bodyPr>
           <a:lstStyle/>
           <a:p>
             <a:r>
-              <a:rPr sz="700" b="0">
+              <a:rPr sz="1100" b="0">
                 <a:solidFill>
                   <a:srgbClr val="AEB8E0"/>
                 </a:solidFill>
@@ -5065,8 +5065,8 @@
         </p:nvSpPr>
         <p:spPr>
           <a:xfrm>
-            <a:off x="502920" y="384048"/>
-            <a:ext cx="8138160" cy="713232"/>
+            <a:off x="640080" y="502920"/>
+            <a:ext cx="10972800" cy="822960"/>
           </a:xfrm>
         </p:spPr>
         <p:txBody>
@@ -5075,7 +5075,7 @@
           <a:p>
             <a:pPr algn="l"/>
             <a:r>
-              <a:rPr sz="2200" b="1">
+              <a:rPr sz="2800" b="1">
                 <a:solidFill>
                   <a:srgbClr val="F5F7FF"/>
                 </a:solidFill>
@@ -5094,8 +5094,8 @@
         </p:nvSpPr>
         <p:spPr>
           <a:xfrm>
-            <a:off x="502920" y="201168"/>
-            <a:ext cx="6400800" cy="201168"/>
+            <a:off x="640080" y="256032"/>
+            <a:ext cx="9144000" cy="256032"/>
           </a:xfrm>
           <a:prstGeom prst="rect">
             <a:avLst/>
@@ -5103,13 +5103,13 @@
           <a:noFill/>
         </p:spPr>
         <p:txBody>
-          <a:bodyPr wrap="square" lIns="27432" rIns="27432" tIns="18288" bIns="18288">
+          <a:bodyPr wrap="square" lIns="45720" rIns="45720" tIns="27432" bIns="27432">
             <a:spAutoFit/>
           </a:bodyPr>
           <a:lstStyle/>
           <a:p>
             <a:r>
-              <a:rPr sz="900" b="1">
+              <a:rPr sz="1100" b="1">
                 <a:solidFill>
                   <a:srgbClr val="AEB8E0"/>
                 </a:solidFill>
@@ -5128,8 +5128,8 @@
         </p:nvSpPr>
         <p:spPr>
           <a:xfrm>
-            <a:off x="502920" y="1115568"/>
-            <a:ext cx="1097280" cy="45720"/>
+            <a:off x="640080" y="1371600"/>
+            <a:ext cx="1463040" cy="54864"/>
           </a:xfrm>
           <a:prstGeom prst="rect">
             <a:avLst/>
@@ -5171,8 +5171,8 @@
         </p:nvSpPr>
         <p:spPr>
           <a:xfrm>
-            <a:off x="640080" y="1417320"/>
-            <a:ext cx="7863840" cy="2697480"/>
+            <a:off x="640080" y="1691640"/>
+            <a:ext cx="10972800" cy="4526280"/>
           </a:xfrm>
           <a:prstGeom prst="roundRect">
             <a:avLst/>
@@ -5180,7 +5180,7 @@
           <a:solidFill>
             <a:srgbClr val="1B2241"/>
           </a:solidFill>
-          <a:ln>
+          <a:ln w="9525">
             <a:solidFill>
               <a:srgbClr val="161E45"/>
             </a:solidFill>
@@ -5216,8 +5216,8 @@
         </p:nvSpPr>
         <p:spPr>
           <a:xfrm>
-            <a:off x="640080" y="1417320"/>
-            <a:ext cx="7863840" cy="64008"/>
+            <a:off x="640080" y="1691640"/>
+            <a:ext cx="10972800" cy="82296"/>
           </a:xfrm>
           <a:prstGeom prst="rect">
             <a:avLst/>
@@ -5259,8 +5259,8 @@
         </p:nvSpPr>
         <p:spPr>
           <a:xfrm>
-            <a:off x="914400" y="1700784"/>
-            <a:ext cx="1325880" cy="384048"/>
+            <a:off x="914400" y="2011680"/>
+            <a:ext cx="1645920" cy="502920"/>
           </a:xfrm>
           <a:prstGeom prst="rect">
             <a:avLst/>
@@ -5268,14 +5268,13 @@
           <a:noFill/>
         </p:spPr>
         <p:txBody>
-          <a:bodyPr wrap="square" lIns="27432" rIns="27432" tIns="18288" bIns="18288">
+          <a:bodyPr wrap="square" lIns="45720" rIns="45720" tIns="27432" bIns="27432">
             <a:spAutoFit/>
           </a:bodyPr>
           <a:lstStyle/>
           <a:p>
-            <a:pPr algn="ctr"/>
-            <a:r>
-              <a:rPr sz="2000" b="1">
+            <a:r>
+              <a:rPr sz="2400" b="1">
                 <a:solidFill>
                   <a:srgbClr val="3E8E22"/>
                 </a:solidFill>
@@ -5294,8 +5293,8 @@
         </p:nvSpPr>
         <p:spPr>
           <a:xfrm>
-            <a:off x="2423160" y="1627632"/>
-            <a:ext cx="5577840" cy="658368"/>
+            <a:off x="2697480" y="2011680"/>
+            <a:ext cx="8595360" cy="1005840"/>
           </a:xfrm>
           <a:prstGeom prst="rect">
             <a:avLst/>
@@ -5303,13 +5302,13 @@
           <a:noFill/>
         </p:spPr>
         <p:txBody>
-          <a:bodyPr wrap="square" lIns="27432" rIns="27432" tIns="18288" bIns="18288">
+          <a:bodyPr wrap="square" lIns="45720" rIns="45720" tIns="27432" bIns="27432">
             <a:spAutoFit/>
           </a:bodyPr>
           <a:lstStyle/>
           <a:p>
             <a:r>
-              <a:rPr sz="1300" b="0">
+              <a:rPr sz="1500" b="0">
                 <a:solidFill>
                   <a:srgbClr val="AEB8E0"/>
                 </a:solidFill>
@@ -5328,8 +5327,8 @@
         </p:nvSpPr>
         <p:spPr>
           <a:xfrm>
-            <a:off x="914400" y="2560320"/>
-            <a:ext cx="1005840" cy="237744"/>
+            <a:off x="914400" y="3383280"/>
+            <a:ext cx="1554480" cy="365760"/>
           </a:xfrm>
           <a:prstGeom prst="rect">
             <a:avLst/>
@@ -5337,13 +5336,13 @@
           <a:noFill/>
         </p:spPr>
         <p:txBody>
-          <a:bodyPr wrap="square" lIns="27432" rIns="27432" tIns="18288" bIns="18288">
+          <a:bodyPr wrap="square" lIns="45720" rIns="45720" tIns="27432" bIns="27432">
             <a:spAutoFit/>
           </a:bodyPr>
           <a:lstStyle/>
           <a:p>
             <a:r>
-              <a:rPr sz="1300" b="1">
+              <a:rPr sz="1600" b="1">
                 <a:solidFill>
                   <a:srgbClr val="F5F7FF"/>
                 </a:solidFill>
@@ -5362,8 +5361,8 @@
         </p:nvSpPr>
         <p:spPr>
           <a:xfrm>
-            <a:off x="1874519" y="2542032"/>
-            <a:ext cx="6263640" cy="384048"/>
+            <a:off x="2697480" y="3383280"/>
+            <a:ext cx="8595360" cy="1097280"/>
           </a:xfrm>
           <a:prstGeom prst="rect">
             <a:avLst/>
@@ -5371,13 +5370,13 @@
           <a:noFill/>
         </p:spPr>
         <p:txBody>
-          <a:bodyPr wrap="square" lIns="27432" rIns="27432" tIns="18288" bIns="18288">
+          <a:bodyPr wrap="square" lIns="45720" rIns="45720" tIns="27432" bIns="27432">
             <a:spAutoFit/>
           </a:bodyPr>
           <a:lstStyle/>
           <a:p>
             <a:r>
-              <a:rPr sz="1200" b="0">
+              <a:rPr sz="1400" b="0">
                 <a:solidFill>
                   <a:srgbClr val="F5F7FF"/>
                 </a:solidFill>
@@ -5396,8 +5395,8 @@
         </p:nvSpPr>
         <p:spPr>
           <a:xfrm>
-            <a:off x="914400" y="3218688"/>
-            <a:ext cx="1234440" cy="237744"/>
+            <a:off x="914400" y="4709160"/>
+            <a:ext cx="1691640" cy="365760"/>
           </a:xfrm>
           <a:prstGeom prst="rect">
             <a:avLst/>
@@ -5405,13 +5404,13 @@
           <a:noFill/>
         </p:spPr>
         <p:txBody>
-          <a:bodyPr wrap="square" lIns="27432" rIns="27432" tIns="18288" bIns="18288">
+          <a:bodyPr wrap="square" lIns="45720" rIns="45720" tIns="27432" bIns="27432">
             <a:spAutoFit/>
           </a:bodyPr>
           <a:lstStyle/>
           <a:p>
             <a:r>
-              <a:rPr sz="1300" b="1">
+              <a:rPr sz="1600" b="1">
                 <a:solidFill>
                   <a:srgbClr val="F5F7FF"/>
                 </a:solidFill>
@@ -5430,8 +5429,8 @@
         </p:nvSpPr>
         <p:spPr>
           <a:xfrm>
-            <a:off x="1874519" y="3182112"/>
-            <a:ext cx="6263640" cy="438912"/>
+            <a:off x="2697480" y="4709160"/>
+            <a:ext cx="8595360" cy="1280160"/>
           </a:xfrm>
           <a:prstGeom prst="rect">
             <a:avLst/>
@@ -5439,13 +5438,13 @@
           <a:noFill/>
         </p:spPr>
         <p:txBody>
-          <a:bodyPr wrap="square" lIns="27432" rIns="27432" tIns="18288" bIns="18288">
+          <a:bodyPr wrap="square" lIns="45720" rIns="45720" tIns="27432" bIns="27432">
             <a:spAutoFit/>
           </a:bodyPr>
           <a:lstStyle/>
           <a:p>
             <a:r>
-              <a:rPr sz="1200" b="0">
+              <a:rPr sz="1400" b="0">
                 <a:solidFill>
                   <a:srgbClr val="F5F7FF"/>
                 </a:solidFill>
@@ -5494,8 +5493,8 @@
         </p:nvSpPr>
         <p:spPr>
           <a:xfrm>
-            <a:off x="502920" y="384048"/>
-            <a:ext cx="8138160" cy="713232"/>
+            <a:off x="640080" y="502920"/>
+            <a:ext cx="10972800" cy="822960"/>
           </a:xfrm>
         </p:spPr>
         <p:txBody>
@@ -5504,7 +5503,7 @@
           <a:p>
             <a:pPr algn="l"/>
             <a:r>
-              <a:rPr sz="2200" b="1">
+              <a:rPr sz="2800" b="1">
                 <a:solidFill>
                   <a:srgbClr val="F5F7FF"/>
                 </a:solidFill>
@@ -5523,8 +5522,8 @@
         </p:nvSpPr>
         <p:spPr>
           <a:xfrm>
-            <a:off x="502920" y="201168"/>
-            <a:ext cx="6400800" cy="201168"/>
+            <a:off x="640080" y="256032"/>
+            <a:ext cx="9144000" cy="256032"/>
           </a:xfrm>
           <a:prstGeom prst="rect">
             <a:avLst/>
@@ -5532,13 +5531,13 @@
           <a:noFill/>
         </p:spPr>
         <p:txBody>
-          <a:bodyPr wrap="square" lIns="27432" rIns="27432" tIns="18288" bIns="18288">
+          <a:bodyPr wrap="square" lIns="45720" rIns="45720" tIns="27432" bIns="27432">
             <a:spAutoFit/>
           </a:bodyPr>
           <a:lstStyle/>
           <a:p>
             <a:r>
-              <a:rPr sz="900" b="1">
+              <a:rPr sz="1100" b="1">
                 <a:solidFill>
                   <a:srgbClr val="AEB8E0"/>
                 </a:solidFill>
@@ -5557,8 +5556,8 @@
         </p:nvSpPr>
         <p:spPr>
           <a:xfrm>
-            <a:off x="502920" y="1115568"/>
-            <a:ext cx="1097280" cy="45720"/>
+            <a:off x="640080" y="1371600"/>
+            <a:ext cx="1463040" cy="54864"/>
           </a:xfrm>
           <a:prstGeom prst="rect">
             <a:avLst/>
@@ -5600,8 +5599,8 @@
         </p:nvSpPr>
         <p:spPr>
           <a:xfrm>
-            <a:off x="502920" y="1298448"/>
-            <a:ext cx="3886200" cy="3273552"/>
+            <a:off x="640080" y="1691640"/>
+            <a:ext cx="5440680" cy="4526280"/>
           </a:xfrm>
           <a:prstGeom prst="roundRect">
             <a:avLst/>
@@ -5609,7 +5608,7 @@
           <a:solidFill>
             <a:srgbClr val="1B2241"/>
           </a:solidFill>
-          <a:ln>
+          <a:ln w="9525">
             <a:solidFill>
               <a:srgbClr val="161E45"/>
             </a:solidFill>
@@ -5645,8 +5644,8 @@
         </p:nvSpPr>
         <p:spPr>
           <a:xfrm>
-            <a:off x="502920" y="1298448"/>
-            <a:ext cx="3886200" cy="64008"/>
+            <a:off x="640080" y="1691640"/>
+            <a:ext cx="5440680" cy="82296"/>
           </a:xfrm>
           <a:prstGeom prst="rect">
             <a:avLst/>
@@ -5688,8 +5687,8 @@
         </p:nvSpPr>
         <p:spPr>
           <a:xfrm>
-            <a:off x="749808" y="1554480"/>
-            <a:ext cx="3383280" cy="256032"/>
+            <a:off x="868680" y="1920240"/>
+            <a:ext cx="5029200" cy="365760"/>
           </a:xfrm>
           <a:prstGeom prst="rect">
             <a:avLst/>
@@ -5697,13 +5696,13 @@
           <a:noFill/>
         </p:spPr>
         <p:txBody>
-          <a:bodyPr wrap="square" lIns="27432" rIns="27432" tIns="18288" bIns="18288">
+          <a:bodyPr wrap="square" lIns="45720" rIns="45720" tIns="27432" bIns="27432">
             <a:spAutoFit/>
           </a:bodyPr>
           <a:lstStyle/>
           <a:p>
             <a:r>
-              <a:rPr sz="1300" b="1">
+              <a:rPr sz="1500" b="1">
                 <a:solidFill>
                   <a:srgbClr val="F5F7FF"/>
                 </a:solidFill>
@@ -5722,8 +5721,8 @@
         </p:nvSpPr>
         <p:spPr>
           <a:xfrm>
-            <a:off x="749808" y="1883664"/>
-            <a:ext cx="3383280" cy="2240280"/>
+            <a:off x="868680" y="2331720"/>
+            <a:ext cx="5029200" cy="3794760"/>
           </a:xfrm>
           <a:prstGeom prst="rect">
             <a:avLst/>
@@ -5731,19 +5730,19 @@
           <a:noFill/>
         </p:spPr>
         <p:txBody>
-          <a:bodyPr wrap="square" lIns="27432" rIns="27432" tIns="18288" bIns="18288">
+          <a:bodyPr wrap="square" lIns="45720" rIns="45720" tIns="27432" bIns="27432">
             <a:spAutoFit/>
           </a:bodyPr>
           <a:lstStyle/>
           <a:p>
             <a:r>
-              <a:rPr sz="900" b="0">
+              <a:rPr sz="1100" b="0">
                 <a:solidFill>
                   <a:srgbClr val="AEB8E0"/>
                 </a:solidFill>
                 <a:latin typeface="Segoe UI"/>
               </a:rPr>
-              <a:t>Help me organize my week. Review my Outlook calendar. First, show me a summary: Total meetings and hours spent, where I have focus time (2+ hours), and days with the most meetings. Before taking changes, ask clarifying questions: my manager and management chain, note if they are on a meeting, how many attendees, what I'm trying to accomplish this week, how to prioritize conflicts, personal commitments, and which meetings to...</a:t>
+              <a:t>Help me organize my week. Review my Outlook calendar. First, show me a summary: Total meetings and hours spent, where I have focus time (2+ hours), and days with the most meetings. Before taking changes, ask clarifying questions: my manager and management chain, note if they are on a meeting, how many attendees, what I'm trying to accomplish this week, how to prioritize conflicts, personal commitments, and which meetings to decline or shorten. Then show proposed changes with explanations: meetings to accept/decline/reschedule, conflicts to resolve (including emailing organizers), and focus blocks to add. Start...</a:t>
             </a:r>
           </a:p>
         </p:txBody>
@@ -5756,8 +5755,8 @@
         </p:nvSpPr>
         <p:spPr>
           <a:xfrm>
-            <a:off x="4663440" y="1298448"/>
-            <a:ext cx="3977639" cy="3273552"/>
+            <a:off x="6263640" y="1691640"/>
+            <a:ext cx="5440680" cy="4526280"/>
           </a:xfrm>
           <a:prstGeom prst="roundRect">
             <a:avLst/>
@@ -5765,7 +5764,7 @@
           <a:solidFill>
             <a:srgbClr val="1B2241"/>
           </a:solidFill>
-          <a:ln>
+          <a:ln w="9525">
             <a:solidFill>
               <a:srgbClr val="161E45"/>
             </a:solidFill>
@@ -5801,8 +5800,8 @@
         </p:nvSpPr>
         <p:spPr>
           <a:xfrm>
-            <a:off x="4663440" y="1298448"/>
-            <a:ext cx="3977639" cy="64008"/>
+            <a:off x="6263640" y="1691640"/>
+            <a:ext cx="5440680" cy="82296"/>
           </a:xfrm>
           <a:prstGeom prst="rect">
             <a:avLst/>
@@ -5844,8 +5843,8 @@
         </p:nvSpPr>
         <p:spPr>
           <a:xfrm>
-            <a:off x="4910328" y="1554480"/>
-            <a:ext cx="3383280" cy="256032"/>
+            <a:off x="6492240" y="1920240"/>
+            <a:ext cx="5029200" cy="365760"/>
           </a:xfrm>
           <a:prstGeom prst="rect">
             <a:avLst/>
@@ -5853,13 +5852,13 @@
           <a:noFill/>
         </p:spPr>
         <p:txBody>
-          <a:bodyPr wrap="square" lIns="27432" rIns="27432" tIns="18288" bIns="18288">
+          <a:bodyPr wrap="square" lIns="45720" rIns="45720" tIns="27432" bIns="27432">
             <a:spAutoFit/>
           </a:bodyPr>
           <a:lstStyle/>
           <a:p>
             <a:r>
-              <a:rPr sz="1300" b="1">
+              <a:rPr sz="1500" b="1">
                 <a:solidFill>
                   <a:srgbClr val="F5F7FF"/>
                 </a:solidFill>
@@ -5878,8 +5877,8 @@
         </p:nvSpPr>
         <p:spPr>
           <a:xfrm>
-            <a:off x="4892040" y="1874519"/>
-            <a:ext cx="3429000" cy="1783080"/>
+            <a:off x="6492240" y="2331720"/>
+            <a:ext cx="5029200" cy="2743200"/>
           </a:xfrm>
           <a:prstGeom prst="rect">
             <a:avLst/>
@@ -5887,16 +5886,19 @@
           <a:noFill/>
         </p:spPr>
         <p:txBody>
-          <a:bodyPr wrap="none" lIns="73152" rIns="73152" tIns="36576">
+          <a:bodyPr wrap="square" tIns="54864" bIns="54864">
             <a:spAutoFit/>
           </a:bodyPr>
           <a:lstStyle/>
           <a:p>
             <a:pPr>
+              <a:lnSpc>
+                <a:spcPct val="115000"/>
+              </a:lnSpc>
               <a:spcAft>
-                <a:spcPts val="500"/>
+                <a:spcPts val="700"/>
               </a:spcAft>
-              <a:defRPr sz="1000">
+              <a:defRPr sz="1200">
                 <a:solidFill>
                   <a:srgbClr val="F5F7FF"/>
                 </a:solidFill>
@@ -5904,15 +5906,18 @@
               </a:defRPr>
             </a:pPr>
             <a:r>
-              <a:t>• Calendar -&gt; Summarize meeting load + focus time</a:t>
+              <a:t>•  Calendar -&gt; Summarize meeting load + focus time</a:t>
             </a:r>
           </a:p>
           <a:p>
             <a:pPr>
+              <a:lnSpc>
+                <a:spcPct val="115000"/>
+              </a:lnSpc>
               <a:spcAft>
-                <a:spcPts val="500"/>
+                <a:spcPts val="700"/>
               </a:spcAft>
-              <a:defRPr sz="1000">
+              <a:defRPr sz="1200">
                 <a:solidFill>
                   <a:srgbClr val="F5F7FF"/>
                 </a:solidFill>
@@ -5920,15 +5925,18 @@
               </a:defRPr>
             </a:pPr>
             <a:r>
-              <a:t>• Clarify -&gt; Weekly goals + constraints</a:t>
+              <a:t>•  Clarify -&gt; Weekly goals + constraints</a:t>
             </a:r>
           </a:p>
           <a:p>
             <a:pPr>
+              <a:lnSpc>
+                <a:spcPct val="115000"/>
+              </a:lnSpc>
               <a:spcAft>
-                <a:spcPts val="500"/>
+                <a:spcPts val="700"/>
               </a:spcAft>
-              <a:defRPr sz="1000">
+              <a:defRPr sz="1200">
                 <a:solidFill>
                   <a:srgbClr val="F5F7FF"/>
                 </a:solidFill>
@@ -5936,15 +5944,18 @@
               </a:defRPr>
             </a:pPr>
             <a:r>
-              <a:t>• Evaluate -&gt; Meeting impact + conflicts</a:t>
+              <a:t>•  Evaluate -&gt; Meeting impact + conflicts</a:t>
             </a:r>
           </a:p>
           <a:p>
             <a:pPr>
+              <a:lnSpc>
+                <a:spcPct val="115000"/>
+              </a:lnSpc>
               <a:spcAft>
-                <a:spcPts val="500"/>
+                <a:spcPts val="700"/>
               </a:spcAft>
-              <a:defRPr sz="1000">
+              <a:defRPr sz="1200">
                 <a:solidFill>
                   <a:srgbClr val="F5F7FF"/>
                 </a:solidFill>
@@ -5952,15 +5963,18 @@
               </a:defRPr>
             </a:pPr>
             <a:r>
-              <a:t>• Propose -&gt; Accept / decline / reschedule</a:t>
+              <a:t>•  Propose -&gt; Accept / decline / reschedule</a:t>
             </a:r>
           </a:p>
           <a:p>
             <a:pPr>
+              <a:lnSpc>
+                <a:spcPct val="115000"/>
+              </a:lnSpc>
               <a:spcAft>
-                <a:spcPts val="500"/>
+                <a:spcPts val="700"/>
               </a:spcAft>
-              <a:defRPr sz="1000">
+              <a:defRPr sz="1200">
                 <a:solidFill>
                   <a:srgbClr val="F5F7FF"/>
                 </a:solidFill>
@@ -5968,7 +5982,26 @@
               </a:defRPr>
             </a:pPr>
             <a:r>
-              <a:t>• Recommend -&gt; Add focus blocks</a:t>
+              <a:t>•  Recommend -&gt; Add focus blocks</a:t>
+            </a:r>
+          </a:p>
+          <a:p>
+            <a:pPr>
+              <a:lnSpc>
+                <a:spcPct val="115000"/>
+              </a:lnSpc>
+              <a:spcAft>
+                <a:spcPts val="700"/>
+              </a:spcAft>
+              <a:defRPr sz="1200">
+                <a:solidFill>
+                  <a:srgbClr val="F5F7FF"/>
+                </a:solidFill>
+                <a:latin typeface="Segoe UI"/>
+              </a:defRPr>
+            </a:pPr>
+            <a:r>
+              <a:t>•  Approve -&gt; Proposed changes</a:t>
             </a:r>
           </a:p>
         </p:txBody>
@@ -5981,8 +6014,8 @@
         </p:nvSpPr>
         <p:spPr>
           <a:xfrm>
-            <a:off x="4910328" y="3968496"/>
-            <a:ext cx="530352" cy="182880"/>
+            <a:off x="6492240" y="5212080"/>
+            <a:ext cx="731520" cy="274320"/>
           </a:xfrm>
           <a:prstGeom prst="rect">
             <a:avLst/>
@@ -5990,19 +6023,19 @@
           <a:noFill/>
         </p:spPr>
         <p:txBody>
-          <a:bodyPr wrap="square" lIns="27432" rIns="27432" tIns="18288" bIns="18288">
+          <a:bodyPr wrap="square" lIns="45720" rIns="45720" tIns="27432" bIns="27432">
             <a:spAutoFit/>
           </a:bodyPr>
           <a:lstStyle/>
           <a:p>
             <a:r>
-              <a:rPr sz="900" b="1">
+              <a:rPr sz="1200" b="1">
                 <a:solidFill>
                   <a:srgbClr val="F5F7FF"/>
                 </a:solidFill>
                 <a:latin typeface="Segoe UI"/>
               </a:rPr>
-              <a:t>Note:</a:t>
+              <a:t>Note</a:t>
             </a:r>
           </a:p>
         </p:txBody>
@@ -6015,8 +6048,8 @@
         </p:nvSpPr>
         <p:spPr>
           <a:xfrm>
-            <a:off x="5440680" y="3950208"/>
-            <a:ext cx="2926080" cy="411480"/>
+            <a:off x="6492240" y="5486400"/>
+            <a:ext cx="5029200" cy="685800"/>
           </a:xfrm>
           <a:prstGeom prst="rect">
             <a:avLst/>
@@ -6024,19 +6057,19 @@
           <a:noFill/>
         </p:spPr>
         <p:txBody>
-          <a:bodyPr wrap="square" lIns="27432" rIns="27432" tIns="18288" bIns="18288">
+          <a:bodyPr wrap="square" lIns="45720" rIns="45720" tIns="27432" bIns="27432">
             <a:spAutoFit/>
           </a:bodyPr>
           <a:lstStyle/>
           <a:p>
             <a:r>
-              <a:rPr sz="800" b="0">
+              <a:rPr sz="1100" b="0">
                 <a:solidFill>
                   <a:srgbClr val="AEB8E0"/>
                 </a:solidFill>
                 <a:latin typeface="Segoe UI"/>
               </a:rPr>
-              <a:t>To automate this, save the prompt, then in Microsoft 365 Copilot hover the saved prompt and choose "Schedule this prompt". Use a skill separately when you want the...</a:t>
+              <a:t>To automate this, save the prompt, then in Microsoft 365 Copilot hover the saved prompt and choose "Schedule this prompt". Use a skill separately when you want the same workflow instructions reused.</a:t>
             </a:r>
           </a:p>
         </p:txBody>
@@ -6079,8 +6112,8 @@
         </p:nvSpPr>
         <p:spPr>
           <a:xfrm>
-            <a:off x="502920" y="384048"/>
-            <a:ext cx="8138160" cy="713232"/>
+            <a:off x="640080" y="502920"/>
+            <a:ext cx="10972800" cy="822960"/>
           </a:xfrm>
         </p:spPr>
         <p:txBody>
@@ -6089,7 +6122,7 @@
           <a:p>
             <a:pPr algn="l"/>
             <a:r>
-              <a:rPr sz="2200" b="1">
+              <a:rPr sz="2800" b="1">
                 <a:solidFill>
                   <a:srgbClr val="F5F7FF"/>
                 </a:solidFill>
@@ -6108,8 +6141,8 @@
         </p:nvSpPr>
         <p:spPr>
           <a:xfrm>
-            <a:off x="502920" y="201168"/>
-            <a:ext cx="6400800" cy="201168"/>
+            <a:off x="640080" y="256032"/>
+            <a:ext cx="9144000" cy="256032"/>
           </a:xfrm>
           <a:prstGeom prst="rect">
             <a:avLst/>
@@ -6117,13 +6150,13 @@
           <a:noFill/>
         </p:spPr>
         <p:txBody>
-          <a:bodyPr wrap="square" lIns="27432" rIns="27432" tIns="18288" bIns="18288">
+          <a:bodyPr wrap="square" lIns="45720" rIns="45720" tIns="27432" bIns="27432">
             <a:spAutoFit/>
           </a:bodyPr>
           <a:lstStyle/>
           <a:p>
             <a:r>
-              <a:rPr sz="900" b="1">
+              <a:rPr sz="1100" b="1">
                 <a:solidFill>
                   <a:srgbClr val="AEB8E0"/>
                 </a:solidFill>
@@ -6142,8 +6175,8 @@
         </p:nvSpPr>
         <p:spPr>
           <a:xfrm>
-            <a:off x="502920" y="1115568"/>
-            <a:ext cx="1097280" cy="45720"/>
+            <a:off x="640080" y="1371600"/>
+            <a:ext cx="1463040" cy="54864"/>
           </a:xfrm>
           <a:prstGeom prst="rect">
             <a:avLst/>
@@ -6185,8 +6218,8 @@
         </p:nvSpPr>
         <p:spPr>
           <a:xfrm>
-            <a:off x="640080" y="1417320"/>
-            <a:ext cx="7863840" cy="2697480"/>
+            <a:off x="640080" y="1691640"/>
+            <a:ext cx="10972800" cy="4526280"/>
           </a:xfrm>
           <a:prstGeom prst="roundRect">
             <a:avLst/>
@@ -6194,7 +6227,7 @@
           <a:solidFill>
             <a:srgbClr val="1B2241"/>
           </a:solidFill>
-          <a:ln>
+          <a:ln w="9525">
             <a:solidFill>
               <a:srgbClr val="161E45"/>
             </a:solidFill>
@@ -6230,8 +6263,8 @@
         </p:nvSpPr>
         <p:spPr>
           <a:xfrm>
-            <a:off x="640080" y="1417320"/>
-            <a:ext cx="7863840" cy="64008"/>
+            <a:off x="640080" y="1691640"/>
+            <a:ext cx="10972800" cy="82296"/>
           </a:xfrm>
           <a:prstGeom prst="rect">
             <a:avLst/>
@@ -6273,8 +6306,8 @@
         </p:nvSpPr>
         <p:spPr>
           <a:xfrm>
-            <a:off x="914400" y="1700784"/>
-            <a:ext cx="1325880" cy="384048"/>
+            <a:off x="914400" y="2011680"/>
+            <a:ext cx="1645920" cy="502920"/>
           </a:xfrm>
           <a:prstGeom prst="rect">
             <a:avLst/>
@@ -6282,14 +6315,13 @@
           <a:noFill/>
         </p:spPr>
         <p:txBody>
-          <a:bodyPr wrap="square" lIns="27432" rIns="27432" tIns="18288" bIns="18288">
+          <a:bodyPr wrap="square" lIns="45720" rIns="45720" tIns="27432" bIns="27432">
             <a:spAutoFit/>
           </a:bodyPr>
           <a:lstStyle/>
           <a:p>
-            <a:pPr algn="ctr"/>
-            <a:r>
-              <a:rPr sz="2000" b="1">
+            <a:r>
+              <a:rPr sz="2400" b="1">
                 <a:solidFill>
                   <a:srgbClr val="3E8E22"/>
                 </a:solidFill>
@@ -6308,8 +6340,8 @@
         </p:nvSpPr>
         <p:spPr>
           <a:xfrm>
-            <a:off x="2423160" y="1627632"/>
-            <a:ext cx="5577840" cy="658368"/>
+            <a:off x="2697480" y="2011680"/>
+            <a:ext cx="8595360" cy="1005840"/>
           </a:xfrm>
           <a:prstGeom prst="rect">
             <a:avLst/>
@@ -6317,13 +6349,13 @@
           <a:noFill/>
         </p:spPr>
         <p:txBody>
-          <a:bodyPr wrap="square" lIns="27432" rIns="27432" tIns="18288" bIns="18288">
+          <a:bodyPr wrap="square" lIns="45720" rIns="45720" tIns="27432" bIns="27432">
             <a:spAutoFit/>
           </a:bodyPr>
           <a:lstStyle/>
           <a:p>
             <a:r>
-              <a:rPr sz="1300" b="0">
+              <a:rPr sz="1500" b="0">
                 <a:solidFill>
                   <a:srgbClr val="AEB8E0"/>
                 </a:solidFill>
@@ -6342,8 +6374,8 @@
         </p:nvSpPr>
         <p:spPr>
           <a:xfrm>
-            <a:off x="914400" y="2560320"/>
-            <a:ext cx="1005840" cy="237744"/>
+            <a:off x="914400" y="3383280"/>
+            <a:ext cx="1554480" cy="365760"/>
           </a:xfrm>
           <a:prstGeom prst="rect">
             <a:avLst/>
@@ -6351,13 +6383,13 @@
           <a:noFill/>
         </p:spPr>
         <p:txBody>
-          <a:bodyPr wrap="square" lIns="27432" rIns="27432" tIns="18288" bIns="18288">
+          <a:bodyPr wrap="square" lIns="45720" rIns="45720" tIns="27432" bIns="27432">
             <a:spAutoFit/>
           </a:bodyPr>
           <a:lstStyle/>
           <a:p>
             <a:r>
-              <a:rPr sz="1300" b="1">
+              <a:rPr sz="1600" b="1">
                 <a:solidFill>
                   <a:srgbClr val="F5F7FF"/>
                 </a:solidFill>
@@ -6376,8 +6408,8 @@
         </p:nvSpPr>
         <p:spPr>
           <a:xfrm>
-            <a:off x="1874519" y="2542032"/>
-            <a:ext cx="6263640" cy="384048"/>
+            <a:off x="2697480" y="3383280"/>
+            <a:ext cx="8595360" cy="1097280"/>
           </a:xfrm>
           <a:prstGeom prst="rect">
             <a:avLst/>
@@ -6385,13 +6417,13 @@
           <a:noFill/>
         </p:spPr>
         <p:txBody>
-          <a:bodyPr wrap="square" lIns="27432" rIns="27432" tIns="18288" bIns="18288">
+          <a:bodyPr wrap="square" lIns="45720" rIns="45720" tIns="27432" bIns="27432">
             <a:spAutoFit/>
           </a:bodyPr>
           <a:lstStyle/>
           <a:p>
             <a:r>
-              <a:rPr sz="1200" b="0">
+              <a:rPr sz="1400" b="0">
                 <a:solidFill>
                   <a:srgbClr val="F5F7FF"/>
                 </a:solidFill>
@@ -6410,8 +6442,8 @@
         </p:nvSpPr>
         <p:spPr>
           <a:xfrm>
-            <a:off x="914400" y="3218688"/>
-            <a:ext cx="1234440" cy="237744"/>
+            <a:off x="914400" y="4709160"/>
+            <a:ext cx="1691640" cy="365760"/>
           </a:xfrm>
           <a:prstGeom prst="rect">
             <a:avLst/>
@@ -6419,13 +6451,13 @@
           <a:noFill/>
         </p:spPr>
         <p:txBody>
-          <a:bodyPr wrap="square" lIns="27432" rIns="27432" tIns="18288" bIns="18288">
+          <a:bodyPr wrap="square" lIns="45720" rIns="45720" tIns="27432" bIns="27432">
             <a:spAutoFit/>
           </a:bodyPr>
           <a:lstStyle/>
           <a:p>
             <a:r>
-              <a:rPr sz="1300" b="1">
+              <a:rPr sz="1600" b="1">
                 <a:solidFill>
                   <a:srgbClr val="F5F7FF"/>
                 </a:solidFill>
@@ -6444,8 +6476,8 @@
         </p:nvSpPr>
         <p:spPr>
           <a:xfrm>
-            <a:off x="1874519" y="3182112"/>
-            <a:ext cx="6263640" cy="438912"/>
+            <a:off x="2697480" y="4709160"/>
+            <a:ext cx="8595360" cy="1280160"/>
           </a:xfrm>
           <a:prstGeom prst="rect">
             <a:avLst/>
@@ -6453,13 +6485,13 @@
           <a:noFill/>
         </p:spPr>
         <p:txBody>
-          <a:bodyPr wrap="square" lIns="27432" rIns="27432" tIns="18288" bIns="18288">
+          <a:bodyPr wrap="square" lIns="45720" rIns="45720" tIns="27432" bIns="27432">
             <a:spAutoFit/>
           </a:bodyPr>
           <a:lstStyle/>
           <a:p>
             <a:r>
-              <a:rPr sz="1200" b="0">
+              <a:rPr sz="1400" b="0">
                 <a:solidFill>
                   <a:srgbClr val="F5F7FF"/>
                 </a:solidFill>
@@ -6508,8 +6540,8 @@
         </p:nvSpPr>
         <p:spPr>
           <a:xfrm>
-            <a:off x="502920" y="384048"/>
-            <a:ext cx="8138160" cy="713232"/>
+            <a:off x="640080" y="502920"/>
+            <a:ext cx="10972800" cy="822960"/>
           </a:xfrm>
         </p:spPr>
         <p:txBody>
@@ -6518,7 +6550,7 @@
           <a:p>
             <a:pPr algn="l"/>
             <a:r>
-              <a:rPr sz="2200" b="1">
+              <a:rPr sz="2800" b="1">
                 <a:solidFill>
                   <a:srgbClr val="F5F7FF"/>
                 </a:solidFill>
@@ -6537,8 +6569,8 @@
         </p:nvSpPr>
         <p:spPr>
           <a:xfrm>
-            <a:off x="502920" y="201168"/>
-            <a:ext cx="6400800" cy="201168"/>
+            <a:off x="640080" y="256032"/>
+            <a:ext cx="9144000" cy="256032"/>
           </a:xfrm>
           <a:prstGeom prst="rect">
             <a:avLst/>
@@ -6546,13 +6578,13 @@
           <a:noFill/>
         </p:spPr>
         <p:txBody>
-          <a:bodyPr wrap="square" lIns="27432" rIns="27432" tIns="18288" bIns="18288">
+          <a:bodyPr wrap="square" lIns="45720" rIns="45720" tIns="27432" bIns="27432">
             <a:spAutoFit/>
           </a:bodyPr>
           <a:lstStyle/>
           <a:p>
             <a:r>
-              <a:rPr sz="900" b="1">
+              <a:rPr sz="1100" b="1">
                 <a:solidFill>
                   <a:srgbClr val="AEB8E0"/>
                 </a:solidFill>
@@ -6571,8 +6603,8 @@
         </p:nvSpPr>
         <p:spPr>
           <a:xfrm>
-            <a:off x="502920" y="1115568"/>
-            <a:ext cx="1097280" cy="45720"/>
+            <a:off x="640080" y="1371600"/>
+            <a:ext cx="1463040" cy="54864"/>
           </a:xfrm>
           <a:prstGeom prst="rect">
             <a:avLst/>
@@ -6614,8 +6646,8 @@
         </p:nvSpPr>
         <p:spPr>
           <a:xfrm>
-            <a:off x="502920" y="1298448"/>
-            <a:ext cx="3886200" cy="3273552"/>
+            <a:off x="640080" y="1691640"/>
+            <a:ext cx="5440680" cy="4526280"/>
           </a:xfrm>
           <a:prstGeom prst="roundRect">
             <a:avLst/>
@@ -6623,7 +6655,7 @@
           <a:solidFill>
             <a:srgbClr val="1B2241"/>
           </a:solidFill>
-          <a:ln>
+          <a:ln w="9525">
             <a:solidFill>
               <a:srgbClr val="161E45"/>
             </a:solidFill>
@@ -6659,8 +6691,8 @@
         </p:nvSpPr>
         <p:spPr>
           <a:xfrm>
-            <a:off x="502920" y="1298448"/>
-            <a:ext cx="3886200" cy="64008"/>
+            <a:off x="640080" y="1691640"/>
+            <a:ext cx="5440680" cy="82296"/>
           </a:xfrm>
           <a:prstGeom prst="rect">
             <a:avLst/>
@@ -6702,8 +6734,8 @@
         </p:nvSpPr>
         <p:spPr>
           <a:xfrm>
-            <a:off x="749808" y="1554480"/>
-            <a:ext cx="3383280" cy="256032"/>
+            <a:off x="868680" y="1920240"/>
+            <a:ext cx="5029200" cy="365760"/>
           </a:xfrm>
           <a:prstGeom prst="rect">
             <a:avLst/>
@@ -6711,13 +6743,13 @@
           <a:noFill/>
         </p:spPr>
         <p:txBody>
-          <a:bodyPr wrap="square" lIns="27432" rIns="27432" tIns="18288" bIns="18288">
+          <a:bodyPr wrap="square" lIns="45720" rIns="45720" tIns="27432" bIns="27432">
             <a:spAutoFit/>
           </a:bodyPr>
           <a:lstStyle/>
           <a:p>
             <a:r>
-              <a:rPr sz="1300" b="1">
+              <a:rPr sz="1500" b="1">
                 <a:solidFill>
                   <a:srgbClr val="F5F7FF"/>
                 </a:solidFill>
@@ -6736,8 +6768,8 @@
         </p:nvSpPr>
         <p:spPr>
           <a:xfrm>
-            <a:off x="749808" y="1883664"/>
-            <a:ext cx="3383280" cy="2240280"/>
+            <a:off x="868680" y="2331720"/>
+            <a:ext cx="5029200" cy="3794760"/>
           </a:xfrm>
           <a:prstGeom prst="rect">
             <a:avLst/>
@@ -6745,19 +6777,19 @@
           <a:noFill/>
         </p:spPr>
         <p:txBody>
-          <a:bodyPr wrap="square" lIns="27432" rIns="27432" tIns="18288" bIns="18288">
+          <a:bodyPr wrap="square" lIns="45720" rIns="45720" tIns="27432" bIns="27432">
             <a:spAutoFit/>
           </a:bodyPr>
           <a:lstStyle/>
           <a:p>
             <a:r>
-              <a:rPr sz="900" b="0">
+              <a:rPr sz="1100" b="0">
                 <a:solidFill>
                   <a:srgbClr val="AEB8E0"/>
                 </a:solidFill>
                 <a:latin typeface="Segoe UI"/>
               </a:rPr>
-              <a:t>I just wrapped up the [Project Name] project. Find all files in my OneDrive related to this project, docs, decks, spreadsheets. Create a new folder called "[Project Name], Archive" and move everything into it. Share the archive folder with the [Project Name] team so they have a clean reference. Then build a lightweight HTML recap page for the archive, project outcomes, key contributors, links to the headline deliverables,...</a:t>
+              <a:t>I just wrapped up the [Project Name] project. Find all files in my OneDrive related to this project, docs, decks, spreadsheets. Create a new folder called "[Project Name], Archive" and move everything into it. Share the archive folder with the [Project Name] team so they have a clean reference. Then build a lightweight HTML recap page for the archive, project outcomes, key contributors, links to the headline deliverables, and a one-paragraph "what shipped" summary up top, so the archive is navigable, not just a folder of files.</a:t>
             </a:r>
           </a:p>
         </p:txBody>
@@ -6770,8 +6802,8 @@
         </p:nvSpPr>
         <p:spPr>
           <a:xfrm>
-            <a:off x="4663440" y="1298448"/>
-            <a:ext cx="3977639" cy="3273552"/>
+            <a:off x="6263640" y="1691640"/>
+            <a:ext cx="5440680" cy="4526280"/>
           </a:xfrm>
           <a:prstGeom prst="roundRect">
             <a:avLst/>
@@ -6779,7 +6811,7 @@
           <a:solidFill>
             <a:srgbClr val="1B2241"/>
           </a:solidFill>
-          <a:ln>
+          <a:ln w="9525">
             <a:solidFill>
               <a:srgbClr val="161E45"/>
             </a:solidFill>
@@ -6815,8 +6847,8 @@
         </p:nvSpPr>
         <p:spPr>
           <a:xfrm>
-            <a:off x="4663440" y="1298448"/>
-            <a:ext cx="3977639" cy="64008"/>
+            <a:off x="6263640" y="1691640"/>
+            <a:ext cx="5440680" cy="82296"/>
           </a:xfrm>
           <a:prstGeom prst="rect">
             <a:avLst/>
@@ -6858,8 +6890,8 @@
         </p:nvSpPr>
         <p:spPr>
           <a:xfrm>
-            <a:off x="4910328" y="1554480"/>
-            <a:ext cx="3383280" cy="256032"/>
+            <a:off x="6492240" y="1920240"/>
+            <a:ext cx="5029200" cy="365760"/>
           </a:xfrm>
           <a:prstGeom prst="rect">
             <a:avLst/>
@@ -6867,13 +6899,13 @@
           <a:noFill/>
         </p:spPr>
         <p:txBody>
-          <a:bodyPr wrap="square" lIns="27432" rIns="27432" tIns="18288" bIns="18288">
+          <a:bodyPr wrap="square" lIns="45720" rIns="45720" tIns="27432" bIns="27432">
             <a:spAutoFit/>
           </a:bodyPr>
           <a:lstStyle/>
           <a:p>
             <a:r>
-              <a:rPr sz="1300" b="1">
+              <a:rPr sz="1500" b="1">
                 <a:solidFill>
                   <a:srgbClr val="F5F7FF"/>
                 </a:solidFill>
@@ -6892,8 +6924,8 @@
         </p:nvSpPr>
         <p:spPr>
           <a:xfrm>
-            <a:off x="4892040" y="1874519"/>
-            <a:ext cx="3429000" cy="2148840"/>
+            <a:off x="6492240" y="2331720"/>
+            <a:ext cx="5029200" cy="3749039"/>
           </a:xfrm>
           <a:prstGeom prst="rect">
             <a:avLst/>
@@ -6901,16 +6933,19 @@
           <a:noFill/>
         </p:spPr>
         <p:txBody>
-          <a:bodyPr wrap="none" lIns="73152" rIns="73152" tIns="36576">
+          <a:bodyPr wrap="square" tIns="54864" bIns="54864">
             <a:spAutoFit/>
           </a:bodyPr>
           <a:lstStyle/>
           <a:p>
             <a:pPr>
+              <a:lnSpc>
+                <a:spcPct val="115000"/>
+              </a:lnSpc>
               <a:spcAft>
-                <a:spcPts val="500"/>
+                <a:spcPts val="700"/>
               </a:spcAft>
-              <a:defRPr sz="1000">
+              <a:defRPr sz="1200">
                 <a:solidFill>
                   <a:srgbClr val="F5F7FF"/>
                 </a:solidFill>
@@ -6918,15 +6953,18 @@
               </a:defRPr>
             </a:pPr>
             <a:r>
-              <a:t>• OneDrive -&gt; Locate project files</a:t>
+              <a:t>•  OneDrive -&gt; Locate project files</a:t>
             </a:r>
           </a:p>
           <a:p>
             <a:pPr>
+              <a:lnSpc>
+                <a:spcPct val="115000"/>
+              </a:lnSpc>
               <a:spcAft>
-                <a:spcPts val="500"/>
+                <a:spcPts val="700"/>
               </a:spcAft>
-              <a:defRPr sz="1000">
+              <a:defRPr sz="1200">
                 <a:solidFill>
                   <a:srgbClr val="F5F7FF"/>
                 </a:solidFill>
@@ -6934,15 +6972,18 @@
               </a:defRPr>
             </a:pPr>
             <a:r>
-              <a:t>• Classify -&gt; Docs / decks / spreadsheets</a:t>
+              <a:t>•  Classify -&gt; Docs / decks / spreadsheets</a:t>
             </a:r>
           </a:p>
           <a:p>
             <a:pPr>
+              <a:lnSpc>
+                <a:spcPct val="115000"/>
+              </a:lnSpc>
               <a:spcAft>
-                <a:spcPts val="500"/>
+                <a:spcPts val="700"/>
               </a:spcAft>
-              <a:defRPr sz="1000">
+              <a:defRPr sz="1200">
                 <a:solidFill>
                   <a:srgbClr val="F5F7FF"/>
                 </a:solidFill>
@@ -6950,15 +6991,18 @@
               </a:defRPr>
             </a:pPr>
             <a:r>
-              <a:t>• Create -&gt; Archive folder</a:t>
+              <a:t>•  Create -&gt; Archive folder</a:t>
             </a:r>
           </a:p>
           <a:p>
             <a:pPr>
+              <a:lnSpc>
+                <a:spcPct val="115000"/>
+              </a:lnSpc>
               <a:spcAft>
-                <a:spcPts val="500"/>
+                <a:spcPts val="700"/>
               </a:spcAft>
-              <a:defRPr sz="1000">
+              <a:defRPr sz="1200">
                 <a:solidFill>
                   <a:srgbClr val="F5F7FF"/>
                 </a:solidFill>
@@ -6966,15 +7010,18 @@
               </a:defRPr>
             </a:pPr>
             <a:r>
-              <a:t>• Move -&gt; Related artifacts</a:t>
+              <a:t>•  Move -&gt; Related artifacts</a:t>
             </a:r>
           </a:p>
           <a:p>
             <a:pPr>
+              <a:lnSpc>
+                <a:spcPct val="115000"/>
+              </a:lnSpc>
               <a:spcAft>
-                <a:spcPts val="500"/>
+                <a:spcPts val="700"/>
               </a:spcAft>
-              <a:defRPr sz="1000">
+              <a:defRPr sz="1200">
                 <a:solidFill>
                   <a:srgbClr val="F5F7FF"/>
                 </a:solidFill>
@@ -6982,41 +7029,26 @@
               </a:defRPr>
             </a:pPr>
             <a:r>
-              <a:t>• Share -&gt; Archive folder</a:t>
-            </a:r>
-          </a:p>
-        </p:txBody>
-      </p:sp>
-      <p:sp>
-        <p:nvSpPr>
-          <p:cNvPr id="13" name="TextBox 12"/>
-          <p:cNvSpPr txBox="1"/>
-          <p:nvPr/>
-        </p:nvSpPr>
-        <p:spPr>
-          <a:xfrm>
-            <a:off x="4910328" y="4133087"/>
-            <a:ext cx="3337560" cy="310896"/>
-          </a:xfrm>
-          <a:prstGeom prst="rect">
-            <a:avLst/>
-          </a:prstGeom>
-          <a:noFill/>
-        </p:spPr>
-        <p:txBody>
-          <a:bodyPr wrap="square" lIns="27432" rIns="27432" tIns="18288" bIns="18288">
-            <a:spAutoFit/>
-          </a:bodyPr>
-          <a:lstStyle/>
-          <a:p>
-            <a:r>
-              <a:rPr sz="1000" b="0">
-                <a:solidFill>
-                  <a:srgbClr val="AEB8E0"/>
-                </a:solidFill>
-                <a:latin typeface="Segoe UI"/>
-              </a:rPr>
-              <a:t>A single OneDrive folder with the project's deliverables and references, shared with the team so the work stays findable and easy to...</a:t>
+              <a:t>•  Share -&gt; Archive folder</a:t>
+            </a:r>
+          </a:p>
+          <a:p>
+            <a:pPr>
+              <a:lnSpc>
+                <a:spcPct val="115000"/>
+              </a:lnSpc>
+              <a:spcAft>
+                <a:spcPts val="700"/>
+              </a:spcAft>
+              <a:defRPr sz="1200">
+                <a:solidFill>
+                  <a:srgbClr val="F5F7FF"/>
+                </a:solidFill>
+                <a:latin typeface="Segoe UI"/>
+              </a:defRPr>
+            </a:pPr>
+            <a:r>
+              <a:t>•  Confirm -&gt; Central project reference</a:t>
             </a:r>
           </a:p>
         </p:txBody>
@@ -7059,8 +7091,8 @@
         </p:nvSpPr>
         <p:spPr>
           <a:xfrm>
-            <a:off x="502920" y="384048"/>
-            <a:ext cx="8138160" cy="713232"/>
+            <a:off x="640080" y="502920"/>
+            <a:ext cx="10972800" cy="822960"/>
           </a:xfrm>
         </p:spPr>
         <p:txBody>
@@ -7069,7 +7101,7 @@
           <a:p>
             <a:pPr algn="l"/>
             <a:r>
-              <a:rPr sz="2200" b="1">
+              <a:rPr sz="2800" b="1">
                 <a:solidFill>
                   <a:srgbClr val="F5F7FF"/>
                 </a:solidFill>
@@ -7088,8 +7120,8 @@
         </p:nvSpPr>
         <p:spPr>
           <a:xfrm>
-            <a:off x="502920" y="201168"/>
-            <a:ext cx="6400800" cy="201168"/>
+            <a:off x="640080" y="256032"/>
+            <a:ext cx="9144000" cy="256032"/>
           </a:xfrm>
           <a:prstGeom prst="rect">
             <a:avLst/>
@@ -7097,13 +7129,13 @@
           <a:noFill/>
         </p:spPr>
         <p:txBody>
-          <a:bodyPr wrap="square" lIns="27432" rIns="27432" tIns="18288" bIns="18288">
+          <a:bodyPr wrap="square" lIns="45720" rIns="45720" tIns="27432" bIns="27432">
             <a:spAutoFit/>
           </a:bodyPr>
           <a:lstStyle/>
           <a:p>
             <a:r>
-              <a:rPr sz="900" b="1">
+              <a:rPr sz="1100" b="1">
                 <a:solidFill>
                   <a:srgbClr val="AEB8E0"/>
                 </a:solidFill>
@@ -7122,8 +7154,8 @@
         </p:nvSpPr>
         <p:spPr>
           <a:xfrm>
-            <a:off x="502920" y="1115568"/>
-            <a:ext cx="1097280" cy="45720"/>
+            <a:off x="640080" y="1371600"/>
+            <a:ext cx="1463040" cy="54864"/>
           </a:xfrm>
           <a:prstGeom prst="rect">
             <a:avLst/>
@@ -7165,8 +7197,8 @@
         </p:nvSpPr>
         <p:spPr>
           <a:xfrm>
-            <a:off x="640080" y="1417320"/>
-            <a:ext cx="7863840" cy="2697480"/>
+            <a:off x="640080" y="1691640"/>
+            <a:ext cx="10972800" cy="4526280"/>
           </a:xfrm>
           <a:prstGeom prst="roundRect">
             <a:avLst/>
@@ -7174,7 +7206,7 @@
           <a:solidFill>
             <a:srgbClr val="1B2241"/>
           </a:solidFill>
-          <a:ln>
+          <a:ln w="9525">
             <a:solidFill>
               <a:srgbClr val="161E45"/>
             </a:solidFill>
@@ -7210,8 +7242,8 @@
         </p:nvSpPr>
         <p:spPr>
           <a:xfrm>
-            <a:off x="640080" y="1417320"/>
-            <a:ext cx="7863840" cy="64008"/>
+            <a:off x="640080" y="1691640"/>
+            <a:ext cx="10972800" cy="82296"/>
           </a:xfrm>
           <a:prstGeom prst="rect">
             <a:avLst/>
@@ -7253,8 +7285,8 @@
         </p:nvSpPr>
         <p:spPr>
           <a:xfrm>
-            <a:off x="914400" y="1700784"/>
-            <a:ext cx="1325880" cy="384048"/>
+            <a:off x="914400" y="2011680"/>
+            <a:ext cx="1645920" cy="502920"/>
           </a:xfrm>
           <a:prstGeom prst="rect">
             <a:avLst/>
@@ -7262,14 +7294,13 @@
           <a:noFill/>
         </p:spPr>
         <p:txBody>
-          <a:bodyPr wrap="square" lIns="27432" rIns="27432" tIns="18288" bIns="18288">
+          <a:bodyPr wrap="square" lIns="45720" rIns="45720" tIns="27432" bIns="27432">
             <a:spAutoFit/>
           </a:bodyPr>
           <a:lstStyle/>
           <a:p>
-            <a:pPr algn="ctr"/>
-            <a:r>
-              <a:rPr sz="2000" b="1">
+            <a:r>
+              <a:rPr sz="2400" b="1">
                 <a:solidFill>
                   <a:srgbClr val="0E8E92"/>
                 </a:solidFill>
@@ -7288,8 +7319,8 @@
         </p:nvSpPr>
         <p:spPr>
           <a:xfrm>
-            <a:off x="2423160" y="1627632"/>
-            <a:ext cx="5577840" cy="658368"/>
+            <a:off x="2697480" y="2011680"/>
+            <a:ext cx="8595360" cy="1005840"/>
           </a:xfrm>
           <a:prstGeom prst="rect">
             <a:avLst/>
@@ -7297,13 +7328,13 @@
           <a:noFill/>
         </p:spPr>
         <p:txBody>
-          <a:bodyPr wrap="square" lIns="27432" rIns="27432" tIns="18288" bIns="18288">
+          <a:bodyPr wrap="square" lIns="45720" rIns="45720" tIns="27432" bIns="27432">
             <a:spAutoFit/>
           </a:bodyPr>
           <a:lstStyle/>
           <a:p>
             <a:r>
-              <a:rPr sz="1300" b="0">
+              <a:rPr sz="1500" b="0">
                 <a:solidFill>
                   <a:srgbClr val="AEB8E0"/>
                 </a:solidFill>
@@ -7322,8 +7353,8 @@
         </p:nvSpPr>
         <p:spPr>
           <a:xfrm>
-            <a:off x="914400" y="2560320"/>
-            <a:ext cx="1005840" cy="237744"/>
+            <a:off x="914400" y="3383280"/>
+            <a:ext cx="1554480" cy="365760"/>
           </a:xfrm>
           <a:prstGeom prst="rect">
             <a:avLst/>
@@ -7331,13 +7362,13 @@
           <a:noFill/>
         </p:spPr>
         <p:txBody>
-          <a:bodyPr wrap="square" lIns="27432" rIns="27432" tIns="18288" bIns="18288">
+          <a:bodyPr wrap="square" lIns="45720" rIns="45720" tIns="27432" bIns="27432">
             <a:spAutoFit/>
           </a:bodyPr>
           <a:lstStyle/>
           <a:p>
             <a:r>
-              <a:rPr sz="1300" b="1">
+              <a:rPr sz="1600" b="1">
                 <a:solidFill>
                   <a:srgbClr val="F5F7FF"/>
                 </a:solidFill>
@@ -7356,8 +7387,8 @@
         </p:nvSpPr>
         <p:spPr>
           <a:xfrm>
-            <a:off x="1874519" y="2542032"/>
-            <a:ext cx="6263640" cy="384048"/>
+            <a:off x="2697480" y="3383280"/>
+            <a:ext cx="8595360" cy="1097280"/>
           </a:xfrm>
           <a:prstGeom prst="rect">
             <a:avLst/>
@@ -7365,13 +7396,13 @@
           <a:noFill/>
         </p:spPr>
         <p:txBody>
-          <a:bodyPr wrap="square" lIns="27432" rIns="27432" tIns="18288" bIns="18288">
+          <a:bodyPr wrap="square" lIns="45720" rIns="45720" tIns="27432" bIns="27432">
             <a:spAutoFit/>
           </a:bodyPr>
           <a:lstStyle/>
           <a:p>
             <a:r>
-              <a:rPr sz="1200" b="0">
+              <a:rPr sz="1400" b="0">
                 <a:solidFill>
                   <a:srgbClr val="F5F7FF"/>
                 </a:solidFill>
@@ -7390,8 +7421,8 @@
         </p:nvSpPr>
         <p:spPr>
           <a:xfrm>
-            <a:off x="914400" y="3218688"/>
-            <a:ext cx="1234440" cy="237744"/>
+            <a:off x="914400" y="4709160"/>
+            <a:ext cx="1691640" cy="365760"/>
           </a:xfrm>
           <a:prstGeom prst="rect">
             <a:avLst/>
@@ -7399,13 +7430,13 @@
           <a:noFill/>
         </p:spPr>
         <p:txBody>
-          <a:bodyPr wrap="square" lIns="27432" rIns="27432" tIns="18288" bIns="18288">
+          <a:bodyPr wrap="square" lIns="45720" rIns="45720" tIns="27432" bIns="27432">
             <a:spAutoFit/>
           </a:bodyPr>
           <a:lstStyle/>
           <a:p>
             <a:r>
-              <a:rPr sz="1300" b="1">
+              <a:rPr sz="1600" b="1">
                 <a:solidFill>
                   <a:srgbClr val="F5F7FF"/>
                 </a:solidFill>
@@ -7424,8 +7455,8 @@
         </p:nvSpPr>
         <p:spPr>
           <a:xfrm>
-            <a:off x="1874519" y="3182112"/>
-            <a:ext cx="6263640" cy="438912"/>
+            <a:off x="2697480" y="4709160"/>
+            <a:ext cx="8595360" cy="1280160"/>
           </a:xfrm>
           <a:prstGeom prst="rect">
             <a:avLst/>
@@ -7433,13 +7464,13 @@
           <a:noFill/>
         </p:spPr>
         <p:txBody>
-          <a:bodyPr wrap="square" lIns="27432" rIns="27432" tIns="18288" bIns="18288">
+          <a:bodyPr wrap="square" lIns="45720" rIns="45720" tIns="27432" bIns="27432">
             <a:spAutoFit/>
           </a:bodyPr>
           <a:lstStyle/>
           <a:p>
             <a:r>
-              <a:rPr sz="1200" b="0">
+              <a:rPr sz="1400" b="0">
                 <a:solidFill>
                   <a:srgbClr val="F5F7FF"/>
                 </a:solidFill>
@@ -7488,8 +7519,8 @@
         </p:nvSpPr>
         <p:spPr>
           <a:xfrm>
-            <a:off x="502920" y="384048"/>
-            <a:ext cx="8138160" cy="713232"/>
+            <a:off x="640080" y="502920"/>
+            <a:ext cx="10972800" cy="822960"/>
           </a:xfrm>
         </p:spPr>
         <p:txBody>
@@ -7498,7 +7529,7 @@
           <a:p>
             <a:pPr algn="l"/>
             <a:r>
-              <a:rPr sz="2200" b="1">
+              <a:rPr sz="2800" b="1">
                 <a:solidFill>
                   <a:srgbClr val="F5F7FF"/>
                 </a:solidFill>
@@ -7517,8 +7548,8 @@
         </p:nvSpPr>
         <p:spPr>
           <a:xfrm>
-            <a:off x="502920" y="201168"/>
-            <a:ext cx="6400800" cy="201168"/>
+            <a:off x="640080" y="256032"/>
+            <a:ext cx="9144000" cy="256032"/>
           </a:xfrm>
           <a:prstGeom prst="rect">
             <a:avLst/>
@@ -7526,13 +7557,13 @@
           <a:noFill/>
         </p:spPr>
         <p:txBody>
-          <a:bodyPr wrap="square" lIns="27432" rIns="27432" tIns="18288" bIns="18288">
+          <a:bodyPr wrap="square" lIns="45720" rIns="45720" tIns="27432" bIns="27432">
             <a:spAutoFit/>
           </a:bodyPr>
           <a:lstStyle/>
           <a:p>
             <a:r>
-              <a:rPr sz="900" b="1">
+              <a:rPr sz="1100" b="1">
                 <a:solidFill>
                   <a:srgbClr val="AEB8E0"/>
                 </a:solidFill>
@@ -7551,8 +7582,8 @@
         </p:nvSpPr>
         <p:spPr>
           <a:xfrm>
-            <a:off x="502920" y="1115568"/>
-            <a:ext cx="1097280" cy="45720"/>
+            <a:off x="640080" y="1371600"/>
+            <a:ext cx="1463040" cy="54864"/>
           </a:xfrm>
           <a:prstGeom prst="rect">
             <a:avLst/>
@@ -7594,8 +7625,8 @@
         </p:nvSpPr>
         <p:spPr>
           <a:xfrm>
-            <a:off x="502920" y="1298448"/>
-            <a:ext cx="3886200" cy="3273552"/>
+            <a:off x="640080" y="1691640"/>
+            <a:ext cx="5440680" cy="4526280"/>
           </a:xfrm>
           <a:prstGeom prst="roundRect">
             <a:avLst/>
@@ -7603,7 +7634,7 @@
           <a:solidFill>
             <a:srgbClr val="1B2241"/>
           </a:solidFill>
-          <a:ln>
+          <a:ln w="9525">
             <a:solidFill>
               <a:srgbClr val="161E45"/>
             </a:solidFill>
@@ -7639,8 +7670,8 @@
         </p:nvSpPr>
         <p:spPr>
           <a:xfrm>
-            <a:off x="502920" y="1298448"/>
-            <a:ext cx="3886200" cy="64008"/>
+            <a:off x="640080" y="1691640"/>
+            <a:ext cx="5440680" cy="82296"/>
           </a:xfrm>
           <a:prstGeom prst="rect">
             <a:avLst/>
@@ -7682,8 +7713,8 @@
         </p:nvSpPr>
         <p:spPr>
           <a:xfrm>
-            <a:off x="749808" y="1554480"/>
-            <a:ext cx="3383280" cy="256032"/>
+            <a:off x="868680" y="1920240"/>
+            <a:ext cx="5029200" cy="365760"/>
           </a:xfrm>
           <a:prstGeom prst="rect">
             <a:avLst/>
@@ -7691,13 +7722,13 @@
           <a:noFill/>
         </p:spPr>
         <p:txBody>
-          <a:bodyPr wrap="square" lIns="27432" rIns="27432" tIns="18288" bIns="18288">
+          <a:bodyPr wrap="square" lIns="45720" rIns="45720" tIns="27432" bIns="27432">
             <a:spAutoFit/>
           </a:bodyPr>
           <a:lstStyle/>
           <a:p>
             <a:r>
-              <a:rPr sz="1300" b="1">
+              <a:rPr sz="1500" b="1">
                 <a:solidFill>
                   <a:srgbClr val="F5F7FF"/>
                 </a:solidFill>
@@ -7716,8 +7747,8 @@
         </p:nvSpPr>
         <p:spPr>
           <a:xfrm>
-            <a:off x="749808" y="1883664"/>
-            <a:ext cx="3383280" cy="2240280"/>
+            <a:off x="868680" y="2331720"/>
+            <a:ext cx="5029200" cy="3794760"/>
           </a:xfrm>
           <a:prstGeom prst="rect">
             <a:avLst/>
@@ -7725,19 +7756,19 @@
           <a:noFill/>
         </p:spPr>
         <p:txBody>
-          <a:bodyPr wrap="square" lIns="27432" rIns="27432" tIns="18288" bIns="18288">
+          <a:bodyPr wrap="square" lIns="45720" rIns="45720" tIns="27432" bIns="27432">
             <a:spAutoFit/>
           </a:bodyPr>
           <a:lstStyle/>
           <a:p>
             <a:r>
-              <a:rPr sz="900" b="0">
+              <a:rPr sz="1100" b="0">
                 <a:solidFill>
                   <a:srgbClr val="AEB8E0"/>
                 </a:solidFill>
                 <a:latin typeface="Segoe UI"/>
               </a:rPr>
-              <a:t>Search my inbox for all newsletters, digests, and industry publications received in the past 7 days. Then write a polished, article-style weekly brief covering four sections: (1) [Company] internal newsletters, (2) AI &amp; tech news, (3) World affairs/news publications, and (4) [Your industry], weaving the key stories and themes from each into flowing narrative paragraphs, not bullet lists. Exclude personal or consumer...</a:t>
+              <a:t>Search my inbox for all newsletters, digests, and industry publications received in the past 7 days. Then write a polished, article-style weekly brief covering four sections: (1) [Company] internal newsletters, (2) AI &amp; tech news, (3) World affairs/news publications, and (4) [Your industry], weaving the key stories and themes from each into flowing narrative paragraphs, not bullet lists. Exclude personal or consumer newsletters (hardware, food bank fundraisers, etc.). End with a 2,3 sentence throughline tying the week's themes together. Write the output inline as a readable article. Include links inline to the...</a:t>
             </a:r>
           </a:p>
         </p:txBody>
@@ -7750,8 +7781,8 @@
         </p:nvSpPr>
         <p:spPr>
           <a:xfrm>
-            <a:off x="4663440" y="1298448"/>
-            <a:ext cx="3977639" cy="3273552"/>
+            <a:off x="6263640" y="1691640"/>
+            <a:ext cx="5440680" cy="4526280"/>
           </a:xfrm>
           <a:prstGeom prst="roundRect">
             <a:avLst/>
@@ -7759,7 +7790,7 @@
           <a:solidFill>
             <a:srgbClr val="1B2241"/>
           </a:solidFill>
-          <a:ln>
+          <a:ln w="9525">
             <a:solidFill>
               <a:srgbClr val="161E45"/>
             </a:solidFill>
@@ -7795,8 +7826,8 @@
         </p:nvSpPr>
         <p:spPr>
           <a:xfrm>
-            <a:off x="4663440" y="1298448"/>
-            <a:ext cx="3977639" cy="64008"/>
+            <a:off x="6263640" y="1691640"/>
+            <a:ext cx="5440680" cy="82296"/>
           </a:xfrm>
           <a:prstGeom prst="rect">
             <a:avLst/>
@@ -7838,8 +7869,8 @@
         </p:nvSpPr>
         <p:spPr>
           <a:xfrm>
-            <a:off x="4910328" y="1554480"/>
-            <a:ext cx="3383280" cy="256032"/>
+            <a:off x="6492240" y="1920240"/>
+            <a:ext cx="5029200" cy="365760"/>
           </a:xfrm>
           <a:prstGeom prst="rect">
             <a:avLst/>
@@ -7847,13 +7878,13 @@
           <a:noFill/>
         </p:spPr>
         <p:txBody>
-          <a:bodyPr wrap="square" lIns="27432" rIns="27432" tIns="18288" bIns="18288">
+          <a:bodyPr wrap="square" lIns="45720" rIns="45720" tIns="27432" bIns="27432">
             <a:spAutoFit/>
           </a:bodyPr>
           <a:lstStyle/>
           <a:p>
             <a:r>
-              <a:rPr sz="1300" b="1">
+              <a:rPr sz="1500" b="1">
                 <a:solidFill>
                   <a:srgbClr val="F5F7FF"/>
                 </a:solidFill>
@@ -7872,8 +7903,8 @@
         </p:nvSpPr>
         <p:spPr>
           <a:xfrm>
-            <a:off x="4892040" y="1874519"/>
-            <a:ext cx="3429000" cy="1783080"/>
+            <a:off x="6492240" y="2331720"/>
+            <a:ext cx="5029200" cy="2743200"/>
           </a:xfrm>
           <a:prstGeom prst="rect">
             <a:avLst/>
@@ -7881,16 +7912,19 @@
           <a:noFill/>
         </p:spPr>
         <p:txBody>
-          <a:bodyPr wrap="none" lIns="73152" rIns="73152" tIns="36576">
+          <a:bodyPr wrap="square" tIns="54864" bIns="54864">
             <a:spAutoFit/>
           </a:bodyPr>
           <a:lstStyle/>
           <a:p>
             <a:pPr>
+              <a:lnSpc>
+                <a:spcPct val="115000"/>
+              </a:lnSpc>
               <a:spcAft>
-                <a:spcPts val="500"/>
+                <a:spcPts val="700"/>
               </a:spcAft>
-              <a:defRPr sz="1000">
+              <a:defRPr sz="1200">
                 <a:solidFill>
                   <a:srgbClr val="F5F7FF"/>
                 </a:solidFill>
@@ -7898,15 +7932,18 @@
               </a:defRPr>
             </a:pPr>
             <a:r>
-              <a:t>• Inbox -&gt; Identify newsletters + digests</a:t>
+              <a:t>•  Inbox -&gt; Identify newsletters + digests</a:t>
             </a:r>
           </a:p>
           <a:p>
             <a:pPr>
+              <a:lnSpc>
+                <a:spcPct val="115000"/>
+              </a:lnSpc>
               <a:spcAft>
-                <a:spcPts val="500"/>
+                <a:spcPts val="700"/>
               </a:spcAft>
-              <a:defRPr sz="1000">
+              <a:defRPr sz="1200">
                 <a:solidFill>
                   <a:srgbClr val="F5F7FF"/>
                 </a:solidFill>
@@ -7914,15 +7951,18 @@
               </a:defRPr>
             </a:pPr>
             <a:r>
-              <a:t>• Categorize -&gt; Internal / AI / news / industry</a:t>
+              <a:t>•  Categorize -&gt; Internal / AI / news / industry</a:t>
             </a:r>
           </a:p>
           <a:p>
             <a:pPr>
+              <a:lnSpc>
+                <a:spcPct val="115000"/>
+              </a:lnSpc>
               <a:spcAft>
-                <a:spcPts val="500"/>
+                <a:spcPts val="700"/>
               </a:spcAft>
-              <a:defRPr sz="1000">
+              <a:defRPr sz="1200">
                 <a:solidFill>
                   <a:srgbClr val="F5F7FF"/>
                 </a:solidFill>
@@ -7930,15 +7970,18 @@
               </a:defRPr>
             </a:pPr>
             <a:r>
-              <a:t>• Filter -&gt; Exclude consumer content</a:t>
+              <a:t>•  Filter -&gt; Exclude consumer content</a:t>
             </a:r>
           </a:p>
           <a:p>
             <a:pPr>
+              <a:lnSpc>
+                <a:spcPct val="115000"/>
+              </a:lnSpc>
               <a:spcAft>
-                <a:spcPts val="500"/>
+                <a:spcPts val="700"/>
               </a:spcAft>
-              <a:defRPr sz="1000">
+              <a:defRPr sz="1200">
                 <a:solidFill>
                   <a:srgbClr val="F5F7FF"/>
                 </a:solidFill>
@@ -7946,15 +7989,18 @@
               </a:defRPr>
             </a:pPr>
             <a:r>
-              <a:t>• Synthesize -&gt; Narrative brief</a:t>
+              <a:t>•  Synthesize -&gt; Narrative brief</a:t>
             </a:r>
           </a:p>
           <a:p>
             <a:pPr>
+              <a:lnSpc>
+                <a:spcPct val="115000"/>
+              </a:lnSpc>
               <a:spcAft>
-                <a:spcPts val="500"/>
+                <a:spcPts val="700"/>
               </a:spcAft>
-              <a:defRPr sz="1000">
+              <a:defRPr sz="1200">
                 <a:solidFill>
                   <a:srgbClr val="F5F7FF"/>
                 </a:solidFill>
@@ -7962,7 +8008,26 @@
               </a:defRPr>
             </a:pPr>
             <a:r>
-              <a:t>• Compile -&gt; Inline article</a:t>
+              <a:t>•  Compile -&gt; Inline article</a:t>
+            </a:r>
+          </a:p>
+          <a:p>
+            <a:pPr>
+              <a:lnSpc>
+                <a:spcPct val="115000"/>
+              </a:lnSpc>
+              <a:spcAft>
+                <a:spcPts val="700"/>
+              </a:spcAft>
+              <a:defRPr sz="1200">
+                <a:solidFill>
+                  <a:srgbClr val="F5F7FF"/>
+                </a:solidFill>
+                <a:latin typeface="Segoe UI"/>
+              </a:defRPr>
+            </a:pPr>
+            <a:r>
+              <a:t>•  Link -&gt; Source emails</a:t>
             </a:r>
           </a:p>
         </p:txBody>
@@ -7975,8 +8040,8 @@
         </p:nvSpPr>
         <p:spPr>
           <a:xfrm>
-            <a:off x="4910328" y="3968496"/>
-            <a:ext cx="530352" cy="182880"/>
+            <a:off x="6492240" y="5212080"/>
+            <a:ext cx="731520" cy="274320"/>
           </a:xfrm>
           <a:prstGeom prst="rect">
             <a:avLst/>
@@ -7984,19 +8049,19 @@
           <a:noFill/>
         </p:spPr>
         <p:txBody>
-          <a:bodyPr wrap="square" lIns="27432" rIns="27432" tIns="18288" bIns="18288">
+          <a:bodyPr wrap="square" lIns="45720" rIns="45720" tIns="27432" bIns="27432">
             <a:spAutoFit/>
           </a:bodyPr>
           <a:lstStyle/>
           <a:p>
             <a:r>
-              <a:rPr sz="900" b="1">
+              <a:rPr sz="1200" b="1">
                 <a:solidFill>
                   <a:srgbClr val="F5F7FF"/>
                 </a:solidFill>
                 <a:latin typeface="Segoe UI"/>
               </a:rPr>
-              <a:t>Note:</a:t>
+              <a:t>Note</a:t>
             </a:r>
           </a:p>
         </p:txBody>
@@ -8009,8 +8074,8 @@
         </p:nvSpPr>
         <p:spPr>
           <a:xfrm>
-            <a:off x="5440680" y="3950208"/>
-            <a:ext cx="2926080" cy="411480"/>
+            <a:off x="6492240" y="5486400"/>
+            <a:ext cx="5029200" cy="685800"/>
           </a:xfrm>
           <a:prstGeom prst="rect">
             <a:avLst/>
@@ -8018,13 +8083,13 @@
           <a:noFill/>
         </p:spPr>
         <p:txBody>
-          <a:bodyPr wrap="square" lIns="27432" rIns="27432" tIns="18288" bIns="18288">
+          <a:bodyPr wrap="square" lIns="45720" rIns="45720" tIns="27432" bIns="27432">
             <a:spAutoFit/>
           </a:bodyPr>
           <a:lstStyle/>
           <a:p>
             <a:r>
-              <a:rPr sz="800" b="0">
+              <a:rPr sz="1100" b="0">
                 <a:solidFill>
                   <a:srgbClr val="AEB8E0"/>
                 </a:solidFill>
@@ -8073,8 +8138,8 @@
         </p:nvSpPr>
         <p:spPr>
           <a:xfrm>
-            <a:off x="502920" y="384048"/>
-            <a:ext cx="8138160" cy="713232"/>
+            <a:off x="640080" y="502920"/>
+            <a:ext cx="10972800" cy="822960"/>
           </a:xfrm>
         </p:spPr>
         <p:txBody>
@@ -8083,7 +8148,7 @@
           <a:p>
             <a:pPr algn="l"/>
             <a:r>
-              <a:rPr sz="2200" b="1">
+              <a:rPr sz="2800" b="1">
                 <a:solidFill>
                   <a:srgbClr val="F5F7FF"/>
                 </a:solidFill>
@@ -8102,8 +8167,8 @@
         </p:nvSpPr>
         <p:spPr>
           <a:xfrm>
-            <a:off x="502920" y="201168"/>
-            <a:ext cx="6400800" cy="201168"/>
+            <a:off x="640080" y="256032"/>
+            <a:ext cx="9144000" cy="256032"/>
           </a:xfrm>
           <a:prstGeom prst="rect">
             <a:avLst/>
@@ -8111,13 +8176,13 @@
           <a:noFill/>
         </p:spPr>
         <p:txBody>
-          <a:bodyPr wrap="square" lIns="27432" rIns="27432" tIns="18288" bIns="18288">
+          <a:bodyPr wrap="square" lIns="45720" rIns="45720" tIns="27432" bIns="27432">
             <a:spAutoFit/>
           </a:bodyPr>
           <a:lstStyle/>
           <a:p>
             <a:r>
-              <a:rPr sz="900" b="1">
+              <a:rPr sz="1100" b="1">
                 <a:solidFill>
                   <a:srgbClr val="AEB8E0"/>
                 </a:solidFill>
@@ -8136,8 +8201,8 @@
         </p:nvSpPr>
         <p:spPr>
           <a:xfrm>
-            <a:off x="502920" y="1115568"/>
-            <a:ext cx="1097280" cy="45720"/>
+            <a:off x="640080" y="1371600"/>
+            <a:ext cx="1463040" cy="54864"/>
           </a:xfrm>
           <a:prstGeom prst="rect">
             <a:avLst/>
@@ -8179,8 +8244,8 @@
         </p:nvSpPr>
         <p:spPr>
           <a:xfrm>
-            <a:off x="640080" y="1417320"/>
-            <a:ext cx="7863840" cy="2697480"/>
+            <a:off x="640080" y="1691640"/>
+            <a:ext cx="10972800" cy="4526280"/>
           </a:xfrm>
           <a:prstGeom prst="roundRect">
             <a:avLst/>
@@ -8188,7 +8253,7 @@
           <a:solidFill>
             <a:srgbClr val="1B2241"/>
           </a:solidFill>
-          <a:ln>
+          <a:ln w="9525">
             <a:solidFill>
               <a:srgbClr val="161E45"/>
             </a:solidFill>
@@ -8224,8 +8289,8 @@
         </p:nvSpPr>
         <p:spPr>
           <a:xfrm>
-            <a:off x="640080" y="1417320"/>
-            <a:ext cx="7863840" cy="64008"/>
+            <a:off x="640080" y="1691640"/>
+            <a:ext cx="10972800" cy="82296"/>
           </a:xfrm>
           <a:prstGeom prst="rect">
             <a:avLst/>
@@ -8267,8 +8332,8 @@
         </p:nvSpPr>
         <p:spPr>
           <a:xfrm>
-            <a:off x="914400" y="1700784"/>
-            <a:ext cx="1325880" cy="384048"/>
+            <a:off x="914400" y="2011680"/>
+            <a:ext cx="1645920" cy="502920"/>
           </a:xfrm>
           <a:prstGeom prst="rect">
             <a:avLst/>
@@ -8276,14 +8341,13 @@
           <a:noFill/>
         </p:spPr>
         <p:txBody>
-          <a:bodyPr wrap="square" lIns="27432" rIns="27432" tIns="18288" bIns="18288">
+          <a:bodyPr wrap="square" lIns="45720" rIns="45720" tIns="27432" bIns="27432">
             <a:spAutoFit/>
           </a:bodyPr>
           <a:lstStyle/>
           <a:p>
-            <a:pPr algn="ctr"/>
-            <a:r>
-              <a:rPr sz="2000" b="1">
+            <a:r>
+              <a:rPr sz="2400" b="1">
                 <a:solidFill>
                   <a:srgbClr val="0E8E92"/>
                 </a:solidFill>
@@ -8302,8 +8366,8 @@
         </p:nvSpPr>
         <p:spPr>
           <a:xfrm>
-            <a:off x="2423160" y="1627632"/>
-            <a:ext cx="5577840" cy="658368"/>
+            <a:off x="2697480" y="2011680"/>
+            <a:ext cx="8595360" cy="1005840"/>
           </a:xfrm>
           <a:prstGeom prst="rect">
             <a:avLst/>
@@ -8311,13 +8375,13 @@
           <a:noFill/>
         </p:spPr>
         <p:txBody>
-          <a:bodyPr wrap="square" lIns="27432" rIns="27432" tIns="18288" bIns="18288">
+          <a:bodyPr wrap="square" lIns="45720" rIns="45720" tIns="27432" bIns="27432">
             <a:spAutoFit/>
           </a:bodyPr>
           <a:lstStyle/>
           <a:p>
             <a:r>
-              <a:rPr sz="1300" b="0">
+              <a:rPr sz="1500" b="0">
                 <a:solidFill>
                   <a:srgbClr val="AEB8E0"/>
                 </a:solidFill>
@@ -8336,8 +8400,8 @@
         </p:nvSpPr>
         <p:spPr>
           <a:xfrm>
-            <a:off x="914400" y="2560320"/>
-            <a:ext cx="1005840" cy="237744"/>
+            <a:off x="914400" y="3383280"/>
+            <a:ext cx="1554480" cy="365760"/>
           </a:xfrm>
           <a:prstGeom prst="rect">
             <a:avLst/>
@@ -8345,13 +8409,13 @@
           <a:noFill/>
         </p:spPr>
         <p:txBody>
-          <a:bodyPr wrap="square" lIns="27432" rIns="27432" tIns="18288" bIns="18288">
+          <a:bodyPr wrap="square" lIns="45720" rIns="45720" tIns="27432" bIns="27432">
             <a:spAutoFit/>
           </a:bodyPr>
           <a:lstStyle/>
           <a:p>
             <a:r>
-              <a:rPr sz="1300" b="1">
+              <a:rPr sz="1600" b="1">
                 <a:solidFill>
                   <a:srgbClr val="F5F7FF"/>
                 </a:solidFill>
@@ -8370,8 +8434,8 @@
         </p:nvSpPr>
         <p:spPr>
           <a:xfrm>
-            <a:off x="1874519" y="2542032"/>
-            <a:ext cx="6263640" cy="384048"/>
+            <a:off x="2697480" y="3383280"/>
+            <a:ext cx="8595360" cy="1097280"/>
           </a:xfrm>
           <a:prstGeom prst="rect">
             <a:avLst/>
@@ -8379,13 +8443,13 @@
           <a:noFill/>
         </p:spPr>
         <p:txBody>
-          <a:bodyPr wrap="square" lIns="27432" rIns="27432" tIns="18288" bIns="18288">
+          <a:bodyPr wrap="square" lIns="45720" rIns="45720" tIns="27432" bIns="27432">
             <a:spAutoFit/>
           </a:bodyPr>
           <a:lstStyle/>
           <a:p>
             <a:r>
-              <a:rPr sz="1200" b="0">
+              <a:rPr sz="1400" b="0">
                 <a:solidFill>
                   <a:srgbClr val="F5F7FF"/>
                 </a:solidFill>
@@ -8404,8 +8468,8 @@
         </p:nvSpPr>
         <p:spPr>
           <a:xfrm>
-            <a:off x="914400" y="3218688"/>
-            <a:ext cx="1234440" cy="237744"/>
+            <a:off x="914400" y="4709160"/>
+            <a:ext cx="1691640" cy="365760"/>
           </a:xfrm>
           <a:prstGeom prst="rect">
             <a:avLst/>
@@ -8413,13 +8477,13 @@
           <a:noFill/>
         </p:spPr>
         <p:txBody>
-          <a:bodyPr wrap="square" lIns="27432" rIns="27432" tIns="18288" bIns="18288">
+          <a:bodyPr wrap="square" lIns="45720" rIns="45720" tIns="27432" bIns="27432">
             <a:spAutoFit/>
           </a:bodyPr>
           <a:lstStyle/>
           <a:p>
             <a:r>
-              <a:rPr sz="1300" b="1">
+              <a:rPr sz="1600" b="1">
                 <a:solidFill>
                   <a:srgbClr val="F5F7FF"/>
                 </a:solidFill>
@@ -8438,8 +8502,8 @@
         </p:nvSpPr>
         <p:spPr>
           <a:xfrm>
-            <a:off x="1874519" y="3182112"/>
-            <a:ext cx="6263640" cy="438912"/>
+            <a:off x="2697480" y="4709160"/>
+            <a:ext cx="8595360" cy="1280160"/>
           </a:xfrm>
           <a:prstGeom prst="rect">
             <a:avLst/>
@@ -8447,13 +8511,13 @@
           <a:noFill/>
         </p:spPr>
         <p:txBody>
-          <a:bodyPr wrap="square" lIns="27432" rIns="27432" tIns="18288" bIns="18288">
+          <a:bodyPr wrap="square" lIns="45720" rIns="45720" tIns="27432" bIns="27432">
             <a:spAutoFit/>
           </a:bodyPr>
           <a:lstStyle/>
           <a:p>
             <a:r>
-              <a:rPr sz="1200" b="0">
+              <a:rPr sz="1400" b="0">
                 <a:solidFill>
                   <a:srgbClr val="F5F7FF"/>
                 </a:solidFill>
@@ -8502,8 +8566,8 @@
         </p:nvSpPr>
         <p:spPr>
           <a:xfrm>
-            <a:off x="502920" y="384048"/>
-            <a:ext cx="8138160" cy="713232"/>
+            <a:off x="640080" y="502920"/>
+            <a:ext cx="10972800" cy="822960"/>
           </a:xfrm>
         </p:spPr>
         <p:txBody>
@@ -8512,7 +8576,7 @@
           <a:p>
             <a:pPr algn="l"/>
             <a:r>
-              <a:rPr sz="2200" b="1">
+              <a:rPr sz="2800" b="1">
                 <a:solidFill>
                   <a:srgbClr val="F5F7FF"/>
                 </a:solidFill>
@@ -8531,8 +8595,8 @@
         </p:nvSpPr>
         <p:spPr>
           <a:xfrm>
-            <a:off x="502920" y="201168"/>
-            <a:ext cx="6400800" cy="201168"/>
+            <a:off x="640080" y="256032"/>
+            <a:ext cx="9144000" cy="256032"/>
           </a:xfrm>
           <a:prstGeom prst="rect">
             <a:avLst/>
@@ -8540,13 +8604,13 @@
           <a:noFill/>
         </p:spPr>
         <p:txBody>
-          <a:bodyPr wrap="square" lIns="27432" rIns="27432" tIns="18288" bIns="18288">
+          <a:bodyPr wrap="square" lIns="45720" rIns="45720" tIns="27432" bIns="27432">
             <a:spAutoFit/>
           </a:bodyPr>
           <a:lstStyle/>
           <a:p>
             <a:r>
-              <a:rPr sz="900" b="1">
+              <a:rPr sz="1100" b="1">
                 <a:solidFill>
                   <a:srgbClr val="AEB8E0"/>
                 </a:solidFill>
@@ -8565,8 +8629,8 @@
         </p:nvSpPr>
         <p:spPr>
           <a:xfrm>
-            <a:off x="502920" y="1115568"/>
-            <a:ext cx="1097280" cy="45720"/>
+            <a:off x="640080" y="1371600"/>
+            <a:ext cx="1463040" cy="54864"/>
           </a:xfrm>
           <a:prstGeom prst="rect">
             <a:avLst/>
@@ -8608,8 +8672,8 @@
         </p:nvSpPr>
         <p:spPr>
           <a:xfrm>
-            <a:off x="502920" y="1298448"/>
-            <a:ext cx="3886200" cy="3273552"/>
+            <a:off x="640080" y="1691640"/>
+            <a:ext cx="5440680" cy="4526280"/>
           </a:xfrm>
           <a:prstGeom prst="roundRect">
             <a:avLst/>
@@ -8617,7 +8681,7 @@
           <a:solidFill>
             <a:srgbClr val="1B2241"/>
           </a:solidFill>
-          <a:ln>
+          <a:ln w="9525">
             <a:solidFill>
               <a:srgbClr val="161E45"/>
             </a:solidFill>
@@ -8653,8 +8717,8 @@
         </p:nvSpPr>
         <p:spPr>
           <a:xfrm>
-            <a:off x="502920" y="1298448"/>
-            <a:ext cx="3886200" cy="64008"/>
+            <a:off x="640080" y="1691640"/>
+            <a:ext cx="5440680" cy="82296"/>
           </a:xfrm>
           <a:prstGeom prst="rect">
             <a:avLst/>
@@ -8696,8 +8760,8 @@
         </p:nvSpPr>
         <p:spPr>
           <a:xfrm>
-            <a:off x="749808" y="1554480"/>
-            <a:ext cx="3383280" cy="256032"/>
+            <a:off x="868680" y="1920240"/>
+            <a:ext cx="5029200" cy="365760"/>
           </a:xfrm>
           <a:prstGeom prst="rect">
             <a:avLst/>
@@ -8705,13 +8769,13 @@
           <a:noFill/>
         </p:spPr>
         <p:txBody>
-          <a:bodyPr wrap="square" lIns="27432" rIns="27432" tIns="18288" bIns="18288">
+          <a:bodyPr wrap="square" lIns="45720" rIns="45720" tIns="27432" bIns="27432">
             <a:spAutoFit/>
           </a:bodyPr>
           <a:lstStyle/>
           <a:p>
             <a:r>
-              <a:rPr sz="1300" b="1">
+              <a:rPr sz="1500" b="1">
                 <a:solidFill>
                   <a:srgbClr val="F5F7FF"/>
                 </a:solidFill>
@@ -8730,8 +8794,8 @@
         </p:nvSpPr>
         <p:spPr>
           <a:xfrm>
-            <a:off x="749808" y="1883664"/>
-            <a:ext cx="3383280" cy="2240280"/>
+            <a:off x="868680" y="2331720"/>
+            <a:ext cx="5029200" cy="3794760"/>
           </a:xfrm>
           <a:prstGeom prst="rect">
             <a:avLst/>
@@ -8739,19 +8803,19 @@
           <a:noFill/>
         </p:spPr>
         <p:txBody>
-          <a:bodyPr wrap="square" lIns="27432" rIns="27432" tIns="18288" bIns="18288">
+          <a:bodyPr wrap="square" lIns="45720" rIns="45720" tIns="27432" bIns="27432">
             <a:spAutoFit/>
           </a:bodyPr>
           <a:lstStyle/>
           <a:p>
             <a:r>
-              <a:rPr sz="900" b="0">
+              <a:rPr sz="1100" b="0">
                 <a:solidFill>
                   <a:srgbClr val="AEB8E0"/>
                 </a:solidFill>
                 <a:latin typeface="Segoe UI"/>
               </a:rPr>
-              <a:t>[Product/Campaign Name] is moving into partner and channel activation. I need the launch materials adapted so partner marketing and the channel teams can execute without translation. Source: Latest launch materials in [OneDrive Folder] Approved messaging in [Messaging Doc] Prior partner-facing communications for tone reference Create the following: Partner one-pager (Word) Co-marketing talking points (Word) Partner FAQ...</a:t>
+              <a:t>[Product/Campaign Name] is moving into partner and channel activation. I need the launch materials adapted so partner marketing and the channel teams can execute without translation. Source: Latest launch materials in [OneDrive Folder] Approved messaging in [Messaging Doc] Prior partner-facing communications for tone reference Create the following: Partner one-pager (Word) Co-marketing talking points (Word) Partner FAQ (Word) Partner email template (Word) Channel-ready social pack, three LinkedIn variants and two X variants with creative guidance (Excel) Route: Send to [Partner Marketing Owner] for...</a:t>
             </a:r>
           </a:p>
         </p:txBody>
@@ -8764,8 +8828,8 @@
         </p:nvSpPr>
         <p:spPr>
           <a:xfrm>
-            <a:off x="4663440" y="1298448"/>
-            <a:ext cx="3977639" cy="3273552"/>
+            <a:off x="6263640" y="1691640"/>
+            <a:ext cx="5440680" cy="4526280"/>
           </a:xfrm>
           <a:prstGeom prst="roundRect">
             <a:avLst/>
@@ -8773,7 +8837,7 @@
           <a:solidFill>
             <a:srgbClr val="1B2241"/>
           </a:solidFill>
-          <a:ln>
+          <a:ln w="9525">
             <a:solidFill>
               <a:srgbClr val="161E45"/>
             </a:solidFill>
@@ -8809,8 +8873,8 @@
         </p:nvSpPr>
         <p:spPr>
           <a:xfrm>
-            <a:off x="4663440" y="1298448"/>
-            <a:ext cx="3977639" cy="64008"/>
+            <a:off x="6263640" y="1691640"/>
+            <a:ext cx="5440680" cy="82296"/>
           </a:xfrm>
           <a:prstGeom prst="rect">
             <a:avLst/>
@@ -8852,8 +8916,8 @@
         </p:nvSpPr>
         <p:spPr>
           <a:xfrm>
-            <a:off x="4910328" y="1554480"/>
-            <a:ext cx="3383280" cy="256032"/>
+            <a:off x="6492240" y="1920240"/>
+            <a:ext cx="5029200" cy="365760"/>
           </a:xfrm>
           <a:prstGeom prst="rect">
             <a:avLst/>
@@ -8861,13 +8925,13 @@
           <a:noFill/>
         </p:spPr>
         <p:txBody>
-          <a:bodyPr wrap="square" lIns="27432" rIns="27432" tIns="18288" bIns="18288">
+          <a:bodyPr wrap="square" lIns="45720" rIns="45720" tIns="27432" bIns="27432">
             <a:spAutoFit/>
           </a:bodyPr>
           <a:lstStyle/>
           <a:p>
             <a:r>
-              <a:rPr sz="1300" b="1">
+              <a:rPr sz="1500" b="1">
                 <a:solidFill>
                   <a:srgbClr val="F5F7FF"/>
                 </a:solidFill>
@@ -8886,8 +8950,8 @@
         </p:nvSpPr>
         <p:spPr>
           <a:xfrm>
-            <a:off x="4892040" y="1874519"/>
-            <a:ext cx="3429000" cy="2148840"/>
+            <a:off x="6492240" y="2331720"/>
+            <a:ext cx="5029200" cy="3749039"/>
           </a:xfrm>
           <a:prstGeom prst="rect">
             <a:avLst/>
@@ -8895,16 +8959,19 @@
           <a:noFill/>
         </p:spPr>
         <p:txBody>
-          <a:bodyPr wrap="none" lIns="73152" rIns="73152" tIns="36576">
+          <a:bodyPr wrap="square" tIns="54864" bIns="54864">
             <a:spAutoFit/>
           </a:bodyPr>
           <a:lstStyle/>
           <a:p>
             <a:pPr>
+              <a:lnSpc>
+                <a:spcPct val="115000"/>
+              </a:lnSpc>
               <a:spcAft>
-                <a:spcPts val="500"/>
+                <a:spcPts val="700"/>
               </a:spcAft>
-              <a:defRPr sz="1000">
+              <a:defRPr sz="1200">
                 <a:solidFill>
                   <a:srgbClr val="F5F7FF"/>
                 </a:solidFill>
@@ -8912,15 +8979,18 @@
               </a:defRPr>
             </a:pPr>
             <a:r>
-              <a:t>• OneDrive [Folder] -&gt; Read the launch materials</a:t>
+              <a:t>•  OneDrive [Folder] -&gt; Read the launch materials</a:t>
             </a:r>
           </a:p>
           <a:p>
             <a:pPr>
+              <a:lnSpc>
+                <a:spcPct val="115000"/>
+              </a:lnSpc>
               <a:spcAft>
-                <a:spcPts val="500"/>
+                <a:spcPts val="700"/>
               </a:spcAft>
-              <a:defRPr sz="1000">
+              <a:defRPr sz="1200">
                 <a:solidFill>
                   <a:srgbClr val="F5F7FF"/>
                 </a:solidFill>
@@ -8928,15 +8998,18 @@
               </a:defRPr>
             </a:pPr>
             <a:r>
-              <a:t>• Messaging Doc -&gt; Ground every adaptation in approved positioning</a:t>
+              <a:t>•  Messaging Doc -&gt; Ground every adaptation in approved positioning</a:t>
             </a:r>
           </a:p>
           <a:p>
             <a:pPr>
+              <a:lnSpc>
+                <a:spcPct val="115000"/>
+              </a:lnSpc>
               <a:spcAft>
-                <a:spcPts val="500"/>
+                <a:spcPts val="700"/>
               </a:spcAft>
-              <a:defRPr sz="1000">
+              <a:defRPr sz="1200">
                 <a:solidFill>
                   <a:srgbClr val="F5F7FF"/>
                 </a:solidFill>
@@ -8944,15 +9017,18 @@
               </a:defRPr>
             </a:pPr>
             <a:r>
-              <a:t>• Adapt -&gt; One-pager · talking points · FAQ</a:t>
+              <a:t>•  Adapt -&gt; One-pager · talking points · FAQ</a:t>
             </a:r>
           </a:p>
           <a:p>
             <a:pPr>
+              <a:lnSpc>
+                <a:spcPct val="115000"/>
+              </a:lnSpc>
               <a:spcAft>
-                <a:spcPts val="500"/>
+                <a:spcPts val="700"/>
               </a:spcAft>
-              <a:defRPr sz="1000">
+              <a:defRPr sz="1200">
                 <a:solidFill>
                   <a:srgbClr val="F5F7FF"/>
                 </a:solidFill>
@@ -8960,15 +9036,18 @@
               </a:defRPr>
             </a:pPr>
             <a:r>
-              <a:t>• Adapt -&gt; Email template · social pack</a:t>
+              <a:t>•  Adapt -&gt; Email template · social pack</a:t>
             </a:r>
           </a:p>
           <a:p>
             <a:pPr>
+              <a:lnSpc>
+                <a:spcPct val="115000"/>
+              </a:lnSpc>
               <a:spcAft>
-                <a:spcPts val="500"/>
+                <a:spcPts val="700"/>
               </a:spcAft>
-              <a:defRPr sz="1000">
+              <a:defRPr sz="1200">
                 <a:solidFill>
                   <a:srgbClr val="F5F7FF"/>
                 </a:solidFill>
@@ -8976,41 +9055,26 @@
               </a:defRPr>
             </a:pPr>
             <a:r>
-              <a:t>• Org directory -&gt; Identify partner and channel owners</a:t>
-            </a:r>
-          </a:p>
-        </p:txBody>
-      </p:sp>
-      <p:sp>
-        <p:nvSpPr>
-          <p:cNvPr id="13" name="TextBox 12"/>
-          <p:cNvSpPr txBox="1"/>
-          <p:nvPr/>
-        </p:nvSpPr>
-        <p:spPr>
-          <a:xfrm>
-            <a:off x="4910328" y="4133087"/>
-            <a:ext cx="3337560" cy="310896"/>
-          </a:xfrm>
-          <a:prstGeom prst="rect">
-            <a:avLst/>
-          </a:prstGeom>
-          <a:noFill/>
-        </p:spPr>
-        <p:txBody>
-          <a:bodyPr wrap="square" lIns="27432" rIns="27432" tIns="18288" bIns="18288">
-            <a:spAutoFit/>
-          </a:bodyPr>
-          <a:lstStyle/>
-          <a:p>
-            <a:r>
-              <a:rPr sz="1000" b="0">
-                <a:solidFill>
-                  <a:srgbClr val="AEB8E0"/>
-                </a:solidFill>
-                <a:latin typeface="Segoe UI"/>
-              </a:rPr>
-              <a:t>A partner-ready and channel-ready activation kit across Word and Excel, plus a routing plan so partner, field, and channel marketing can...</a:t>
+              <a:t>•  Org directory -&gt; Identify partner and channel owners</a:t>
+            </a:r>
+          </a:p>
+          <a:p>
+            <a:pPr>
+              <a:lnSpc>
+                <a:spcPct val="115000"/>
+              </a:lnSpc>
+              <a:spcAft>
+                <a:spcPts val="700"/>
+              </a:spcAft>
+              <a:defRPr sz="1200">
+                <a:solidFill>
+                  <a:srgbClr val="F5F7FF"/>
+                </a:solidFill>
+                <a:latin typeface="Segoe UI"/>
+              </a:defRPr>
+            </a:pPr>
+            <a:r>
+              <a:t>•  Route -&gt; Kit to owners for review</a:t>
             </a:r>
           </a:p>
         </p:txBody>
@@ -9053,8 +9117,8 @@
         </p:nvSpPr>
         <p:spPr>
           <a:xfrm>
-            <a:off x="502920" y="384048"/>
-            <a:ext cx="8138160" cy="713232"/>
+            <a:off x="640080" y="502920"/>
+            <a:ext cx="10972800" cy="822960"/>
           </a:xfrm>
         </p:spPr>
         <p:txBody>
@@ -9063,7 +9127,7 @@
           <a:p>
             <a:pPr algn="l"/>
             <a:r>
-              <a:rPr sz="2200" b="1">
+              <a:rPr sz="2800" b="1">
                 <a:solidFill>
                   <a:srgbClr val="F5F7FF"/>
                 </a:solidFill>
@@ -9082,8 +9146,8 @@
         </p:nvSpPr>
         <p:spPr>
           <a:xfrm>
-            <a:off x="502920" y="201168"/>
-            <a:ext cx="6400800" cy="201168"/>
+            <a:off x="640080" y="256032"/>
+            <a:ext cx="9144000" cy="256032"/>
           </a:xfrm>
           <a:prstGeom prst="rect">
             <a:avLst/>
@@ -9091,13 +9155,13 @@
           <a:noFill/>
         </p:spPr>
         <p:txBody>
-          <a:bodyPr wrap="square" lIns="27432" rIns="27432" tIns="18288" bIns="18288">
+          <a:bodyPr wrap="square" lIns="45720" rIns="45720" tIns="27432" bIns="27432">
             <a:spAutoFit/>
           </a:bodyPr>
           <a:lstStyle/>
           <a:p>
             <a:r>
-              <a:rPr sz="900" b="1">
+              <a:rPr sz="1100" b="1">
                 <a:solidFill>
                   <a:srgbClr val="AEB8E0"/>
                 </a:solidFill>
@@ -9116,8 +9180,8 @@
         </p:nvSpPr>
         <p:spPr>
           <a:xfrm>
-            <a:off x="502920" y="1115568"/>
-            <a:ext cx="1097280" cy="45720"/>
+            <a:off x="640080" y="1371600"/>
+            <a:ext cx="1463040" cy="54864"/>
           </a:xfrm>
           <a:prstGeom prst="rect">
             <a:avLst/>
@@ -9159,8 +9223,8 @@
         </p:nvSpPr>
         <p:spPr>
           <a:xfrm>
-            <a:off x="548640" y="1234440"/>
-            <a:ext cx="7955279" cy="411480"/>
+            <a:off x="640080" y="1554480"/>
+            <a:ext cx="10972800" cy="502920"/>
           </a:xfrm>
           <a:prstGeom prst="rect">
             <a:avLst/>
@@ -9168,13 +9232,13 @@
           <a:noFill/>
         </p:spPr>
         <p:txBody>
-          <a:bodyPr wrap="square" lIns="27432" rIns="27432" tIns="18288" bIns="18288">
+          <a:bodyPr wrap="square" lIns="45720" rIns="45720" tIns="27432" bIns="27432">
             <a:spAutoFit/>
           </a:bodyPr>
           <a:lstStyle/>
           <a:p>
             <a:r>
-              <a:rPr sz="1300" b="0">
+              <a:rPr sz="1500" b="0">
                 <a:solidFill>
                   <a:srgbClr val="AEB8E0"/>
                 </a:solidFill>
@@ -9193,8 +9257,8 @@
         </p:nvSpPr>
         <p:spPr>
           <a:xfrm>
-            <a:off x="548640" y="1783080"/>
-            <a:ext cx="3886200" cy="2606040"/>
+            <a:off x="640080" y="2194560"/>
+            <a:ext cx="5440680" cy="4206240"/>
           </a:xfrm>
           <a:prstGeom prst="roundRect">
             <a:avLst/>
@@ -9202,7 +9266,7 @@
           <a:solidFill>
             <a:srgbClr val="1B2241"/>
           </a:solidFill>
-          <a:ln>
+          <a:ln w="9525">
             <a:solidFill>
               <a:srgbClr val="161E45"/>
             </a:solidFill>
@@ -9238,8 +9302,8 @@
         </p:nvSpPr>
         <p:spPr>
           <a:xfrm>
-            <a:off x="548640" y="1783080"/>
-            <a:ext cx="3886200" cy="64008"/>
+            <a:off x="640080" y="2194560"/>
+            <a:ext cx="5440680" cy="82296"/>
           </a:xfrm>
           <a:prstGeom prst="rect">
             <a:avLst/>
@@ -9281,8 +9345,8 @@
         </p:nvSpPr>
         <p:spPr>
           <a:xfrm>
-            <a:off x="777240" y="2029968"/>
-            <a:ext cx="3429000" cy="2057400"/>
+            <a:off x="868680" y="2423160"/>
+            <a:ext cx="5074920" cy="3840479"/>
           </a:xfrm>
           <a:prstGeom prst="rect">
             <a:avLst/>
@@ -9290,16 +9354,19 @@
           <a:noFill/>
         </p:spPr>
         <p:txBody>
-          <a:bodyPr wrap="none" lIns="73152" rIns="73152" tIns="36576">
+          <a:bodyPr wrap="square" tIns="54864" bIns="54864">
             <a:spAutoFit/>
           </a:bodyPr>
           <a:lstStyle/>
           <a:p>
             <a:pPr>
+              <a:lnSpc>
+                <a:spcPct val="115000"/>
+              </a:lnSpc>
               <a:spcAft>
-                <a:spcPts val="500"/>
+                <a:spcPts val="700"/>
               </a:spcAft>
-              <a:defRPr sz="1300">
+              <a:defRPr sz="1400">
                 <a:solidFill>
                   <a:srgbClr val="F5F7FF"/>
                 </a:solidFill>
@@ -9307,15 +9374,18 @@
               </a:defRPr>
             </a:pPr>
             <a:r>
-              <a:t>• Microsoft 365 Copilot</a:t>
+              <a:t>•  Microsoft 365 Copilot</a:t>
             </a:r>
           </a:p>
           <a:p>
             <a:pPr>
+              <a:lnSpc>
+                <a:spcPct val="115000"/>
+              </a:lnSpc>
               <a:spcAft>
-                <a:spcPts val="500"/>
+                <a:spcPts val="700"/>
               </a:spcAft>
-              <a:defRPr sz="1300">
+              <a:defRPr sz="1400">
                 <a:solidFill>
                   <a:srgbClr val="F5F7FF"/>
                 </a:solidFill>
@@ -9323,15 +9393,18 @@
               </a:defRPr>
             </a:pPr>
             <a:r>
-              <a:t>• Microsoft 365 Copilot Cowork</a:t>
+              <a:t>•  Microsoft 365 Copilot Cowork</a:t>
             </a:r>
           </a:p>
           <a:p>
             <a:pPr>
+              <a:lnSpc>
+                <a:spcPct val="115000"/>
+              </a:lnSpc>
               <a:spcAft>
-                <a:spcPts val="500"/>
+                <a:spcPts val="700"/>
               </a:spcAft>
-              <a:defRPr sz="1300">
+              <a:defRPr sz="1400">
                 <a:solidFill>
                   <a:srgbClr val="F5F7FF"/>
                 </a:solidFill>
@@ -9339,15 +9412,18 @@
               </a:defRPr>
             </a:pPr>
             <a:r>
-              <a:t>• Copilot Studio</a:t>
+              <a:t>•  Copilot Studio</a:t>
             </a:r>
           </a:p>
           <a:p>
             <a:pPr>
+              <a:lnSpc>
+                <a:spcPct val="115000"/>
+              </a:lnSpc>
               <a:spcAft>
-                <a:spcPts val="500"/>
+                <a:spcPts val="700"/>
               </a:spcAft>
-              <a:defRPr sz="1300">
+              <a:defRPr sz="1400">
                 <a:solidFill>
                   <a:srgbClr val="F5F7FF"/>
                 </a:solidFill>
@@ -9355,7 +9431,7 @@
               </a:defRPr>
             </a:pPr>
             <a:r>
-              <a:t>• Microsoft Scout</a:t>
+              <a:t>•  Microsoft Scout</a:t>
             </a:r>
           </a:p>
         </p:txBody>
@@ -9368,8 +9444,8 @@
         </p:nvSpPr>
         <p:spPr>
           <a:xfrm>
-            <a:off x="4709160" y="1783080"/>
-            <a:ext cx="3886200" cy="2606040"/>
+            <a:off x="6263640" y="2194560"/>
+            <a:ext cx="5440680" cy="4206240"/>
           </a:xfrm>
           <a:prstGeom prst="roundRect">
             <a:avLst/>
@@ -9377,7 +9453,7 @@
           <a:solidFill>
             <a:srgbClr val="1B2241"/>
           </a:solidFill>
-          <a:ln>
+          <a:ln w="9525">
             <a:solidFill>
               <a:srgbClr val="161E45"/>
             </a:solidFill>
@@ -9413,8 +9489,8 @@
         </p:nvSpPr>
         <p:spPr>
           <a:xfrm>
-            <a:off x="4709160" y="1783080"/>
-            <a:ext cx="3886200" cy="64008"/>
+            <a:off x="6263640" y="2194560"/>
+            <a:ext cx="5440680" cy="82296"/>
           </a:xfrm>
           <a:prstGeom prst="rect">
             <a:avLst/>
@@ -9456,8 +9532,8 @@
         </p:nvSpPr>
         <p:spPr>
           <a:xfrm>
-            <a:off x="4983480" y="2057400"/>
-            <a:ext cx="3108960" cy="274320"/>
+            <a:off x="6492240" y="2468879"/>
+            <a:ext cx="5029200" cy="365760"/>
           </a:xfrm>
           <a:prstGeom prst="rect">
             <a:avLst/>
@@ -9465,13 +9541,13 @@
           <a:noFill/>
         </p:spPr>
         <p:txBody>
-          <a:bodyPr wrap="square" lIns="27432" rIns="27432" tIns="18288" bIns="18288">
+          <a:bodyPr wrap="square" lIns="45720" rIns="45720" tIns="27432" bIns="27432">
             <a:spAutoFit/>
           </a:bodyPr>
           <a:lstStyle/>
           <a:p>
             <a:r>
-              <a:rPr sz="1500" b="1">
+              <a:rPr sz="1700" b="1">
                 <a:solidFill>
                   <a:srgbClr val="F5F7FF"/>
                 </a:solidFill>
@@ -9490,8 +9566,8 @@
         </p:nvSpPr>
         <p:spPr>
           <a:xfrm>
-            <a:off x="4983480" y="2514600"/>
-            <a:ext cx="3017520" cy="731520"/>
+            <a:off x="6492240" y="2971800"/>
+            <a:ext cx="5029200" cy="1463040"/>
           </a:xfrm>
           <a:prstGeom prst="rect">
             <a:avLst/>
@@ -9499,13 +9575,13 @@
           <a:noFill/>
         </p:spPr>
         <p:txBody>
-          <a:bodyPr wrap="square" lIns="27432" rIns="27432" tIns="18288" bIns="18288">
+          <a:bodyPr wrap="square" lIns="45720" rIns="45720" tIns="27432" bIns="27432">
             <a:spAutoFit/>
           </a:bodyPr>
           <a:lstStyle/>
           <a:p>
             <a:r>
-              <a:rPr sz="1400" b="0">
+              <a:rPr sz="1500" b="0">
                 <a:solidFill>
                   <a:srgbClr val="AEB8E0"/>
                 </a:solidFill>
@@ -9554,8 +9630,8 @@
         </p:nvSpPr>
         <p:spPr>
           <a:xfrm>
-            <a:off x="502920" y="384048"/>
-            <a:ext cx="8138160" cy="713232"/>
+            <a:off x="640080" y="502920"/>
+            <a:ext cx="10972800" cy="822960"/>
           </a:xfrm>
         </p:spPr>
         <p:txBody>
@@ -9564,7 +9640,7 @@
           <a:p>
             <a:pPr algn="l"/>
             <a:r>
-              <a:rPr sz="2200" b="1">
+              <a:rPr sz="2800" b="1">
                 <a:solidFill>
                   <a:srgbClr val="F5F7FF"/>
                 </a:solidFill>
@@ -9583,8 +9659,8 @@
         </p:nvSpPr>
         <p:spPr>
           <a:xfrm>
-            <a:off x="502920" y="201168"/>
-            <a:ext cx="6400800" cy="201168"/>
+            <a:off x="640080" y="256032"/>
+            <a:ext cx="9144000" cy="256032"/>
           </a:xfrm>
           <a:prstGeom prst="rect">
             <a:avLst/>
@@ -9592,13 +9668,13 @@
           <a:noFill/>
         </p:spPr>
         <p:txBody>
-          <a:bodyPr wrap="square" lIns="27432" rIns="27432" tIns="18288" bIns="18288">
+          <a:bodyPr wrap="square" lIns="45720" rIns="45720" tIns="27432" bIns="27432">
             <a:spAutoFit/>
           </a:bodyPr>
           <a:lstStyle/>
           <a:p>
             <a:r>
-              <a:rPr sz="900" b="1">
+              <a:rPr sz="1100" b="1">
                 <a:solidFill>
                   <a:srgbClr val="AEB8E0"/>
                 </a:solidFill>
@@ -9617,8 +9693,8 @@
         </p:nvSpPr>
         <p:spPr>
           <a:xfrm>
-            <a:off x="502920" y="1115568"/>
-            <a:ext cx="1097280" cy="45720"/>
+            <a:off x="640080" y="1371600"/>
+            <a:ext cx="1463040" cy="54864"/>
           </a:xfrm>
           <a:prstGeom prst="rect">
             <a:avLst/>
@@ -9660,8 +9736,8 @@
         </p:nvSpPr>
         <p:spPr>
           <a:xfrm>
-            <a:off x="640080" y="1417320"/>
-            <a:ext cx="7863840" cy="2697480"/>
+            <a:off x="640080" y="1691640"/>
+            <a:ext cx="10972800" cy="4526280"/>
           </a:xfrm>
           <a:prstGeom prst="roundRect">
             <a:avLst/>
@@ -9669,7 +9745,7 @@
           <a:solidFill>
             <a:srgbClr val="1B2241"/>
           </a:solidFill>
-          <a:ln>
+          <a:ln w="9525">
             <a:solidFill>
               <a:srgbClr val="161E45"/>
             </a:solidFill>
@@ -9705,8 +9781,8 @@
         </p:nvSpPr>
         <p:spPr>
           <a:xfrm>
-            <a:off x="640080" y="1417320"/>
-            <a:ext cx="7863840" cy="64008"/>
+            <a:off x="640080" y="1691640"/>
+            <a:ext cx="10972800" cy="82296"/>
           </a:xfrm>
           <a:prstGeom prst="rect">
             <a:avLst/>
@@ -9748,8 +9824,8 @@
         </p:nvSpPr>
         <p:spPr>
           <a:xfrm>
-            <a:off x="914400" y="1700784"/>
-            <a:ext cx="1325880" cy="384048"/>
+            <a:off x="914400" y="2011680"/>
+            <a:ext cx="1645920" cy="502920"/>
           </a:xfrm>
           <a:prstGeom prst="rect">
             <a:avLst/>
@@ -9757,14 +9833,13 @@
           <a:noFill/>
         </p:spPr>
         <p:txBody>
-          <a:bodyPr wrap="square" lIns="27432" rIns="27432" tIns="18288" bIns="18288">
+          <a:bodyPr wrap="square" lIns="45720" rIns="45720" tIns="27432" bIns="27432">
             <a:spAutoFit/>
           </a:bodyPr>
           <a:lstStyle/>
           <a:p>
-            <a:pPr algn="ctr"/>
-            <a:r>
-              <a:rPr sz="2000" b="1">
+            <a:r>
+              <a:rPr sz="2400" b="1">
                 <a:solidFill>
                   <a:srgbClr val="C73E78"/>
                 </a:solidFill>
@@ -9783,8 +9858,8 @@
         </p:nvSpPr>
         <p:spPr>
           <a:xfrm>
-            <a:off x="2423160" y="1627632"/>
-            <a:ext cx="5577840" cy="658368"/>
+            <a:off x="2697480" y="2011680"/>
+            <a:ext cx="8595360" cy="1005840"/>
           </a:xfrm>
           <a:prstGeom prst="rect">
             <a:avLst/>
@@ -9792,13 +9867,13 @@
           <a:noFill/>
         </p:spPr>
         <p:txBody>
-          <a:bodyPr wrap="square" lIns="27432" rIns="27432" tIns="18288" bIns="18288">
+          <a:bodyPr wrap="square" lIns="45720" rIns="45720" tIns="27432" bIns="27432">
             <a:spAutoFit/>
           </a:bodyPr>
           <a:lstStyle/>
           <a:p>
             <a:r>
-              <a:rPr sz="1300" b="0">
+              <a:rPr sz="1500" b="0">
                 <a:solidFill>
                   <a:srgbClr val="AEB8E0"/>
                 </a:solidFill>
@@ -9817,8 +9892,8 @@
         </p:nvSpPr>
         <p:spPr>
           <a:xfrm>
-            <a:off x="914400" y="2560320"/>
-            <a:ext cx="1005840" cy="237744"/>
+            <a:off x="914400" y="3383280"/>
+            <a:ext cx="1554480" cy="365760"/>
           </a:xfrm>
           <a:prstGeom prst="rect">
             <a:avLst/>
@@ -9826,13 +9901,13 @@
           <a:noFill/>
         </p:spPr>
         <p:txBody>
-          <a:bodyPr wrap="square" lIns="27432" rIns="27432" tIns="18288" bIns="18288">
+          <a:bodyPr wrap="square" lIns="45720" rIns="45720" tIns="27432" bIns="27432">
             <a:spAutoFit/>
           </a:bodyPr>
           <a:lstStyle/>
           <a:p>
             <a:r>
-              <a:rPr sz="1300" b="1">
+              <a:rPr sz="1600" b="1">
                 <a:solidFill>
                   <a:srgbClr val="F5F7FF"/>
                 </a:solidFill>
@@ -9851,8 +9926,8 @@
         </p:nvSpPr>
         <p:spPr>
           <a:xfrm>
-            <a:off x="1874519" y="2542032"/>
-            <a:ext cx="6263640" cy="384048"/>
+            <a:off x="2697480" y="3383280"/>
+            <a:ext cx="8595360" cy="1097280"/>
           </a:xfrm>
           <a:prstGeom prst="rect">
             <a:avLst/>
@@ -9860,13 +9935,13 @@
           <a:noFill/>
         </p:spPr>
         <p:txBody>
-          <a:bodyPr wrap="square" lIns="27432" rIns="27432" tIns="18288" bIns="18288">
+          <a:bodyPr wrap="square" lIns="45720" rIns="45720" tIns="27432" bIns="27432">
             <a:spAutoFit/>
           </a:bodyPr>
           <a:lstStyle/>
           <a:p>
             <a:r>
-              <a:rPr sz="1200" b="0">
+              <a:rPr sz="1400" b="0">
                 <a:solidFill>
                   <a:srgbClr val="F5F7FF"/>
                 </a:solidFill>
@@ -9885,8 +9960,8 @@
         </p:nvSpPr>
         <p:spPr>
           <a:xfrm>
-            <a:off x="914400" y="3218688"/>
-            <a:ext cx="1234440" cy="237744"/>
+            <a:off x="914400" y="4709160"/>
+            <a:ext cx="1691640" cy="365760"/>
           </a:xfrm>
           <a:prstGeom prst="rect">
             <a:avLst/>
@@ -9894,13 +9969,13 @@
           <a:noFill/>
         </p:spPr>
         <p:txBody>
-          <a:bodyPr wrap="square" lIns="27432" rIns="27432" tIns="18288" bIns="18288">
+          <a:bodyPr wrap="square" lIns="45720" rIns="45720" tIns="27432" bIns="27432">
             <a:spAutoFit/>
           </a:bodyPr>
           <a:lstStyle/>
           <a:p>
             <a:r>
-              <a:rPr sz="1300" b="1">
+              <a:rPr sz="1600" b="1">
                 <a:solidFill>
                   <a:srgbClr val="F5F7FF"/>
                 </a:solidFill>
@@ -9919,8 +9994,8 @@
         </p:nvSpPr>
         <p:spPr>
           <a:xfrm>
-            <a:off x="1874519" y="3182112"/>
-            <a:ext cx="6263640" cy="438912"/>
+            <a:off x="2697480" y="4709160"/>
+            <a:ext cx="8595360" cy="1280160"/>
           </a:xfrm>
           <a:prstGeom prst="rect">
             <a:avLst/>
@@ -9928,13 +10003,13 @@
           <a:noFill/>
         </p:spPr>
         <p:txBody>
-          <a:bodyPr wrap="square" lIns="27432" rIns="27432" tIns="18288" bIns="18288">
+          <a:bodyPr wrap="square" lIns="45720" rIns="45720" tIns="27432" bIns="27432">
             <a:spAutoFit/>
           </a:bodyPr>
           <a:lstStyle/>
           <a:p>
             <a:r>
-              <a:rPr sz="1200" b="0">
+              <a:rPr sz="1400" b="0">
                 <a:solidFill>
                   <a:srgbClr val="F5F7FF"/>
                 </a:solidFill>
@@ -9983,8 +10058,8 @@
         </p:nvSpPr>
         <p:spPr>
           <a:xfrm>
-            <a:off x="502920" y="384048"/>
-            <a:ext cx="8138160" cy="713232"/>
+            <a:off x="640080" y="502920"/>
+            <a:ext cx="10972800" cy="822960"/>
           </a:xfrm>
         </p:spPr>
         <p:txBody>
@@ -9993,7 +10068,7 @@
           <a:p>
             <a:pPr algn="l"/>
             <a:r>
-              <a:rPr sz="2200" b="1">
+              <a:rPr sz="2800" b="1">
                 <a:solidFill>
                   <a:srgbClr val="F5F7FF"/>
                 </a:solidFill>
@@ -10012,8 +10087,8 @@
         </p:nvSpPr>
         <p:spPr>
           <a:xfrm>
-            <a:off x="502920" y="201168"/>
-            <a:ext cx="6400800" cy="201168"/>
+            <a:off x="640080" y="256032"/>
+            <a:ext cx="9144000" cy="256032"/>
           </a:xfrm>
           <a:prstGeom prst="rect">
             <a:avLst/>
@@ -10021,13 +10096,13 @@
           <a:noFill/>
         </p:spPr>
         <p:txBody>
-          <a:bodyPr wrap="square" lIns="27432" rIns="27432" tIns="18288" bIns="18288">
+          <a:bodyPr wrap="square" lIns="45720" rIns="45720" tIns="27432" bIns="27432">
             <a:spAutoFit/>
           </a:bodyPr>
           <a:lstStyle/>
           <a:p>
             <a:r>
-              <a:rPr sz="900" b="1">
+              <a:rPr sz="1100" b="1">
                 <a:solidFill>
                   <a:srgbClr val="AEB8E0"/>
                 </a:solidFill>
@@ -10046,8 +10121,8 @@
         </p:nvSpPr>
         <p:spPr>
           <a:xfrm>
-            <a:off x="502920" y="1115568"/>
-            <a:ext cx="1097280" cy="45720"/>
+            <a:off x="640080" y="1371600"/>
+            <a:ext cx="1463040" cy="54864"/>
           </a:xfrm>
           <a:prstGeom prst="rect">
             <a:avLst/>
@@ -10089,8 +10164,8 @@
         </p:nvSpPr>
         <p:spPr>
           <a:xfrm>
-            <a:off x="502920" y="1298448"/>
-            <a:ext cx="3886200" cy="3273552"/>
+            <a:off x="640080" y="1691640"/>
+            <a:ext cx="5440680" cy="4526280"/>
           </a:xfrm>
           <a:prstGeom prst="roundRect">
             <a:avLst/>
@@ -10098,7 +10173,7 @@
           <a:solidFill>
             <a:srgbClr val="1B2241"/>
           </a:solidFill>
-          <a:ln>
+          <a:ln w="9525">
             <a:solidFill>
               <a:srgbClr val="161E45"/>
             </a:solidFill>
@@ -10134,8 +10209,8 @@
         </p:nvSpPr>
         <p:spPr>
           <a:xfrm>
-            <a:off x="502920" y="1298448"/>
-            <a:ext cx="3886200" cy="64008"/>
+            <a:off x="640080" y="1691640"/>
+            <a:ext cx="5440680" cy="82296"/>
           </a:xfrm>
           <a:prstGeom prst="rect">
             <a:avLst/>
@@ -10177,8 +10252,8 @@
         </p:nvSpPr>
         <p:spPr>
           <a:xfrm>
-            <a:off x="749808" y="1554480"/>
-            <a:ext cx="3383280" cy="256032"/>
+            <a:off x="868680" y="1920240"/>
+            <a:ext cx="5029200" cy="365760"/>
           </a:xfrm>
           <a:prstGeom prst="rect">
             <a:avLst/>
@@ -10186,13 +10261,13 @@
           <a:noFill/>
         </p:spPr>
         <p:txBody>
-          <a:bodyPr wrap="square" lIns="27432" rIns="27432" tIns="18288" bIns="18288">
+          <a:bodyPr wrap="square" lIns="45720" rIns="45720" tIns="27432" bIns="27432">
             <a:spAutoFit/>
           </a:bodyPr>
           <a:lstStyle/>
           <a:p>
             <a:r>
-              <a:rPr sz="1300" b="1">
+              <a:rPr sz="1500" b="1">
                 <a:solidFill>
                   <a:srgbClr val="F5F7FF"/>
                 </a:solidFill>
@@ -10211,8 +10286,8 @@
         </p:nvSpPr>
         <p:spPr>
           <a:xfrm>
-            <a:off x="749808" y="1883664"/>
-            <a:ext cx="3383280" cy="2240280"/>
+            <a:off x="868680" y="2331720"/>
+            <a:ext cx="5029200" cy="3794760"/>
           </a:xfrm>
           <a:prstGeom prst="rect">
             <a:avLst/>
@@ -10220,19 +10295,19 @@
           <a:noFill/>
         </p:spPr>
         <p:txBody>
-          <a:bodyPr wrap="square" lIns="27432" rIns="27432" tIns="18288" bIns="18288">
+          <a:bodyPr wrap="square" lIns="45720" rIns="45720" tIns="27432" bIns="27432">
             <a:spAutoFit/>
           </a:bodyPr>
           <a:lstStyle/>
           <a:p>
             <a:r>
-              <a:rPr sz="900" b="0">
+              <a:rPr sz="1100" b="0">
                 <a:solidFill>
                   <a:srgbClr val="AEB8E0"/>
                 </a:solidFill>
                 <a:latin typeface="Segoe UI"/>
               </a:rPr>
-              <a:t>I am about to go out of office for x week(s) beginning this coming [date]. Build an out-of-office tracker to cover off on all ongoing projects and tasks that will require things to move forward while I am gone. This should cover all team meetings from this week, all emails, and all Teams messages (both in meeting chats, individual chats, and group chats). Please also analyze my calendar for next week, and any projects that...</a:t>
+              <a:t>I am about to go out of office for x week(s) beginning this coming [date]. Build an out-of-office tracker to cover off on all ongoing projects and tasks that will require things to move forward while I am gone. This should cover all team meetings from this week, all emails, and all Teams messages (both in meeting chats, individual chats, and group chats). Please also analyze my calendar for next week, and any projects that have action items for next week and include these in the handover. This should cover big project asks as well as smaller project tasks. Please limit the team members who are covering to my...</a:t>
             </a:r>
           </a:p>
         </p:txBody>
@@ -10245,8 +10320,8 @@
         </p:nvSpPr>
         <p:spPr>
           <a:xfrm>
-            <a:off x="4663440" y="1298448"/>
-            <a:ext cx="3977639" cy="3273552"/>
+            <a:off x="6263640" y="1691640"/>
+            <a:ext cx="5440680" cy="4526280"/>
           </a:xfrm>
           <a:prstGeom prst="roundRect">
             <a:avLst/>
@@ -10254,7 +10329,7 @@
           <a:solidFill>
             <a:srgbClr val="1B2241"/>
           </a:solidFill>
-          <a:ln>
+          <a:ln w="9525">
             <a:solidFill>
               <a:srgbClr val="161E45"/>
             </a:solidFill>
@@ -10290,8 +10365,8 @@
         </p:nvSpPr>
         <p:spPr>
           <a:xfrm>
-            <a:off x="4663440" y="1298448"/>
-            <a:ext cx="3977639" cy="64008"/>
+            <a:off x="6263640" y="1691640"/>
+            <a:ext cx="5440680" cy="82296"/>
           </a:xfrm>
           <a:prstGeom prst="rect">
             <a:avLst/>
@@ -10333,8 +10408,8 @@
         </p:nvSpPr>
         <p:spPr>
           <a:xfrm>
-            <a:off x="4910328" y="1554480"/>
-            <a:ext cx="3383280" cy="256032"/>
+            <a:off x="6492240" y="1920240"/>
+            <a:ext cx="5029200" cy="365760"/>
           </a:xfrm>
           <a:prstGeom prst="rect">
             <a:avLst/>
@@ -10342,13 +10417,13 @@
           <a:noFill/>
         </p:spPr>
         <p:txBody>
-          <a:bodyPr wrap="square" lIns="27432" rIns="27432" tIns="18288" bIns="18288">
+          <a:bodyPr wrap="square" lIns="45720" rIns="45720" tIns="27432" bIns="27432">
             <a:spAutoFit/>
           </a:bodyPr>
           <a:lstStyle/>
           <a:p>
             <a:r>
-              <a:rPr sz="1300" b="1">
+              <a:rPr sz="1500" b="1">
                 <a:solidFill>
                   <a:srgbClr val="F5F7FF"/>
                 </a:solidFill>
@@ -10367,8 +10442,8 @@
         </p:nvSpPr>
         <p:spPr>
           <a:xfrm>
-            <a:off x="4892040" y="1874519"/>
-            <a:ext cx="3429000" cy="2148840"/>
+            <a:off x="6492240" y="2331720"/>
+            <a:ext cx="5029200" cy="3749039"/>
           </a:xfrm>
           <a:prstGeom prst="rect">
             <a:avLst/>
@@ -10376,16 +10451,19 @@
           <a:noFill/>
         </p:spPr>
         <p:txBody>
-          <a:bodyPr wrap="none" lIns="73152" rIns="73152" tIns="36576">
+          <a:bodyPr wrap="square" tIns="54864" bIns="54864">
             <a:spAutoFit/>
           </a:bodyPr>
           <a:lstStyle/>
           <a:p>
             <a:pPr>
+              <a:lnSpc>
+                <a:spcPct val="115000"/>
+              </a:lnSpc>
               <a:spcAft>
-                <a:spcPts val="500"/>
+                <a:spcPts val="700"/>
               </a:spcAft>
-              <a:defRPr sz="1000">
+              <a:defRPr sz="1200">
                 <a:solidFill>
                   <a:srgbClr val="F5F7FF"/>
                 </a:solidFill>
@@ -10393,15 +10471,18 @@
               </a:defRPr>
             </a:pPr>
             <a:r>
-              <a:t>• Meetings (this week) -&gt; Identify active projects + stakeholders</a:t>
+              <a:t>•  Meetings (this week) -&gt; Identify active projects + stakeholders</a:t>
             </a:r>
           </a:p>
           <a:p>
             <a:pPr>
+              <a:lnSpc>
+                <a:spcPct val="115000"/>
+              </a:lnSpc>
               <a:spcAft>
-                <a:spcPts val="500"/>
+                <a:spcPts val="700"/>
               </a:spcAft>
-              <a:defRPr sz="1000">
+              <a:defRPr sz="1200">
                 <a:solidFill>
                   <a:srgbClr val="F5F7FF"/>
                 </a:solidFill>
@@ -10409,15 +10490,18 @@
               </a:defRPr>
             </a:pPr>
             <a:r>
-              <a:t>• Email threads -&gt; Extract open requests + dependencies</a:t>
+              <a:t>•  Email threads -&gt; Extract open requests + dependencies</a:t>
             </a:r>
           </a:p>
           <a:p>
             <a:pPr>
+              <a:lnSpc>
+                <a:spcPct val="115000"/>
+              </a:lnSpc>
               <a:spcAft>
-                <a:spcPts val="500"/>
+                <a:spcPts val="700"/>
               </a:spcAft>
-              <a:defRPr sz="1000">
+              <a:defRPr sz="1200">
                 <a:solidFill>
                   <a:srgbClr val="F5F7FF"/>
                 </a:solidFill>
@@ -10425,15 +10509,18 @@
               </a:defRPr>
             </a:pPr>
             <a:r>
-              <a:t>• Teams chats -&gt; Capture in-flight tasks</a:t>
+              <a:t>•  Teams chats -&gt; Capture in-flight tasks</a:t>
             </a:r>
           </a:p>
           <a:p>
             <a:pPr>
+              <a:lnSpc>
+                <a:spcPct val="115000"/>
+              </a:lnSpc>
               <a:spcAft>
-                <a:spcPts val="500"/>
+                <a:spcPts val="700"/>
               </a:spcAft>
-              <a:defRPr sz="1000">
+              <a:defRPr sz="1200">
                 <a:solidFill>
                   <a:srgbClr val="F5F7FF"/>
                 </a:solidFill>
@@ -10441,15 +10528,18 @@
               </a:defRPr>
             </a:pPr>
             <a:r>
-              <a:t>• Calendar (next week) -&gt; Detect upcoming deadlines</a:t>
+              <a:t>•  Calendar (next week) -&gt; Detect upcoming deadlines</a:t>
             </a:r>
           </a:p>
           <a:p>
             <a:pPr>
+              <a:lnSpc>
+                <a:spcPct val="115000"/>
+              </a:lnSpc>
               <a:spcAft>
-                <a:spcPts val="500"/>
+                <a:spcPts val="700"/>
               </a:spcAft>
-              <a:defRPr sz="1000">
+              <a:defRPr sz="1200">
                 <a:solidFill>
                   <a:srgbClr val="F5F7FF"/>
                 </a:solidFill>
@@ -10457,41 +10547,26 @@
               </a:defRPr>
             </a:pPr>
             <a:r>
-              <a:t>• Org directory -&gt; Match internal team coverage</a:t>
-            </a:r>
-          </a:p>
-        </p:txBody>
-      </p:sp>
-      <p:sp>
-        <p:nvSpPr>
-          <p:cNvPr id="13" name="TextBox 12"/>
-          <p:cNvSpPr txBox="1"/>
-          <p:nvPr/>
-        </p:nvSpPr>
-        <p:spPr>
-          <a:xfrm>
-            <a:off x="4910328" y="4133087"/>
-            <a:ext cx="3337560" cy="310896"/>
-          </a:xfrm>
-          <a:prstGeom prst="rect">
-            <a:avLst/>
-          </a:prstGeom>
-          <a:noFill/>
-        </p:spPr>
-        <p:txBody>
-          <a:bodyPr wrap="square" lIns="27432" rIns="27432" tIns="18288" bIns="18288">
-            <a:spAutoFit/>
-          </a:bodyPr>
-          <a:lstStyle/>
-          <a:p>
-            <a:r>
-              <a:rPr sz="1000" b="0">
-                <a:solidFill>
-                  <a:srgbClr val="AEB8E0"/>
-                </a:solidFill>
-                <a:latin typeface="Segoe UI"/>
-              </a:rPr>
-              <a:t>A handover document built from your real work, projects, owners, deadlines, and supporting files, so coverage stays clear and execution...</a:t>
+              <a:t>•  Org directory -&gt; Match internal team coverage</a:t>
+            </a:r>
+          </a:p>
+          <a:p>
+            <a:pPr>
+              <a:lnSpc>
+                <a:spcPct val="115000"/>
+              </a:lnSpc>
+              <a:spcAft>
+                <a:spcPts val="700"/>
+              </a:spcAft>
+              <a:defRPr sz="1200">
+                <a:solidFill>
+                  <a:srgbClr val="F5F7FF"/>
+                </a:solidFill>
+                <a:latin typeface="Segoe UI"/>
+              </a:defRPr>
+            </a:pPr>
+            <a:r>
+              <a:t>•  Files -&gt; Link supporting documents</a:t>
             </a:r>
           </a:p>
         </p:txBody>
@@ -10534,8 +10609,8 @@
         </p:nvSpPr>
         <p:spPr>
           <a:xfrm>
-            <a:off x="502920" y="384048"/>
-            <a:ext cx="8138160" cy="713232"/>
+            <a:off x="640080" y="502920"/>
+            <a:ext cx="10972800" cy="822960"/>
           </a:xfrm>
         </p:spPr>
         <p:txBody>
@@ -10544,7 +10619,7 @@
           <a:p>
             <a:pPr algn="l"/>
             <a:r>
-              <a:rPr sz="2200" b="1">
+              <a:rPr sz="2800" b="1">
                 <a:solidFill>
                   <a:srgbClr val="F5F7FF"/>
                 </a:solidFill>
@@ -10563,8 +10638,8 @@
         </p:nvSpPr>
         <p:spPr>
           <a:xfrm>
-            <a:off x="502920" y="201168"/>
-            <a:ext cx="6400800" cy="201168"/>
+            <a:off x="640080" y="256032"/>
+            <a:ext cx="9144000" cy="256032"/>
           </a:xfrm>
           <a:prstGeom prst="rect">
             <a:avLst/>
@@ -10572,13 +10647,13 @@
           <a:noFill/>
         </p:spPr>
         <p:txBody>
-          <a:bodyPr wrap="square" lIns="27432" rIns="27432" tIns="18288" bIns="18288">
+          <a:bodyPr wrap="square" lIns="45720" rIns="45720" tIns="27432" bIns="27432">
             <a:spAutoFit/>
           </a:bodyPr>
           <a:lstStyle/>
           <a:p>
             <a:r>
-              <a:rPr sz="900" b="1">
+              <a:rPr sz="1100" b="1">
                 <a:solidFill>
                   <a:srgbClr val="AEB8E0"/>
                 </a:solidFill>
@@ -10597,8 +10672,8 @@
         </p:nvSpPr>
         <p:spPr>
           <a:xfrm>
-            <a:off x="502920" y="1115568"/>
-            <a:ext cx="1097280" cy="45720"/>
+            <a:off x="640080" y="1371600"/>
+            <a:ext cx="1463040" cy="54864"/>
           </a:xfrm>
           <a:prstGeom prst="rect">
             <a:avLst/>
@@ -10640,8 +10715,8 @@
         </p:nvSpPr>
         <p:spPr>
           <a:xfrm>
-            <a:off x="640080" y="1417320"/>
-            <a:ext cx="7863840" cy="2697480"/>
+            <a:off x="640080" y="1691640"/>
+            <a:ext cx="10972800" cy="4526280"/>
           </a:xfrm>
           <a:prstGeom prst="roundRect">
             <a:avLst/>
@@ -10649,7 +10724,7 @@
           <a:solidFill>
             <a:srgbClr val="1B2241"/>
           </a:solidFill>
-          <a:ln>
+          <a:ln w="9525">
             <a:solidFill>
               <a:srgbClr val="161E45"/>
             </a:solidFill>
@@ -10685,8 +10760,8 @@
         </p:nvSpPr>
         <p:spPr>
           <a:xfrm>
-            <a:off x="640080" y="1417320"/>
-            <a:ext cx="7863840" cy="64008"/>
+            <a:off x="640080" y="1691640"/>
+            <a:ext cx="10972800" cy="82296"/>
           </a:xfrm>
           <a:prstGeom prst="rect">
             <a:avLst/>
@@ -10728,8 +10803,8 @@
         </p:nvSpPr>
         <p:spPr>
           <a:xfrm>
-            <a:off x="914400" y="1700784"/>
-            <a:ext cx="1325880" cy="384048"/>
+            <a:off x="914400" y="2011680"/>
+            <a:ext cx="1645920" cy="502920"/>
           </a:xfrm>
           <a:prstGeom prst="rect">
             <a:avLst/>
@@ -10737,14 +10812,13 @@
           <a:noFill/>
         </p:spPr>
         <p:txBody>
-          <a:bodyPr wrap="square" lIns="27432" rIns="27432" tIns="18288" bIns="18288">
+          <a:bodyPr wrap="square" lIns="45720" rIns="45720" tIns="27432" bIns="27432">
             <a:spAutoFit/>
           </a:bodyPr>
           <a:lstStyle/>
           <a:p>
-            <a:pPr algn="ctr"/>
-            <a:r>
-              <a:rPr sz="2000" b="1">
+            <a:r>
+              <a:rPr sz="2400" b="1">
                 <a:solidFill>
                   <a:srgbClr val="C73E78"/>
                 </a:solidFill>
@@ -10763,8 +10837,8 @@
         </p:nvSpPr>
         <p:spPr>
           <a:xfrm>
-            <a:off x="2423160" y="1627632"/>
-            <a:ext cx="5577840" cy="658368"/>
+            <a:off x="2697480" y="2011680"/>
+            <a:ext cx="8595360" cy="1005840"/>
           </a:xfrm>
           <a:prstGeom prst="rect">
             <a:avLst/>
@@ -10772,13 +10846,13 @@
           <a:noFill/>
         </p:spPr>
         <p:txBody>
-          <a:bodyPr wrap="square" lIns="27432" rIns="27432" tIns="18288" bIns="18288">
+          <a:bodyPr wrap="square" lIns="45720" rIns="45720" tIns="27432" bIns="27432">
             <a:spAutoFit/>
           </a:bodyPr>
           <a:lstStyle/>
           <a:p>
             <a:r>
-              <a:rPr sz="1300" b="0">
+              <a:rPr sz="1500" b="0">
                 <a:solidFill>
                   <a:srgbClr val="AEB8E0"/>
                 </a:solidFill>
@@ -10797,8 +10871,8 @@
         </p:nvSpPr>
         <p:spPr>
           <a:xfrm>
-            <a:off x="914400" y="2560320"/>
-            <a:ext cx="1005840" cy="237744"/>
+            <a:off x="914400" y="3383280"/>
+            <a:ext cx="1554480" cy="365760"/>
           </a:xfrm>
           <a:prstGeom prst="rect">
             <a:avLst/>
@@ -10806,13 +10880,13 @@
           <a:noFill/>
         </p:spPr>
         <p:txBody>
-          <a:bodyPr wrap="square" lIns="27432" rIns="27432" tIns="18288" bIns="18288">
+          <a:bodyPr wrap="square" lIns="45720" rIns="45720" tIns="27432" bIns="27432">
             <a:spAutoFit/>
           </a:bodyPr>
           <a:lstStyle/>
           <a:p>
             <a:r>
-              <a:rPr sz="1300" b="1">
+              <a:rPr sz="1600" b="1">
                 <a:solidFill>
                   <a:srgbClr val="F5F7FF"/>
                 </a:solidFill>
@@ -10831,8 +10905,8 @@
         </p:nvSpPr>
         <p:spPr>
           <a:xfrm>
-            <a:off x="1874519" y="2542032"/>
-            <a:ext cx="6263640" cy="384048"/>
+            <a:off x="2697480" y="3383280"/>
+            <a:ext cx="8595360" cy="1097280"/>
           </a:xfrm>
           <a:prstGeom prst="rect">
             <a:avLst/>
@@ -10840,13 +10914,13 @@
           <a:noFill/>
         </p:spPr>
         <p:txBody>
-          <a:bodyPr wrap="square" lIns="27432" rIns="27432" tIns="18288" bIns="18288">
+          <a:bodyPr wrap="square" lIns="45720" rIns="45720" tIns="27432" bIns="27432">
             <a:spAutoFit/>
           </a:bodyPr>
           <a:lstStyle/>
           <a:p>
             <a:r>
-              <a:rPr sz="1200" b="0">
+              <a:rPr sz="1400" b="0">
                 <a:solidFill>
                   <a:srgbClr val="F5F7FF"/>
                 </a:solidFill>
@@ -10865,8 +10939,8 @@
         </p:nvSpPr>
         <p:spPr>
           <a:xfrm>
-            <a:off x="914400" y="3218688"/>
-            <a:ext cx="1234440" cy="237744"/>
+            <a:off x="914400" y="4709160"/>
+            <a:ext cx="1691640" cy="365760"/>
           </a:xfrm>
           <a:prstGeom prst="rect">
             <a:avLst/>
@@ -10874,13 +10948,13 @@
           <a:noFill/>
         </p:spPr>
         <p:txBody>
-          <a:bodyPr wrap="square" lIns="27432" rIns="27432" tIns="18288" bIns="18288">
+          <a:bodyPr wrap="square" lIns="45720" rIns="45720" tIns="27432" bIns="27432">
             <a:spAutoFit/>
           </a:bodyPr>
           <a:lstStyle/>
           <a:p>
             <a:r>
-              <a:rPr sz="1300" b="1">
+              <a:rPr sz="1600" b="1">
                 <a:solidFill>
                   <a:srgbClr val="F5F7FF"/>
                 </a:solidFill>
@@ -10899,8 +10973,8 @@
         </p:nvSpPr>
         <p:spPr>
           <a:xfrm>
-            <a:off x="1874519" y="3182112"/>
-            <a:ext cx="6263640" cy="438912"/>
+            <a:off x="2697480" y="4709160"/>
+            <a:ext cx="8595360" cy="1280160"/>
           </a:xfrm>
           <a:prstGeom prst="rect">
             <a:avLst/>
@@ -10908,13 +10982,13 @@
           <a:noFill/>
         </p:spPr>
         <p:txBody>
-          <a:bodyPr wrap="square" lIns="27432" rIns="27432" tIns="18288" bIns="18288">
+          <a:bodyPr wrap="square" lIns="45720" rIns="45720" tIns="27432" bIns="27432">
             <a:spAutoFit/>
           </a:bodyPr>
           <a:lstStyle/>
           <a:p>
             <a:r>
-              <a:rPr sz="1200" b="0">
+              <a:rPr sz="1400" b="0">
                 <a:solidFill>
                   <a:srgbClr val="F5F7FF"/>
                 </a:solidFill>
@@ -10963,8 +11037,8 @@
         </p:nvSpPr>
         <p:spPr>
           <a:xfrm>
-            <a:off x="502920" y="384048"/>
-            <a:ext cx="8138160" cy="713232"/>
+            <a:off x="640080" y="502920"/>
+            <a:ext cx="10972800" cy="822960"/>
           </a:xfrm>
         </p:spPr>
         <p:txBody>
@@ -10973,7 +11047,7 @@
           <a:p>
             <a:pPr algn="l"/>
             <a:r>
-              <a:rPr sz="2200" b="1">
+              <a:rPr sz="2800" b="1">
                 <a:solidFill>
                   <a:srgbClr val="F5F7FF"/>
                 </a:solidFill>
@@ -10992,8 +11066,8 @@
         </p:nvSpPr>
         <p:spPr>
           <a:xfrm>
-            <a:off x="502920" y="201168"/>
-            <a:ext cx="6400800" cy="201168"/>
+            <a:off x="640080" y="256032"/>
+            <a:ext cx="9144000" cy="256032"/>
           </a:xfrm>
           <a:prstGeom prst="rect">
             <a:avLst/>
@@ -11001,13 +11075,13 @@
           <a:noFill/>
         </p:spPr>
         <p:txBody>
-          <a:bodyPr wrap="square" lIns="27432" rIns="27432" tIns="18288" bIns="18288">
+          <a:bodyPr wrap="square" lIns="45720" rIns="45720" tIns="27432" bIns="27432">
             <a:spAutoFit/>
           </a:bodyPr>
           <a:lstStyle/>
           <a:p>
             <a:r>
-              <a:rPr sz="900" b="1">
+              <a:rPr sz="1100" b="1">
                 <a:solidFill>
                   <a:srgbClr val="AEB8E0"/>
                 </a:solidFill>
@@ -11026,8 +11100,8 @@
         </p:nvSpPr>
         <p:spPr>
           <a:xfrm>
-            <a:off x="502920" y="1115568"/>
-            <a:ext cx="1097280" cy="45720"/>
+            <a:off x="640080" y="1371600"/>
+            <a:ext cx="1463040" cy="54864"/>
           </a:xfrm>
           <a:prstGeom prst="rect">
             <a:avLst/>
@@ -11069,8 +11143,8 @@
         </p:nvSpPr>
         <p:spPr>
           <a:xfrm>
-            <a:off x="502920" y="1298448"/>
-            <a:ext cx="3886200" cy="3273552"/>
+            <a:off x="640080" y="1691640"/>
+            <a:ext cx="5440680" cy="4526280"/>
           </a:xfrm>
           <a:prstGeom prst="roundRect">
             <a:avLst/>
@@ -11078,7 +11152,7 @@
           <a:solidFill>
             <a:srgbClr val="1B2241"/>
           </a:solidFill>
-          <a:ln>
+          <a:ln w="9525">
             <a:solidFill>
               <a:srgbClr val="161E45"/>
             </a:solidFill>
@@ -11114,8 +11188,8 @@
         </p:nvSpPr>
         <p:spPr>
           <a:xfrm>
-            <a:off x="502920" y="1298448"/>
-            <a:ext cx="3886200" cy="64008"/>
+            <a:off x="640080" y="1691640"/>
+            <a:ext cx="5440680" cy="82296"/>
           </a:xfrm>
           <a:prstGeom prst="rect">
             <a:avLst/>
@@ -11157,8 +11231,8 @@
         </p:nvSpPr>
         <p:spPr>
           <a:xfrm>
-            <a:off x="749808" y="1554480"/>
-            <a:ext cx="3383280" cy="256032"/>
+            <a:off x="868680" y="1920240"/>
+            <a:ext cx="5029200" cy="365760"/>
           </a:xfrm>
           <a:prstGeom prst="rect">
             <a:avLst/>
@@ -11166,13 +11240,13 @@
           <a:noFill/>
         </p:spPr>
         <p:txBody>
-          <a:bodyPr wrap="square" lIns="27432" rIns="27432" tIns="18288" bIns="18288">
+          <a:bodyPr wrap="square" lIns="45720" rIns="45720" tIns="27432" bIns="27432">
             <a:spAutoFit/>
           </a:bodyPr>
           <a:lstStyle/>
           <a:p>
             <a:r>
-              <a:rPr sz="1300" b="1">
+              <a:rPr sz="1500" b="1">
                 <a:solidFill>
                   <a:srgbClr val="F5F7FF"/>
                 </a:solidFill>
@@ -11191,8 +11265,8 @@
         </p:nvSpPr>
         <p:spPr>
           <a:xfrm>
-            <a:off x="749808" y="1883664"/>
-            <a:ext cx="3383280" cy="2240280"/>
+            <a:off x="868680" y="2331720"/>
+            <a:ext cx="5029200" cy="3794760"/>
           </a:xfrm>
           <a:prstGeom prst="rect">
             <a:avLst/>
@@ -11200,19 +11274,19 @@
           <a:noFill/>
         </p:spPr>
         <p:txBody>
-          <a:bodyPr wrap="square" lIns="27432" rIns="27432" tIns="18288" bIns="18288">
+          <a:bodyPr wrap="square" lIns="45720" rIns="45720" tIns="27432" bIns="27432">
             <a:spAutoFit/>
           </a:bodyPr>
           <a:lstStyle/>
           <a:p>
             <a:r>
-              <a:rPr sz="900" b="0">
+              <a:rPr sz="1100" b="0">
                 <a:solidFill>
                   <a:srgbClr val="AEB8E0"/>
                 </a:solidFill>
                 <a:latin typeface="Segoe UI"/>
               </a:rPr>
-              <a:t>Analyze my OneDrive. Catalog and categorize all of the files. Create a dynamic HTML presentation showing the disposition of the files, age, relevancy, customer, product etc. The presentation should be no more than five scrolling screens with an executive overview with animated interactivity. The sixth screen should be recommendations. Create a plan to optimize my files and reorganize them. The plan should include folders and...</a:t>
+              <a:t>Analyze my OneDrive. Catalog and categorize all of the files. Create a dynamic HTML presentation showing the disposition of the files, age, relevancy, customer, product etc. The presentation should be no more than five scrolling screens with an executive overview with animated interactivity. The sixth screen should be recommendations. Create a plan to optimize my files and reorganize them. The plan should include folders and files to delete which you will rename by prepending the original name with "Delete_" and place them all into a Delete folder. Present me with your plan before you act on it.</a:t>
             </a:r>
           </a:p>
         </p:txBody>
@@ -11225,8 +11299,8 @@
         </p:nvSpPr>
         <p:spPr>
           <a:xfrm>
-            <a:off x="4663440" y="1298448"/>
-            <a:ext cx="3977639" cy="3273552"/>
+            <a:off x="6263640" y="1691640"/>
+            <a:ext cx="5440680" cy="4526280"/>
           </a:xfrm>
           <a:prstGeom prst="roundRect">
             <a:avLst/>
@@ -11234,7 +11308,7 @@
           <a:solidFill>
             <a:srgbClr val="1B2241"/>
           </a:solidFill>
-          <a:ln>
+          <a:ln w="9525">
             <a:solidFill>
               <a:srgbClr val="161E45"/>
             </a:solidFill>
@@ -11270,8 +11344,8 @@
         </p:nvSpPr>
         <p:spPr>
           <a:xfrm>
-            <a:off x="4663440" y="1298448"/>
-            <a:ext cx="3977639" cy="64008"/>
+            <a:off x="6263640" y="1691640"/>
+            <a:ext cx="5440680" cy="82296"/>
           </a:xfrm>
           <a:prstGeom prst="rect">
             <a:avLst/>
@@ -11313,8 +11387,8 @@
         </p:nvSpPr>
         <p:spPr>
           <a:xfrm>
-            <a:off x="4910328" y="1554480"/>
-            <a:ext cx="3383280" cy="256032"/>
+            <a:off x="6492240" y="1920240"/>
+            <a:ext cx="5029200" cy="365760"/>
           </a:xfrm>
           <a:prstGeom prst="rect">
             <a:avLst/>
@@ -11322,13 +11396,13 @@
           <a:noFill/>
         </p:spPr>
         <p:txBody>
-          <a:bodyPr wrap="square" lIns="27432" rIns="27432" tIns="18288" bIns="18288">
+          <a:bodyPr wrap="square" lIns="45720" rIns="45720" tIns="27432" bIns="27432">
             <a:spAutoFit/>
           </a:bodyPr>
           <a:lstStyle/>
           <a:p>
             <a:r>
-              <a:rPr sz="1300" b="1">
+              <a:rPr sz="1500" b="1">
                 <a:solidFill>
                   <a:srgbClr val="F5F7FF"/>
                 </a:solidFill>
@@ -11347,8 +11421,8 @@
         </p:nvSpPr>
         <p:spPr>
           <a:xfrm>
-            <a:off x="4892040" y="1874519"/>
-            <a:ext cx="3429000" cy="2148840"/>
+            <a:off x="6492240" y="2331720"/>
+            <a:ext cx="5029200" cy="3749039"/>
           </a:xfrm>
           <a:prstGeom prst="rect">
             <a:avLst/>
@@ -11356,16 +11430,19 @@
           <a:noFill/>
         </p:spPr>
         <p:txBody>
-          <a:bodyPr wrap="none" lIns="73152" rIns="73152" tIns="36576">
+          <a:bodyPr wrap="square" tIns="54864" bIns="54864">
             <a:spAutoFit/>
           </a:bodyPr>
           <a:lstStyle/>
           <a:p>
             <a:pPr>
+              <a:lnSpc>
+                <a:spcPct val="115000"/>
+              </a:lnSpc>
               <a:spcAft>
-                <a:spcPts val="500"/>
+                <a:spcPts val="700"/>
               </a:spcAft>
-              <a:defRPr sz="1000">
+              <a:defRPr sz="1200">
                 <a:solidFill>
                   <a:srgbClr val="F5F7FF"/>
                 </a:solidFill>
@@ -11373,15 +11450,18 @@
               </a:defRPr>
             </a:pPr>
             <a:r>
-              <a:t>• OneDrive -&gt; Scan file inventory</a:t>
+              <a:t>•  OneDrive -&gt; Scan file inventory</a:t>
             </a:r>
           </a:p>
           <a:p>
             <a:pPr>
+              <a:lnSpc>
+                <a:spcPct val="115000"/>
+              </a:lnSpc>
               <a:spcAft>
-                <a:spcPts val="500"/>
+                <a:spcPts val="700"/>
               </a:spcAft>
-              <a:defRPr sz="1000">
+              <a:defRPr sz="1200">
                 <a:solidFill>
                   <a:srgbClr val="F5F7FF"/>
                 </a:solidFill>
@@ -11389,15 +11469,18 @@
               </a:defRPr>
             </a:pPr>
             <a:r>
-              <a:t>• Catalog -&gt; Age + relevance</a:t>
+              <a:t>•  Catalog -&gt; Age + relevance</a:t>
             </a:r>
           </a:p>
           <a:p>
             <a:pPr>
+              <a:lnSpc>
+                <a:spcPct val="115000"/>
+              </a:lnSpc>
               <a:spcAft>
-                <a:spcPts val="500"/>
+                <a:spcPts val="700"/>
               </a:spcAft>
-              <a:defRPr sz="1000">
+              <a:defRPr sz="1200">
                 <a:solidFill>
                   <a:srgbClr val="F5F7FF"/>
                 </a:solidFill>
@@ -11405,15 +11488,18 @@
               </a:defRPr>
             </a:pPr>
             <a:r>
-              <a:t>• Categorize -&gt; Customer / product</a:t>
+              <a:t>•  Categorize -&gt; Customer / product</a:t>
             </a:r>
           </a:p>
           <a:p>
             <a:pPr>
+              <a:lnSpc>
+                <a:spcPct val="115000"/>
+              </a:lnSpc>
               <a:spcAft>
-                <a:spcPts val="500"/>
+                <a:spcPts val="700"/>
               </a:spcAft>
-              <a:defRPr sz="1000">
+              <a:defRPr sz="1200">
                 <a:solidFill>
                   <a:srgbClr val="F5F7FF"/>
                 </a:solidFill>
@@ -11421,15 +11507,18 @@
               </a:defRPr>
             </a:pPr>
             <a:r>
-              <a:t>• Visualize -&gt; HTML dashboard</a:t>
+              <a:t>•  Visualize -&gt; HTML dashboard</a:t>
             </a:r>
           </a:p>
           <a:p>
             <a:pPr>
+              <a:lnSpc>
+                <a:spcPct val="115000"/>
+              </a:lnSpc>
               <a:spcAft>
-                <a:spcPts val="500"/>
+                <a:spcPts val="700"/>
               </a:spcAft>
-              <a:defRPr sz="1000">
+              <a:defRPr sz="1200">
                 <a:solidFill>
                   <a:srgbClr val="F5F7FF"/>
                 </a:solidFill>
@@ -11437,41 +11526,26 @@
               </a:defRPr>
             </a:pPr>
             <a:r>
-              <a:t>• Recommend -&gt; Optimization plan</a:t>
-            </a:r>
-          </a:p>
-        </p:txBody>
-      </p:sp>
-      <p:sp>
-        <p:nvSpPr>
-          <p:cNvPr id="13" name="TextBox 12"/>
-          <p:cNvSpPr txBox="1"/>
-          <p:nvPr/>
-        </p:nvSpPr>
-        <p:spPr>
-          <a:xfrm>
-            <a:off x="4910328" y="4133087"/>
-            <a:ext cx="3337560" cy="310896"/>
-          </a:xfrm>
-          <a:prstGeom prst="rect">
-            <a:avLst/>
-          </a:prstGeom>
-          <a:noFill/>
-        </p:spPr>
-        <p:txBody>
-          <a:bodyPr wrap="square" lIns="27432" rIns="27432" tIns="18288" bIns="18288">
-            <a:spAutoFit/>
-          </a:bodyPr>
-          <a:lstStyle/>
-          <a:p>
-            <a:r>
-              <a:rPr sz="1000" b="0">
-                <a:solidFill>
-                  <a:srgbClr val="AEB8E0"/>
-                </a:solidFill>
-                <a:latin typeface="Segoe UI"/>
-              </a:rPr>
-              <a:t>An organization plan and visual overview of your files, with cleanup decisions queued up for your approval.</a:t>
+              <a:t>•  Recommend -&gt; Optimization plan</a:t>
+            </a:r>
+          </a:p>
+          <a:p>
+            <a:pPr>
+              <a:lnSpc>
+                <a:spcPct val="115000"/>
+              </a:lnSpc>
+              <a:spcAft>
+                <a:spcPts val="700"/>
+              </a:spcAft>
+              <a:defRPr sz="1200">
+                <a:solidFill>
+                  <a:srgbClr val="F5F7FF"/>
+                </a:solidFill>
+                <a:latin typeface="Segoe UI"/>
+              </a:defRPr>
+            </a:pPr>
+            <a:r>
+              <a:t>•  Rename -&gt; "Delete_" files</a:t>
             </a:r>
           </a:p>
         </p:txBody>
@@ -11514,8 +11588,8 @@
         </p:nvSpPr>
         <p:spPr>
           <a:xfrm>
-            <a:off x="502920" y="384048"/>
-            <a:ext cx="8138160" cy="713232"/>
+            <a:off x="640080" y="502920"/>
+            <a:ext cx="10972800" cy="822960"/>
           </a:xfrm>
         </p:spPr>
         <p:txBody>
@@ -11524,7 +11598,7 @@
           <a:p>
             <a:pPr algn="l"/>
             <a:r>
-              <a:rPr sz="2200" b="1">
+              <a:rPr sz="2800" b="1">
                 <a:solidFill>
                   <a:srgbClr val="F5F7FF"/>
                 </a:solidFill>
@@ -11543,8 +11617,8 @@
         </p:nvSpPr>
         <p:spPr>
           <a:xfrm>
-            <a:off x="502920" y="201168"/>
-            <a:ext cx="6400800" cy="201168"/>
+            <a:off x="640080" y="256032"/>
+            <a:ext cx="9144000" cy="256032"/>
           </a:xfrm>
           <a:prstGeom prst="rect">
             <a:avLst/>
@@ -11552,13 +11626,13 @@
           <a:noFill/>
         </p:spPr>
         <p:txBody>
-          <a:bodyPr wrap="square" lIns="27432" rIns="27432" tIns="18288" bIns="18288">
+          <a:bodyPr wrap="square" lIns="45720" rIns="45720" tIns="27432" bIns="27432">
             <a:spAutoFit/>
           </a:bodyPr>
           <a:lstStyle/>
           <a:p>
             <a:r>
-              <a:rPr sz="900" b="1">
+              <a:rPr sz="1100" b="1">
                 <a:solidFill>
                   <a:srgbClr val="AEB8E0"/>
                 </a:solidFill>
@@ -11577,8 +11651,8 @@
         </p:nvSpPr>
         <p:spPr>
           <a:xfrm>
-            <a:off x="502920" y="1115568"/>
-            <a:ext cx="1097280" cy="45720"/>
+            <a:off x="640080" y="1371600"/>
+            <a:ext cx="1463040" cy="54864"/>
           </a:xfrm>
           <a:prstGeom prst="rect">
             <a:avLst/>
@@ -11620,8 +11694,8 @@
         </p:nvSpPr>
         <p:spPr>
           <a:xfrm>
-            <a:off x="914400" y="1600200"/>
-            <a:ext cx="7315200" cy="2240280"/>
+            <a:off x="1188720" y="2194560"/>
+            <a:ext cx="9784080" cy="3108960"/>
           </a:xfrm>
           <a:prstGeom prst="roundRect">
             <a:avLst/>
@@ -11629,7 +11703,7 @@
           <a:solidFill>
             <a:srgbClr val="1B2241"/>
           </a:solidFill>
-          <a:ln>
+          <a:ln w="9525">
             <a:solidFill>
               <a:srgbClr val="161E45"/>
             </a:solidFill>
@@ -11665,8 +11739,8 @@
         </p:nvSpPr>
         <p:spPr>
           <a:xfrm>
-            <a:off x="914400" y="1600200"/>
-            <a:ext cx="7315200" cy="64008"/>
+            <a:off x="1188720" y="2194560"/>
+            <a:ext cx="9784080" cy="82296"/>
           </a:xfrm>
           <a:prstGeom prst="rect">
             <a:avLst/>
@@ -11708,8 +11782,8 @@
         </p:nvSpPr>
         <p:spPr>
           <a:xfrm>
-            <a:off x="1234440" y="1901952"/>
-            <a:ext cx="1097280" cy="411480"/>
+            <a:off x="1554480" y="2606040"/>
+            <a:ext cx="1463040" cy="548640"/>
           </a:xfrm>
           <a:prstGeom prst="rect">
             <a:avLst/>
@@ -11717,13 +11791,13 @@
           <a:noFill/>
         </p:spPr>
         <p:txBody>
-          <a:bodyPr wrap="square" lIns="27432" rIns="27432" tIns="18288" bIns="18288">
+          <a:bodyPr wrap="square" lIns="45720" rIns="45720" tIns="27432" bIns="27432">
             <a:spAutoFit/>
           </a:bodyPr>
           <a:lstStyle/>
           <a:p>
             <a:r>
-              <a:rPr sz="2200" b="1">
+              <a:rPr sz="2800" b="1">
                 <a:solidFill>
                   <a:srgbClr val="73B82E"/>
                 </a:solidFill>
@@ -11742,8 +11816,8 @@
         </p:nvSpPr>
         <p:spPr>
           <a:xfrm>
-            <a:off x="1234440" y="2514600"/>
-            <a:ext cx="6583680" cy="868680"/>
+            <a:off x="1554480" y="3337560"/>
+            <a:ext cx="9052560" cy="1737360"/>
           </a:xfrm>
           <a:prstGeom prst="rect">
             <a:avLst/>
@@ -11751,13 +11825,13 @@
           <a:noFill/>
         </p:spPr>
         <p:txBody>
-          <a:bodyPr wrap="square" lIns="27432" rIns="27432" tIns="18288" bIns="18288">
+          <a:bodyPr wrap="square" lIns="45720" rIns="45720" tIns="27432" bIns="27432">
             <a:spAutoFit/>
           </a:bodyPr>
           <a:lstStyle/>
           <a:p>
             <a:r>
-              <a:rPr sz="1700" b="0">
+              <a:rPr sz="1900" b="0">
                 <a:solidFill>
                   <a:srgbClr val="F5F7FF"/>
                 </a:solidFill>
@@ -11806,8 +11880,8 @@
         </p:nvSpPr>
         <p:spPr>
           <a:xfrm>
-            <a:off x="502920" y="384048"/>
-            <a:ext cx="8138160" cy="713232"/>
+            <a:off x="640080" y="502920"/>
+            <a:ext cx="10972800" cy="822960"/>
           </a:xfrm>
         </p:spPr>
         <p:txBody>
@@ -11816,7 +11890,7 @@
           <a:p>
             <a:pPr algn="l"/>
             <a:r>
-              <a:rPr sz="2200" b="1">
+              <a:rPr sz="2800" b="1">
                 <a:solidFill>
                   <a:srgbClr val="F5F7FF"/>
                 </a:solidFill>
@@ -11835,8 +11909,8 @@
         </p:nvSpPr>
         <p:spPr>
           <a:xfrm>
-            <a:off x="502920" y="201168"/>
-            <a:ext cx="6400800" cy="201168"/>
+            <a:off x="640080" y="256032"/>
+            <a:ext cx="9144000" cy="256032"/>
           </a:xfrm>
           <a:prstGeom prst="rect">
             <a:avLst/>
@@ -11844,13 +11918,13 @@
           <a:noFill/>
         </p:spPr>
         <p:txBody>
-          <a:bodyPr wrap="square" lIns="27432" rIns="27432" tIns="18288" bIns="18288">
+          <a:bodyPr wrap="square" lIns="45720" rIns="45720" tIns="27432" bIns="27432">
             <a:spAutoFit/>
           </a:bodyPr>
           <a:lstStyle/>
           <a:p>
             <a:r>
-              <a:rPr sz="900" b="1">
+              <a:rPr sz="1100" b="1">
                 <a:solidFill>
                   <a:srgbClr val="AEB8E0"/>
                 </a:solidFill>
@@ -11869,8 +11943,8 @@
         </p:nvSpPr>
         <p:spPr>
           <a:xfrm>
-            <a:off x="502920" y="1115568"/>
-            <a:ext cx="1097280" cy="45720"/>
+            <a:off x="640080" y="1371600"/>
+            <a:ext cx="1463040" cy="54864"/>
           </a:xfrm>
           <a:prstGeom prst="rect">
             <a:avLst/>
@@ -11912,8 +11986,8 @@
         </p:nvSpPr>
         <p:spPr>
           <a:xfrm>
-            <a:off x="731520" y="1325880"/>
-            <a:ext cx="7680960" cy="3108960"/>
+            <a:off x="822960" y="1691640"/>
+            <a:ext cx="10515600" cy="4572000"/>
           </a:xfrm>
           <a:prstGeom prst="rect">
             <a:avLst/>
@@ -11921,27 +11995,30 @@
           <a:noFill/>
         </p:spPr>
         <p:txBody>
-          <a:bodyPr wrap="square" lIns="73152" rIns="73152" tIns="36576">
+          <a:bodyPr wrap="square" tIns="54864">
             <a:spAutoFit/>
           </a:bodyPr>
           <a:lstStyle/>
           <a:p>
             <a:pPr>
+              <a:lnSpc>
+                <a:spcPct val="120000"/>
+              </a:lnSpc>
               <a:spcAft>
-                <a:spcPts val="500"/>
+                <a:spcPts val="800"/>
               </a:spcAft>
             </a:pPr>
             <a:r>
-              <a:rPr sz="1200">
+              <a:rPr sz="1400">
                 <a:solidFill>
                   <a:srgbClr val="F5F7FF"/>
                 </a:solidFill>
                 <a:latin typeface="Segoe UI"/>
               </a:rPr>
-              <a:t>• </a:t>
-            </a:r>
-            <a:r>
-              <a:rPr sz="1200" u="sng">
+              <a:t>•  </a:t>
+            </a:r>
+            <a:r>
+              <a:rPr sz="1400" u="sng">
                 <a:solidFill>
                   <a:srgbClr val="00B7C3"/>
                 </a:solidFill>
@@ -11953,21 +12030,24 @@
           </a:p>
           <a:p>
             <a:pPr>
+              <a:lnSpc>
+                <a:spcPct val="120000"/>
+              </a:lnSpc>
               <a:spcAft>
-                <a:spcPts val="500"/>
+                <a:spcPts val="800"/>
               </a:spcAft>
             </a:pPr>
             <a:r>
-              <a:rPr sz="1200">
+              <a:rPr sz="1400">
                 <a:solidFill>
                   <a:srgbClr val="F5F7FF"/>
                 </a:solidFill>
                 <a:latin typeface="Segoe UI"/>
               </a:rPr>
-              <a:t>• </a:t>
-            </a:r>
-            <a:r>
-              <a:rPr sz="1200" u="sng">
+              <a:t>•  </a:t>
+            </a:r>
+            <a:r>
+              <a:rPr sz="1400" u="sng">
                 <a:solidFill>
                   <a:srgbClr val="00B7C3"/>
                 </a:solidFill>
@@ -11979,21 +12059,24 @@
           </a:p>
           <a:p>
             <a:pPr>
+              <a:lnSpc>
+                <a:spcPct val="120000"/>
+              </a:lnSpc>
               <a:spcAft>
-                <a:spcPts val="500"/>
+                <a:spcPts val="800"/>
               </a:spcAft>
             </a:pPr>
             <a:r>
-              <a:rPr sz="1200">
+              <a:rPr sz="1400">
                 <a:solidFill>
                   <a:srgbClr val="F5F7FF"/>
                 </a:solidFill>
                 <a:latin typeface="Segoe UI"/>
               </a:rPr>
-              <a:t>• </a:t>
-            </a:r>
-            <a:r>
-              <a:rPr sz="1200" u="sng">
+              <a:t>•  </a:t>
+            </a:r>
+            <a:r>
+              <a:rPr sz="1400" u="sng">
                 <a:solidFill>
                   <a:srgbClr val="00B7C3"/>
                 </a:solidFill>
@@ -12005,21 +12088,24 @@
           </a:p>
           <a:p>
             <a:pPr>
+              <a:lnSpc>
+                <a:spcPct val="120000"/>
+              </a:lnSpc>
               <a:spcAft>
-                <a:spcPts val="500"/>
+                <a:spcPts val="800"/>
               </a:spcAft>
             </a:pPr>
             <a:r>
-              <a:rPr sz="1200">
+              <a:rPr sz="1400">
                 <a:solidFill>
                   <a:srgbClr val="F5F7FF"/>
                 </a:solidFill>
                 <a:latin typeface="Segoe UI"/>
               </a:rPr>
-              <a:t>• </a:t>
-            </a:r>
-            <a:r>
-              <a:rPr sz="1200" u="sng">
+              <a:t>•  </a:t>
+            </a:r>
+            <a:r>
+              <a:rPr sz="1400" u="sng">
                 <a:solidFill>
                   <a:srgbClr val="00B7C3"/>
                 </a:solidFill>
@@ -12031,21 +12117,24 @@
           </a:p>
           <a:p>
             <a:pPr>
+              <a:lnSpc>
+                <a:spcPct val="120000"/>
+              </a:lnSpc>
               <a:spcAft>
-                <a:spcPts val="500"/>
+                <a:spcPts val="800"/>
               </a:spcAft>
             </a:pPr>
             <a:r>
-              <a:rPr sz="1200">
+              <a:rPr sz="1400">
                 <a:solidFill>
                   <a:srgbClr val="F5F7FF"/>
                 </a:solidFill>
                 <a:latin typeface="Segoe UI"/>
               </a:rPr>
-              <a:t>• </a:t>
-            </a:r>
-            <a:r>
-              <a:rPr sz="1200" u="sng">
+              <a:t>•  </a:t>
+            </a:r>
+            <a:r>
+              <a:rPr sz="1400" u="sng">
                 <a:solidFill>
                   <a:srgbClr val="00B7C3"/>
                 </a:solidFill>
@@ -12057,21 +12146,24 @@
           </a:p>
           <a:p>
             <a:pPr>
+              <a:lnSpc>
+                <a:spcPct val="120000"/>
+              </a:lnSpc>
               <a:spcAft>
-                <a:spcPts val="500"/>
+                <a:spcPts val="800"/>
               </a:spcAft>
             </a:pPr>
             <a:r>
-              <a:rPr sz="1200">
+              <a:rPr sz="1400">
                 <a:solidFill>
                   <a:srgbClr val="F5F7FF"/>
                 </a:solidFill>
                 <a:latin typeface="Segoe UI"/>
               </a:rPr>
-              <a:t>• </a:t>
-            </a:r>
-            <a:r>
-              <a:rPr sz="1200" u="sng">
+              <a:t>•  </a:t>
+            </a:r>
+            <a:r>
+              <a:rPr sz="1400" u="sng">
                 <a:solidFill>
                   <a:srgbClr val="00B7C3"/>
                 </a:solidFill>
@@ -12083,21 +12175,24 @@
           </a:p>
           <a:p>
             <a:pPr>
+              <a:lnSpc>
+                <a:spcPct val="120000"/>
+              </a:lnSpc>
               <a:spcAft>
-                <a:spcPts val="500"/>
+                <a:spcPts val="800"/>
               </a:spcAft>
             </a:pPr>
             <a:r>
-              <a:rPr sz="1200">
+              <a:rPr sz="1400">
                 <a:solidFill>
                   <a:srgbClr val="F5F7FF"/>
                 </a:solidFill>
                 <a:latin typeface="Segoe UI"/>
               </a:rPr>
-              <a:t>• </a:t>
-            </a:r>
-            <a:r>
-              <a:rPr sz="1200" u="sng">
+              <a:t>•  </a:t>
+            </a:r>
+            <a:r>
+              <a:rPr sz="1400" u="sng">
                 <a:solidFill>
                   <a:srgbClr val="00B7C3"/>
                 </a:solidFill>
@@ -12109,21 +12204,24 @@
           </a:p>
           <a:p>
             <a:pPr>
+              <a:lnSpc>
+                <a:spcPct val="120000"/>
+              </a:lnSpc>
               <a:spcAft>
-                <a:spcPts val="500"/>
+                <a:spcPts val="800"/>
               </a:spcAft>
             </a:pPr>
             <a:r>
-              <a:rPr sz="1200">
+              <a:rPr sz="1400">
                 <a:solidFill>
                   <a:srgbClr val="F5F7FF"/>
                 </a:solidFill>
                 <a:latin typeface="Segoe UI"/>
               </a:rPr>
-              <a:t>• </a:t>
-            </a:r>
-            <a:r>
-              <a:rPr sz="1200" u="sng">
+              <a:t>•  </a:t>
+            </a:r>
+            <a:r>
+              <a:rPr sz="1400" u="sng">
                 <a:solidFill>
                   <a:srgbClr val="00B7C3"/>
                 </a:solidFill>
@@ -12173,8 +12271,8 @@
         </p:nvSpPr>
         <p:spPr>
           <a:xfrm>
-            <a:off x="502920" y="384048"/>
-            <a:ext cx="8138160" cy="713232"/>
+            <a:off x="640080" y="502920"/>
+            <a:ext cx="10972800" cy="822960"/>
           </a:xfrm>
         </p:spPr>
         <p:txBody>
@@ -12183,7 +12281,7 @@
           <a:p>
             <a:pPr algn="l"/>
             <a:r>
-              <a:rPr sz="2200" b="1">
+              <a:rPr sz="2800" b="1">
                 <a:solidFill>
                   <a:srgbClr val="F5F7FF"/>
                 </a:solidFill>
@@ -12202,8 +12300,8 @@
         </p:nvSpPr>
         <p:spPr>
           <a:xfrm>
-            <a:off x="502920" y="201168"/>
-            <a:ext cx="6400800" cy="201168"/>
+            <a:off x="640080" y="256032"/>
+            <a:ext cx="9144000" cy="256032"/>
           </a:xfrm>
           <a:prstGeom prst="rect">
             <a:avLst/>
@@ -12211,13 +12309,13 @@
           <a:noFill/>
         </p:spPr>
         <p:txBody>
-          <a:bodyPr wrap="square" lIns="27432" rIns="27432" tIns="18288" bIns="18288">
+          <a:bodyPr wrap="square" lIns="45720" rIns="45720" tIns="27432" bIns="27432">
             <a:spAutoFit/>
           </a:bodyPr>
           <a:lstStyle/>
           <a:p>
             <a:r>
-              <a:rPr sz="900" b="1">
+              <a:rPr sz="1100" b="1">
                 <a:solidFill>
                   <a:srgbClr val="AEB8E0"/>
                 </a:solidFill>
@@ -12236,8 +12334,8 @@
         </p:nvSpPr>
         <p:spPr>
           <a:xfrm>
-            <a:off x="502920" y="1115568"/>
-            <a:ext cx="1097280" cy="45720"/>
+            <a:off x="640080" y="1371600"/>
+            <a:ext cx="1463040" cy="54864"/>
           </a:xfrm>
           <a:prstGeom prst="rect">
             <a:avLst/>
@@ -12279,8 +12377,8 @@
         </p:nvSpPr>
         <p:spPr>
           <a:xfrm>
-            <a:off x="548640" y="1234440"/>
-            <a:ext cx="7955279" cy="411480"/>
+            <a:off x="640080" y="1554480"/>
+            <a:ext cx="10972800" cy="502920"/>
           </a:xfrm>
           <a:prstGeom prst="rect">
             <a:avLst/>
@@ -12288,13 +12386,13 @@
           <a:noFill/>
         </p:spPr>
         <p:txBody>
-          <a:bodyPr wrap="square" lIns="27432" rIns="27432" tIns="18288" bIns="18288">
+          <a:bodyPr wrap="square" lIns="45720" rIns="45720" tIns="27432" bIns="27432">
             <a:spAutoFit/>
           </a:bodyPr>
           <a:lstStyle/>
           <a:p>
             <a:r>
-              <a:rPr sz="1300" b="0">
+              <a:rPr sz="1500" b="0">
                 <a:solidFill>
                   <a:srgbClr val="AEB8E0"/>
                 </a:solidFill>
@@ -12313,8 +12411,8 @@
         </p:nvSpPr>
         <p:spPr>
           <a:xfrm>
-            <a:off x="548640" y="1783080"/>
-            <a:ext cx="3886200" cy="2606040"/>
+            <a:off x="640080" y="2194560"/>
+            <a:ext cx="5440680" cy="4206240"/>
           </a:xfrm>
           <a:prstGeom prst="roundRect">
             <a:avLst/>
@@ -12322,7 +12420,7 @@
           <a:solidFill>
             <a:srgbClr val="1B2241"/>
           </a:solidFill>
-          <a:ln>
+          <a:ln w="9525">
             <a:solidFill>
               <a:srgbClr val="161E45"/>
             </a:solidFill>
@@ -12358,8 +12456,8 @@
         </p:nvSpPr>
         <p:spPr>
           <a:xfrm>
-            <a:off x="548640" y="1783080"/>
-            <a:ext cx="3886200" cy="64008"/>
+            <a:off x="640080" y="2194560"/>
+            <a:ext cx="5440680" cy="82296"/>
           </a:xfrm>
           <a:prstGeom prst="rect">
             <a:avLst/>
@@ -12401,8 +12499,8 @@
         </p:nvSpPr>
         <p:spPr>
           <a:xfrm>
-            <a:off x="777240" y="2029968"/>
-            <a:ext cx="3429000" cy="2057400"/>
+            <a:off x="868680" y="2423160"/>
+            <a:ext cx="5074920" cy="3840479"/>
           </a:xfrm>
           <a:prstGeom prst="rect">
             <a:avLst/>
@@ -12410,16 +12508,19 @@
           <a:noFill/>
         </p:spPr>
         <p:txBody>
-          <a:bodyPr wrap="none" lIns="73152" rIns="73152" tIns="36576">
+          <a:bodyPr wrap="square" tIns="54864" bIns="54864">
             <a:spAutoFit/>
           </a:bodyPr>
           <a:lstStyle/>
           <a:p>
             <a:pPr>
+              <a:lnSpc>
+                <a:spcPct val="115000"/>
+              </a:lnSpc>
               <a:spcAft>
-                <a:spcPts val="500"/>
+                <a:spcPts val="700"/>
               </a:spcAft>
-              <a:defRPr sz="1300">
+              <a:defRPr sz="1400">
                 <a:solidFill>
                   <a:srgbClr val="F5F7FF"/>
                 </a:solidFill>
@@ -12427,15 +12528,18 @@
               </a:defRPr>
             </a:pPr>
             <a:r>
-              <a:t>• Quick question, brainstorm, or short reply</a:t>
+              <a:t>•  Quick question, brainstorm, or short reply</a:t>
             </a:r>
           </a:p>
           <a:p>
             <a:pPr>
+              <a:lnSpc>
+                <a:spcPct val="115000"/>
+              </a:lnSpc>
               <a:spcAft>
-                <a:spcPts val="500"/>
+                <a:spcPts val="700"/>
               </a:spcAft>
-              <a:defRPr sz="1300">
+              <a:defRPr sz="1400">
                 <a:solidFill>
                   <a:srgbClr val="F5F7FF"/>
                 </a:solidFill>
@@ -12443,15 +12547,18 @@
               </a:defRPr>
             </a:pPr>
             <a:r>
-              <a:t>• Draft or reply in Outlook, summarise a Teams meeting, edit a Word, Excel, or PowerPoint file</a:t>
+              <a:t>•  Draft or reply in Outlook, summarise a Teams meeting, edit a Word, Excel, or PowerPoint file</a:t>
             </a:r>
           </a:p>
           <a:p>
             <a:pPr>
+              <a:lnSpc>
+                <a:spcPct val="115000"/>
+              </a:lnSpc>
               <a:spcAft>
-                <a:spcPts val="500"/>
+                <a:spcPts val="700"/>
               </a:spcAft>
-              <a:defRPr sz="1300">
+              <a:defRPr sz="1400">
                 <a:solidFill>
                   <a:srgbClr val="F5F7FF"/>
                 </a:solidFill>
@@ -12459,15 +12566,18 @@
               </a:defRPr>
             </a:pPr>
             <a:r>
-              <a:t>• Deep, multi-source research with citations and a shareable report</a:t>
+              <a:t>•  Deep, multi-source research with citations and a shareable report</a:t>
             </a:r>
           </a:p>
           <a:p>
             <a:pPr>
+              <a:lnSpc>
+                <a:spcPct val="115000"/>
+              </a:lnSpc>
               <a:spcAft>
-                <a:spcPts val="500"/>
+                <a:spcPts val="700"/>
               </a:spcAft>
-              <a:defRPr sz="1300">
+              <a:defRPr sz="1400">
                 <a:solidFill>
                   <a:srgbClr val="F5F7FF"/>
                 </a:solidFill>
@@ -12475,7 +12585,7 @@
               </a:defRPr>
             </a:pPr>
             <a:r>
-              <a:t>• Take real action across Microsoft 365 (send emails, schedule meetings, post in Teams, organise files)</a:t>
+              <a:t>•  Take real action across Microsoft 365 (send emails, schedule meetings, post in Teams, organise files)</a:t>
             </a:r>
           </a:p>
         </p:txBody>
@@ -12488,8 +12598,8 @@
         </p:nvSpPr>
         <p:spPr>
           <a:xfrm>
-            <a:off x="4709160" y="1783080"/>
-            <a:ext cx="3886200" cy="2606040"/>
+            <a:off x="6263640" y="2194560"/>
+            <a:ext cx="5440680" cy="4206240"/>
           </a:xfrm>
           <a:prstGeom prst="roundRect">
             <a:avLst/>
@@ -12497,7 +12607,7 @@
           <a:solidFill>
             <a:srgbClr val="1B2241"/>
           </a:solidFill>
-          <a:ln>
+          <a:ln w="9525">
             <a:solidFill>
               <a:srgbClr val="161E45"/>
             </a:solidFill>
@@ -12533,8 +12643,8 @@
         </p:nvSpPr>
         <p:spPr>
           <a:xfrm>
-            <a:off x="4709160" y="1783080"/>
-            <a:ext cx="3886200" cy="64008"/>
+            <a:off x="6263640" y="2194560"/>
+            <a:ext cx="5440680" cy="82296"/>
           </a:xfrm>
           <a:prstGeom prst="rect">
             <a:avLst/>
@@ -12576,8 +12686,8 @@
         </p:nvSpPr>
         <p:spPr>
           <a:xfrm>
-            <a:off x="4937760" y="2029968"/>
-            <a:ext cx="3429000" cy="2057400"/>
+            <a:off x="6492240" y="2423160"/>
+            <a:ext cx="5074920" cy="3840479"/>
           </a:xfrm>
           <a:prstGeom prst="rect">
             <a:avLst/>
@@ -12585,16 +12695,19 @@
           <a:noFill/>
         </p:spPr>
         <p:txBody>
-          <a:bodyPr wrap="none" lIns="73152" rIns="73152" tIns="36576">
+          <a:bodyPr wrap="square" tIns="54864" bIns="54864">
             <a:spAutoFit/>
           </a:bodyPr>
           <a:lstStyle/>
           <a:p>
             <a:pPr>
+              <a:lnSpc>
+                <a:spcPct val="115000"/>
+              </a:lnSpc>
               <a:spcAft>
-                <a:spcPts val="500"/>
+                <a:spcPts val="700"/>
               </a:spcAft>
-              <a:defRPr sz="1300">
+              <a:defRPr sz="1400">
                 <a:solidFill>
                   <a:srgbClr val="F5F7FF"/>
                 </a:solidFill>
@@ -12602,15 +12715,18 @@
               </a:defRPr>
             </a:pPr>
             <a:r>
-              <a:t>• One prompt, multiple deliverables (for example: a Word brief, an Excel model, and a deck)</a:t>
+              <a:t>•  One prompt, multiple deliverables (for example: a Word brief, an Excel model, and a deck)</a:t>
             </a:r>
           </a:p>
           <a:p>
             <a:pPr>
+              <a:lnSpc>
+                <a:spcPct val="115000"/>
+              </a:lnSpc>
               <a:spcAft>
-                <a:spcPts val="500"/>
+                <a:spcPts val="700"/>
               </a:spcAft>
-              <a:defRPr sz="1300">
+              <a:defRPr sz="1400">
                 <a:solidFill>
                   <a:srgbClr val="F5F7FF"/>
                 </a:solidFill>
@@ -12618,15 +12734,18 @@
               </a:defRPr>
             </a:pPr>
             <a:r>
-              <a:t>• A small, content-focused Q&amp;A bot for yourself or a small team (for example: answer questions from a team SharePoint)</a:t>
+              <a:t>•  A small, content-focused Q&amp;A bot for yourself or a small team (for example: answer questions from a team SharePoint)</a:t>
             </a:r>
           </a:p>
           <a:p>
             <a:pPr>
+              <a:lnSpc>
+                <a:spcPct val="115000"/>
+              </a:lnSpc>
               <a:spcAft>
-                <a:spcPts val="500"/>
+                <a:spcPts val="700"/>
               </a:spcAft>
-              <a:defRPr sz="1300">
+              <a:defRPr sz="1400">
                 <a:solidFill>
                   <a:srgbClr val="F5F7FF"/>
                 </a:solidFill>
@@ -12634,7 +12753,7 @@
               </a:defRPr>
             </a:pPr>
             <a:r>
-              <a:t>• A repeated, role-specific process for a whole department or external customers (for example: dealer onboarding, customer service, IT helpdesk triage, sales assistant on CRM)</a:t>
+              <a:t>•  A repeated, role-specific process for a whole department or external customers (for example: dealer onboarding, customer service, IT helpdesk triage, sales assistant on CRM)</a:t>
             </a:r>
           </a:p>
         </p:txBody>
@@ -12677,8 +12796,8 @@
         </p:nvSpPr>
         <p:spPr>
           <a:xfrm>
-            <a:off x="502920" y="384048"/>
-            <a:ext cx="8138160" cy="713232"/>
+            <a:off x="640080" y="502920"/>
+            <a:ext cx="10972800" cy="822960"/>
           </a:xfrm>
         </p:spPr>
         <p:txBody>
@@ -12687,7 +12806,7 @@
           <a:p>
             <a:pPr algn="l"/>
             <a:r>
-              <a:rPr sz="2200" b="1">
+              <a:rPr sz="2800" b="1">
                 <a:solidFill>
                   <a:srgbClr val="F5F7FF"/>
                 </a:solidFill>
@@ -12706,8 +12825,8 @@
         </p:nvSpPr>
         <p:spPr>
           <a:xfrm>
-            <a:off x="502920" y="201168"/>
-            <a:ext cx="6400800" cy="201168"/>
+            <a:off x="640080" y="256032"/>
+            <a:ext cx="9144000" cy="256032"/>
           </a:xfrm>
           <a:prstGeom prst="rect">
             <a:avLst/>
@@ -12715,13 +12834,13 @@
           <a:noFill/>
         </p:spPr>
         <p:txBody>
-          <a:bodyPr wrap="square" lIns="27432" rIns="27432" tIns="18288" bIns="18288">
+          <a:bodyPr wrap="square" lIns="45720" rIns="45720" tIns="27432" bIns="27432">
             <a:spAutoFit/>
           </a:bodyPr>
           <a:lstStyle/>
           <a:p>
             <a:r>
-              <a:rPr sz="900" b="1">
+              <a:rPr sz="1100" b="1">
                 <a:solidFill>
                   <a:srgbClr val="AEB8E0"/>
                 </a:solidFill>
@@ -12740,8 +12859,8 @@
         </p:nvSpPr>
         <p:spPr>
           <a:xfrm>
-            <a:off x="502920" y="1115568"/>
-            <a:ext cx="1097280" cy="45720"/>
+            <a:off x="640080" y="1371600"/>
+            <a:ext cx="1463040" cy="54864"/>
           </a:xfrm>
           <a:prstGeom prst="rect">
             <a:avLst/>
@@ -12783,8 +12902,8 @@
         </p:nvSpPr>
         <p:spPr>
           <a:xfrm>
-            <a:off x="548640" y="1234440"/>
-            <a:ext cx="7955279" cy="411480"/>
+            <a:off x="640080" y="1554480"/>
+            <a:ext cx="10972800" cy="502920"/>
           </a:xfrm>
           <a:prstGeom prst="rect">
             <a:avLst/>
@@ -12792,13 +12911,13 @@
           <a:noFill/>
         </p:spPr>
         <p:txBody>
-          <a:bodyPr wrap="square" lIns="27432" rIns="27432" tIns="18288" bIns="18288">
+          <a:bodyPr wrap="square" lIns="45720" rIns="45720" tIns="27432" bIns="27432">
             <a:spAutoFit/>
           </a:bodyPr>
           <a:lstStyle/>
           <a:p>
             <a:r>
-              <a:rPr sz="1300" b="0">
+              <a:rPr sz="1500" b="0">
                 <a:solidFill>
                   <a:srgbClr val="AEB8E0"/>
                 </a:solidFill>
@@ -12817,8 +12936,8 @@
         </p:nvSpPr>
         <p:spPr>
           <a:xfrm>
-            <a:off x="548640" y="1783080"/>
-            <a:ext cx="3886200" cy="2606040"/>
+            <a:off x="640080" y="2194560"/>
+            <a:ext cx="5440680" cy="4206240"/>
           </a:xfrm>
           <a:prstGeom prst="roundRect">
             <a:avLst/>
@@ -12826,7 +12945,7 @@
           <a:solidFill>
             <a:srgbClr val="1B2241"/>
           </a:solidFill>
-          <a:ln>
+          <a:ln w="9525">
             <a:solidFill>
               <a:srgbClr val="161E45"/>
             </a:solidFill>
@@ -12862,8 +12981,8 @@
         </p:nvSpPr>
         <p:spPr>
           <a:xfrm>
-            <a:off x="548640" y="1783080"/>
-            <a:ext cx="3886200" cy="64008"/>
+            <a:off x="640080" y="2194560"/>
+            <a:ext cx="5440680" cy="82296"/>
           </a:xfrm>
           <a:prstGeom prst="rect">
             <a:avLst/>
@@ -12905,8 +13024,8 @@
         </p:nvSpPr>
         <p:spPr>
           <a:xfrm>
-            <a:off x="777240" y="2029968"/>
-            <a:ext cx="3429000" cy="2057400"/>
+            <a:off x="868680" y="2423160"/>
+            <a:ext cx="5074920" cy="3840479"/>
           </a:xfrm>
           <a:prstGeom prst="rect">
             <a:avLst/>
@@ -12914,16 +13033,19 @@
           <a:noFill/>
         </p:spPr>
         <p:txBody>
-          <a:bodyPr wrap="none" lIns="73152" rIns="73152" tIns="36576">
+          <a:bodyPr wrap="square" tIns="54864" bIns="54864">
             <a:spAutoFit/>
           </a:bodyPr>
           <a:lstStyle/>
           <a:p>
             <a:pPr>
+              <a:lnSpc>
+                <a:spcPct val="115000"/>
+              </a:lnSpc>
               <a:spcAft>
-                <a:spcPts val="500"/>
+                <a:spcPts val="700"/>
               </a:spcAft>
-              <a:defRPr sz="1300">
+              <a:defRPr sz="1400">
                 <a:solidFill>
                   <a:srgbClr val="F5F7FF"/>
                 </a:solidFill>
@@ -12931,7 +13053,7 @@
               </a:defRPr>
             </a:pPr>
             <a:r>
-              <a:t>• Use this page section as the decision checkpoint for the workflow.</a:t>
+              <a:t>•  Use this page section as the decision checkpoint for the workflow.</a:t>
             </a:r>
           </a:p>
         </p:txBody>
@@ -12944,8 +13066,8 @@
         </p:nvSpPr>
         <p:spPr>
           <a:xfrm>
-            <a:off x="4709160" y="1783080"/>
-            <a:ext cx="3886200" cy="2606040"/>
+            <a:off x="6263640" y="2194560"/>
+            <a:ext cx="5440680" cy="4206240"/>
           </a:xfrm>
           <a:prstGeom prst="roundRect">
             <a:avLst/>
@@ -12953,7 +13075,7 @@
           <a:solidFill>
             <a:srgbClr val="1B2241"/>
           </a:solidFill>
-          <a:ln>
+          <a:ln w="9525">
             <a:solidFill>
               <a:srgbClr val="161E45"/>
             </a:solidFill>
@@ -12989,8 +13111,8 @@
         </p:nvSpPr>
         <p:spPr>
           <a:xfrm>
-            <a:off x="4709160" y="1783080"/>
-            <a:ext cx="3886200" cy="64008"/>
+            <a:off x="6263640" y="2194560"/>
+            <a:ext cx="5440680" cy="82296"/>
           </a:xfrm>
           <a:prstGeom prst="rect">
             <a:avLst/>
@@ -13032,8 +13154,8 @@
         </p:nvSpPr>
         <p:spPr>
           <a:xfrm>
-            <a:off x="4983480" y="2057400"/>
-            <a:ext cx="3108960" cy="274320"/>
+            <a:off x="6492240" y="2468879"/>
+            <a:ext cx="5029200" cy="365760"/>
           </a:xfrm>
           <a:prstGeom prst="rect">
             <a:avLst/>
@@ -13041,13 +13163,13 @@
           <a:noFill/>
         </p:spPr>
         <p:txBody>
-          <a:bodyPr wrap="square" lIns="27432" rIns="27432" tIns="18288" bIns="18288">
+          <a:bodyPr wrap="square" lIns="45720" rIns="45720" tIns="27432" bIns="27432">
             <a:spAutoFit/>
           </a:bodyPr>
           <a:lstStyle/>
           <a:p>
             <a:r>
-              <a:rPr sz="1500" b="1">
+              <a:rPr sz="1700" b="1">
                 <a:solidFill>
                   <a:srgbClr val="F5F7FF"/>
                 </a:solidFill>
@@ -13066,8 +13188,8 @@
         </p:nvSpPr>
         <p:spPr>
           <a:xfrm>
-            <a:off x="4983480" y="2514600"/>
-            <a:ext cx="3017520" cy="731520"/>
+            <a:off x="6492240" y="2971800"/>
+            <a:ext cx="5029200" cy="1463040"/>
           </a:xfrm>
           <a:prstGeom prst="rect">
             <a:avLst/>
@@ -13075,13 +13197,13 @@
           <a:noFill/>
         </p:spPr>
         <p:txBody>
-          <a:bodyPr wrap="square" lIns="27432" rIns="27432" tIns="18288" bIns="18288">
+          <a:bodyPr wrap="square" lIns="45720" rIns="45720" tIns="27432" bIns="27432">
             <a:spAutoFit/>
           </a:bodyPr>
           <a:lstStyle/>
           <a:p>
             <a:r>
-              <a:rPr sz="1400" b="0">
+              <a:rPr sz="1500" b="0">
                 <a:solidFill>
                   <a:srgbClr val="AEB8E0"/>
                 </a:solidFill>
@@ -13130,8 +13252,8 @@
         </p:nvSpPr>
         <p:spPr>
           <a:xfrm>
-            <a:off x="502920" y="384048"/>
-            <a:ext cx="8138160" cy="713232"/>
+            <a:off x="640080" y="502920"/>
+            <a:ext cx="10972800" cy="822960"/>
           </a:xfrm>
         </p:spPr>
         <p:txBody>
@@ -13140,7 +13262,7 @@
           <a:p>
             <a:pPr algn="l"/>
             <a:r>
-              <a:rPr sz="2200" b="1">
+              <a:rPr sz="2800" b="1">
                 <a:solidFill>
                   <a:srgbClr val="F5F7FF"/>
                 </a:solidFill>
@@ -13159,8 +13281,8 @@
         </p:nvSpPr>
         <p:spPr>
           <a:xfrm>
-            <a:off x="502920" y="201168"/>
-            <a:ext cx="6400800" cy="201168"/>
+            <a:off x="640080" y="256032"/>
+            <a:ext cx="9144000" cy="256032"/>
           </a:xfrm>
           <a:prstGeom prst="rect">
             <a:avLst/>
@@ -13168,13 +13290,13 @@
           <a:noFill/>
         </p:spPr>
         <p:txBody>
-          <a:bodyPr wrap="square" lIns="27432" rIns="27432" tIns="18288" bIns="18288">
+          <a:bodyPr wrap="square" lIns="45720" rIns="45720" tIns="27432" bIns="27432">
             <a:spAutoFit/>
           </a:bodyPr>
           <a:lstStyle/>
           <a:p>
             <a:r>
-              <a:rPr sz="900" b="1">
+              <a:rPr sz="1100" b="1">
                 <a:solidFill>
                   <a:srgbClr val="AEB8E0"/>
                 </a:solidFill>
@@ -13193,8 +13315,8 @@
         </p:nvSpPr>
         <p:spPr>
           <a:xfrm>
-            <a:off x="502920" y="1115568"/>
-            <a:ext cx="1097280" cy="45720"/>
+            <a:off x="640080" y="1371600"/>
+            <a:ext cx="1463040" cy="54864"/>
           </a:xfrm>
           <a:prstGeom prst="rect">
             <a:avLst/>
@@ -13236,8 +13358,8 @@
         </p:nvSpPr>
         <p:spPr>
           <a:xfrm>
-            <a:off x="548640" y="1234440"/>
-            <a:ext cx="7955279" cy="411480"/>
+            <a:off x="640080" y="1554480"/>
+            <a:ext cx="10972800" cy="502920"/>
           </a:xfrm>
           <a:prstGeom prst="rect">
             <a:avLst/>
@@ -13245,13 +13367,13 @@
           <a:noFill/>
         </p:spPr>
         <p:txBody>
-          <a:bodyPr wrap="square" lIns="27432" rIns="27432" tIns="18288" bIns="18288">
+          <a:bodyPr wrap="square" lIns="45720" rIns="45720" tIns="27432" bIns="27432">
             <a:spAutoFit/>
           </a:bodyPr>
           <a:lstStyle/>
           <a:p>
             <a:r>
-              <a:rPr sz="1300" b="0">
+              <a:rPr sz="1500" b="0">
                 <a:solidFill>
                   <a:srgbClr val="AEB8E0"/>
                 </a:solidFill>
@@ -13270,8 +13392,8 @@
         </p:nvSpPr>
         <p:spPr>
           <a:xfrm>
-            <a:off x="548640" y="1783080"/>
-            <a:ext cx="3886200" cy="2606040"/>
+            <a:off x="640080" y="2194560"/>
+            <a:ext cx="5440680" cy="4206240"/>
           </a:xfrm>
           <a:prstGeom prst="roundRect">
             <a:avLst/>
@@ -13279,7 +13401,7 @@
           <a:solidFill>
             <a:srgbClr val="1B2241"/>
           </a:solidFill>
-          <a:ln>
+          <a:ln w="9525">
             <a:solidFill>
               <a:srgbClr val="161E45"/>
             </a:solidFill>
@@ -13315,8 +13437,8 @@
         </p:nvSpPr>
         <p:spPr>
           <a:xfrm>
-            <a:off x="548640" y="1783080"/>
-            <a:ext cx="3886200" cy="64008"/>
+            <a:off x="640080" y="2194560"/>
+            <a:ext cx="5440680" cy="82296"/>
           </a:xfrm>
           <a:prstGeom prst="rect">
             <a:avLst/>
@@ -13358,8 +13480,8 @@
         </p:nvSpPr>
         <p:spPr>
           <a:xfrm>
-            <a:off x="777240" y="2029968"/>
-            <a:ext cx="3429000" cy="2057400"/>
+            <a:off x="868680" y="2423160"/>
+            <a:ext cx="5074920" cy="3840479"/>
           </a:xfrm>
           <a:prstGeom prst="rect">
             <a:avLst/>
@@ -13367,16 +13489,19 @@
           <a:noFill/>
         </p:spPr>
         <p:txBody>
-          <a:bodyPr wrap="none" lIns="73152" rIns="73152" tIns="36576">
+          <a:bodyPr wrap="square" tIns="54864" bIns="54864">
             <a:spAutoFit/>
           </a:bodyPr>
           <a:lstStyle/>
           <a:p>
             <a:pPr>
+              <a:lnSpc>
+                <a:spcPct val="115000"/>
+              </a:lnSpc>
               <a:spcAft>
-                <a:spcPts val="500"/>
+                <a:spcPts val="700"/>
               </a:spcAft>
-              <a:defRPr sz="1300">
+              <a:defRPr sz="1400">
                 <a:solidFill>
                   <a:srgbClr val="F5F7FF"/>
                 </a:solidFill>
@@ -13384,15 +13509,18 @@
               </a:defRPr>
             </a:pPr>
             <a:r>
-              <a:t>• The five-part prompt structure for Cowork</a:t>
+              <a:t>•  The five-part prompt structure for Cowork</a:t>
             </a:r>
           </a:p>
           <a:p>
             <a:pPr>
+              <a:lnSpc>
+                <a:spcPct val="115000"/>
+              </a:lnSpc>
               <a:spcAft>
-                <a:spcPts val="500"/>
+                <a:spcPts val="700"/>
               </a:spcAft>
-              <a:defRPr sz="1300">
+              <a:defRPr sz="1400">
                 <a:solidFill>
                   <a:srgbClr val="F5F7FF"/>
                 </a:solidFill>
@@ -13400,7 +13528,7 @@
               </a:defRPr>
             </a:pPr>
             <a:r>
-              <a:t>• "Help me prep for my offsite next week."</a:t>
+              <a:t>•  "Help me prep for my offsite next week."</a:t>
             </a:r>
           </a:p>
         </p:txBody>
@@ -13413,8 +13541,8 @@
         </p:nvSpPr>
         <p:spPr>
           <a:xfrm>
-            <a:off x="4709160" y="1783080"/>
-            <a:ext cx="3886200" cy="2606040"/>
+            <a:off x="6263640" y="2194560"/>
+            <a:ext cx="5440680" cy="4206240"/>
           </a:xfrm>
           <a:prstGeom prst="roundRect">
             <a:avLst/>
@@ -13422,7 +13550,7 @@
           <a:solidFill>
             <a:srgbClr val="1B2241"/>
           </a:solidFill>
-          <a:ln>
+          <a:ln w="9525">
             <a:solidFill>
               <a:srgbClr val="161E45"/>
             </a:solidFill>
@@ -13458,8 +13586,8 @@
         </p:nvSpPr>
         <p:spPr>
           <a:xfrm>
-            <a:off x="4709160" y="1783080"/>
-            <a:ext cx="3886200" cy="64008"/>
+            <a:off x="6263640" y="2194560"/>
+            <a:ext cx="5440680" cy="82296"/>
           </a:xfrm>
           <a:prstGeom prst="rect">
             <a:avLst/>
@@ -13501,8 +13629,8 @@
         </p:nvSpPr>
         <p:spPr>
           <a:xfrm>
-            <a:off x="4983480" y="2057400"/>
-            <a:ext cx="3108960" cy="274320"/>
+            <a:off x="6492240" y="2468879"/>
+            <a:ext cx="5029200" cy="365760"/>
           </a:xfrm>
           <a:prstGeom prst="rect">
             <a:avLst/>
@@ -13510,13 +13638,13 @@
           <a:noFill/>
         </p:spPr>
         <p:txBody>
-          <a:bodyPr wrap="square" lIns="27432" rIns="27432" tIns="18288" bIns="18288">
+          <a:bodyPr wrap="square" lIns="45720" rIns="45720" tIns="27432" bIns="27432">
             <a:spAutoFit/>
           </a:bodyPr>
           <a:lstStyle/>
           <a:p>
             <a:r>
-              <a:rPr sz="1500" b="1">
+              <a:rPr sz="1700" b="1">
                 <a:solidFill>
                   <a:srgbClr val="F5F7FF"/>
                 </a:solidFill>
@@ -13535,8 +13663,8 @@
         </p:nvSpPr>
         <p:spPr>
           <a:xfrm>
-            <a:off x="4983480" y="2514600"/>
-            <a:ext cx="3017520" cy="731520"/>
+            <a:off x="6492240" y="2971800"/>
+            <a:ext cx="5029200" cy="1463040"/>
           </a:xfrm>
           <a:prstGeom prst="rect">
             <a:avLst/>
@@ -13544,13 +13672,13 @@
           <a:noFill/>
         </p:spPr>
         <p:txBody>
-          <a:bodyPr wrap="square" lIns="27432" rIns="27432" tIns="18288" bIns="18288">
+          <a:bodyPr wrap="square" lIns="45720" rIns="45720" tIns="27432" bIns="27432">
             <a:spAutoFit/>
           </a:bodyPr>
           <a:lstStyle/>
           <a:p>
             <a:r>
-              <a:rPr sz="1400" b="0">
+              <a:rPr sz="1500" b="0">
                 <a:solidFill>
                   <a:srgbClr val="AEB8E0"/>
                 </a:solidFill>
@@ -13599,8 +13727,8 @@
         </p:nvSpPr>
         <p:spPr>
           <a:xfrm>
-            <a:off x="502920" y="384048"/>
-            <a:ext cx="8138160" cy="713232"/>
+            <a:off x="640080" y="502920"/>
+            <a:ext cx="10972800" cy="822960"/>
           </a:xfrm>
         </p:spPr>
         <p:txBody>
@@ -13609,7 +13737,7 @@
           <a:p>
             <a:pPr algn="l"/>
             <a:r>
-              <a:rPr sz="2200" b="1">
+              <a:rPr sz="2800" b="1">
                 <a:solidFill>
                   <a:srgbClr val="F5F7FF"/>
                 </a:solidFill>
@@ -13628,8 +13756,8 @@
         </p:nvSpPr>
         <p:spPr>
           <a:xfrm>
-            <a:off x="502920" y="201168"/>
-            <a:ext cx="6400800" cy="201168"/>
+            <a:off x="640080" y="256032"/>
+            <a:ext cx="9144000" cy="256032"/>
           </a:xfrm>
           <a:prstGeom prst="rect">
             <a:avLst/>
@@ -13637,13 +13765,13 @@
           <a:noFill/>
         </p:spPr>
         <p:txBody>
-          <a:bodyPr wrap="square" lIns="27432" rIns="27432" tIns="18288" bIns="18288">
+          <a:bodyPr wrap="square" lIns="45720" rIns="45720" tIns="27432" bIns="27432">
             <a:spAutoFit/>
           </a:bodyPr>
           <a:lstStyle/>
           <a:p>
             <a:r>
-              <a:rPr sz="900" b="1">
+              <a:rPr sz="1100" b="1">
                 <a:solidFill>
                   <a:srgbClr val="AEB8E0"/>
                 </a:solidFill>
@@ -13662,8 +13790,8 @@
         </p:nvSpPr>
         <p:spPr>
           <a:xfrm>
-            <a:off x="502920" y="1115568"/>
-            <a:ext cx="1097280" cy="45720"/>
+            <a:off x="640080" y="1371600"/>
+            <a:ext cx="1463040" cy="54864"/>
           </a:xfrm>
           <a:prstGeom prst="rect">
             <a:avLst/>
@@ -13705,8 +13833,8 @@
         </p:nvSpPr>
         <p:spPr>
           <a:xfrm>
-            <a:off x="548640" y="1234440"/>
-            <a:ext cx="7955279" cy="411480"/>
+            <a:off x="640080" y="1554480"/>
+            <a:ext cx="10972800" cy="502920"/>
           </a:xfrm>
           <a:prstGeom prst="rect">
             <a:avLst/>
@@ -13714,13 +13842,13 @@
           <a:noFill/>
         </p:spPr>
         <p:txBody>
-          <a:bodyPr wrap="square" lIns="27432" rIns="27432" tIns="18288" bIns="18288">
+          <a:bodyPr wrap="square" lIns="45720" rIns="45720" tIns="27432" bIns="27432">
             <a:spAutoFit/>
           </a:bodyPr>
           <a:lstStyle/>
           <a:p>
             <a:r>
-              <a:rPr sz="1300" b="0">
+              <a:rPr sz="1500" b="0">
                 <a:solidFill>
                   <a:srgbClr val="AEB8E0"/>
                 </a:solidFill>
@@ -13739,8 +13867,8 @@
         </p:nvSpPr>
         <p:spPr>
           <a:xfrm>
-            <a:off x="548640" y="1783080"/>
-            <a:ext cx="3886200" cy="2606040"/>
+            <a:off x="640080" y="2194560"/>
+            <a:ext cx="5440680" cy="4206240"/>
           </a:xfrm>
           <a:prstGeom prst="roundRect">
             <a:avLst/>
@@ -13748,7 +13876,7 @@
           <a:solidFill>
             <a:srgbClr val="1B2241"/>
           </a:solidFill>
-          <a:ln>
+          <a:ln w="9525">
             <a:solidFill>
               <a:srgbClr val="161E45"/>
             </a:solidFill>
@@ -13784,8 +13912,8 @@
         </p:nvSpPr>
         <p:spPr>
           <a:xfrm>
-            <a:off x="548640" y="1783080"/>
-            <a:ext cx="3886200" cy="64008"/>
+            <a:off x="640080" y="2194560"/>
+            <a:ext cx="5440680" cy="82296"/>
           </a:xfrm>
           <a:prstGeom prst="rect">
             <a:avLst/>
@@ -13827,8 +13955,8 @@
         </p:nvSpPr>
         <p:spPr>
           <a:xfrm>
-            <a:off x="777240" y="2029968"/>
-            <a:ext cx="3429000" cy="2057400"/>
+            <a:off x="868680" y="2423160"/>
+            <a:ext cx="5074920" cy="3840479"/>
           </a:xfrm>
           <a:prstGeom prst="rect">
             <a:avLst/>
@@ -13836,16 +13964,19 @@
           <a:noFill/>
         </p:spPr>
         <p:txBody>
-          <a:bodyPr wrap="none" lIns="73152" rIns="73152" tIns="36576">
+          <a:bodyPr wrap="square" tIns="54864" bIns="54864">
             <a:spAutoFit/>
           </a:bodyPr>
           <a:lstStyle/>
           <a:p>
             <a:pPr>
+              <a:lnSpc>
+                <a:spcPct val="115000"/>
+              </a:lnSpc>
               <a:spcAft>
-                <a:spcPts val="500"/>
+                <a:spcPts val="700"/>
               </a:spcAft>
-              <a:defRPr sz="1300">
+              <a:defRPr sz="1400">
                 <a:solidFill>
                   <a:srgbClr val="F5F7FF"/>
                 </a:solidFill>
@@ -13853,15 +13984,18 @@
               </a:defRPr>
             </a:pPr>
             <a:r>
-              <a:t>• Monday pipeline review</a:t>
+              <a:t>•  Monday pipeline review</a:t>
             </a:r>
           </a:p>
           <a:p>
             <a:pPr>
+              <a:lnSpc>
+                <a:spcPct val="115000"/>
+              </a:lnSpc>
               <a:spcAft>
-                <a:spcPts val="500"/>
+                <a:spcPts val="700"/>
               </a:spcAft>
-              <a:defRPr sz="1300">
+              <a:defRPr sz="1400">
                 <a:solidFill>
                   <a:srgbClr val="F5F7FF"/>
                 </a:solidFill>
@@ -13869,15 +14003,18 @@
               </a:defRPr>
             </a:pPr>
             <a:r>
-              <a:t>• Campaign launch pack</a:t>
+              <a:t>•  Campaign launch pack</a:t>
             </a:r>
           </a:p>
           <a:p>
             <a:pPr>
+              <a:lnSpc>
+                <a:spcPct val="115000"/>
+              </a:lnSpc>
               <a:spcAft>
-                <a:spcPts val="500"/>
+                <a:spcPts val="700"/>
               </a:spcAft>
-              <a:defRPr sz="1300">
+              <a:defRPr sz="1400">
                 <a:solidFill>
                   <a:srgbClr val="F5F7FF"/>
                 </a:solidFill>
@@ -13885,15 +14022,18 @@
               </a:defRPr>
             </a:pPr>
             <a:r>
-              <a:t>• Month-end variance pack</a:t>
+              <a:t>•  Month-end variance pack</a:t>
             </a:r>
           </a:p>
           <a:p>
             <a:pPr>
+              <a:lnSpc>
+                <a:spcPct val="115000"/>
+              </a:lnSpc>
               <a:spcAft>
-                <a:spcPts val="500"/>
+                <a:spcPts val="700"/>
               </a:spcAft>
-              <a:defRPr sz="1300">
+              <a:defRPr sz="1400">
                 <a:solidFill>
                   <a:srgbClr val="F5F7FF"/>
                 </a:solidFill>
@@ -13901,7 +14041,7 @@
               </a:defRPr>
             </a:pPr>
             <a:r>
-              <a:t>• New-hire 30-day onboarding journey</a:t>
+              <a:t>•  New-hire 30-day onboarding journey</a:t>
             </a:r>
           </a:p>
         </p:txBody>
@@ -13914,8 +14054,8 @@
         </p:nvSpPr>
         <p:spPr>
           <a:xfrm>
-            <a:off x="4709160" y="1783080"/>
-            <a:ext cx="3886200" cy="2606040"/>
+            <a:off x="6263640" y="2194560"/>
+            <a:ext cx="5440680" cy="4206240"/>
           </a:xfrm>
           <a:prstGeom prst="roundRect">
             <a:avLst/>
@@ -13923,7 +14063,7 @@
           <a:solidFill>
             <a:srgbClr val="1B2241"/>
           </a:solidFill>
-          <a:ln>
+          <a:ln w="9525">
             <a:solidFill>
               <a:srgbClr val="161E45"/>
             </a:solidFill>
@@ -13959,8 +14099,8 @@
         </p:nvSpPr>
         <p:spPr>
           <a:xfrm>
-            <a:off x="4709160" y="1783080"/>
-            <a:ext cx="3886200" cy="64008"/>
+            <a:off x="6263640" y="2194560"/>
+            <a:ext cx="5440680" cy="82296"/>
           </a:xfrm>
           <a:prstGeom prst="rect">
             <a:avLst/>
@@ -14002,8 +14142,8 @@
         </p:nvSpPr>
         <p:spPr>
           <a:xfrm>
-            <a:off x="4937760" y="2029968"/>
-            <a:ext cx="3429000" cy="2057400"/>
+            <a:off x="6492240" y="2423160"/>
+            <a:ext cx="5074920" cy="3840479"/>
           </a:xfrm>
           <a:prstGeom prst="rect">
             <a:avLst/>
@@ -14011,16 +14151,19 @@
           <a:noFill/>
         </p:spPr>
         <p:txBody>
-          <a:bodyPr wrap="none" lIns="73152" rIns="73152" tIns="36576">
+          <a:bodyPr wrap="square" tIns="54864" bIns="54864">
             <a:spAutoFit/>
           </a:bodyPr>
           <a:lstStyle/>
           <a:p>
             <a:pPr>
+              <a:lnSpc>
+                <a:spcPct val="115000"/>
+              </a:lnSpc>
               <a:spcAft>
-                <a:spcPts val="500"/>
+                <a:spcPts val="700"/>
               </a:spcAft>
-              <a:defRPr sz="1300">
+              <a:defRPr sz="1400">
                 <a:solidFill>
                   <a:srgbClr val="F5F7FF"/>
                 </a:solidFill>
@@ -14028,15 +14171,18 @@
               </a:defRPr>
             </a:pPr>
             <a:r>
-              <a:t>• Internal helpdesk triage</a:t>
+              <a:t>•  Internal helpdesk triage</a:t>
             </a:r>
           </a:p>
           <a:p>
             <a:pPr>
+              <a:lnSpc>
+                <a:spcPct val="115000"/>
+              </a:lnSpc>
               <a:spcAft>
-                <a:spcPts val="500"/>
+                <a:spcPts val="700"/>
               </a:spcAft>
-              <a:defRPr sz="1300">
+              <a:defRPr sz="1400">
                 <a:solidFill>
                   <a:srgbClr val="F5F7FF"/>
                 </a:solidFill>
@@ -14044,15 +14190,18 @@
               </a:defRPr>
             </a:pPr>
             <a:r>
-              <a:t>• Supplier and inventory risk</a:t>
+              <a:t>•  Supplier and inventory risk</a:t>
             </a:r>
           </a:p>
           <a:p>
             <a:pPr>
+              <a:lnSpc>
+                <a:spcPct val="115000"/>
+              </a:lnSpc>
               <a:spcAft>
-                <a:spcPts val="500"/>
+                <a:spcPts val="700"/>
               </a:spcAft>
-              <a:defRPr sz="1300">
+              <a:defRPr sz="1400">
                 <a:solidFill>
                   <a:srgbClr val="F5F7FF"/>
                 </a:solidFill>
@@ -14060,7 +14209,7 @@
               </a:defRPr>
             </a:pPr>
             <a:r>
-              <a:t>• Top 30 query bot</a:t>
+              <a:t>•  Top 30 query bot</a:t>
             </a:r>
           </a:p>
         </p:txBody>
@@ -14103,8 +14252,8 @@
         </p:nvSpPr>
         <p:spPr>
           <a:xfrm>
-            <a:off x="502920" y="384048"/>
-            <a:ext cx="8138160" cy="713232"/>
+            <a:off x="640080" y="502920"/>
+            <a:ext cx="10972800" cy="822960"/>
           </a:xfrm>
         </p:spPr>
         <p:txBody>
@@ -14113,7 +14262,7 @@
           <a:p>
             <a:pPr algn="l"/>
             <a:r>
-              <a:rPr sz="2200" b="1">
+              <a:rPr sz="2800" b="1">
                 <a:solidFill>
                   <a:srgbClr val="F5F7FF"/>
                 </a:solidFill>
@@ -14132,8 +14281,8 @@
         </p:nvSpPr>
         <p:spPr>
           <a:xfrm>
-            <a:off x="502920" y="201168"/>
-            <a:ext cx="6400800" cy="201168"/>
+            <a:off x="640080" y="256032"/>
+            <a:ext cx="9144000" cy="256032"/>
           </a:xfrm>
           <a:prstGeom prst="rect">
             <a:avLst/>
@@ -14141,13 +14290,13 @@
           <a:noFill/>
         </p:spPr>
         <p:txBody>
-          <a:bodyPr wrap="square" lIns="27432" rIns="27432" tIns="18288" bIns="18288">
+          <a:bodyPr wrap="square" lIns="45720" rIns="45720" tIns="27432" bIns="27432">
             <a:spAutoFit/>
           </a:bodyPr>
           <a:lstStyle/>
           <a:p>
             <a:r>
-              <a:rPr sz="900" b="1">
+              <a:rPr sz="1100" b="1">
                 <a:solidFill>
                   <a:srgbClr val="AEB8E0"/>
                 </a:solidFill>
@@ -14166,8 +14315,8 @@
         </p:nvSpPr>
         <p:spPr>
           <a:xfrm>
-            <a:off x="502920" y="1115568"/>
-            <a:ext cx="1097280" cy="45720"/>
+            <a:off x="640080" y="1371600"/>
+            <a:ext cx="1463040" cy="54864"/>
           </a:xfrm>
           <a:prstGeom prst="rect">
             <a:avLst/>
@@ -14209,8 +14358,8 @@
         </p:nvSpPr>
         <p:spPr>
           <a:xfrm>
-            <a:off x="548640" y="1234440"/>
-            <a:ext cx="7955279" cy="411480"/>
+            <a:off x="640080" y="1554480"/>
+            <a:ext cx="10972800" cy="502920"/>
           </a:xfrm>
           <a:prstGeom prst="rect">
             <a:avLst/>
@@ -14218,13 +14367,13 @@
           <a:noFill/>
         </p:spPr>
         <p:txBody>
-          <a:bodyPr wrap="square" lIns="27432" rIns="27432" tIns="18288" bIns="18288">
+          <a:bodyPr wrap="square" lIns="45720" rIns="45720" tIns="27432" bIns="27432">
             <a:spAutoFit/>
           </a:bodyPr>
           <a:lstStyle/>
           <a:p>
             <a:r>
-              <a:rPr sz="1300" b="0">
+              <a:rPr sz="1500" b="0">
                 <a:solidFill>
                   <a:srgbClr val="AEB8E0"/>
                 </a:solidFill>
@@ -14243,8 +14392,8 @@
         </p:nvSpPr>
         <p:spPr>
           <a:xfrm>
-            <a:off x="548640" y="1783080"/>
-            <a:ext cx="3886200" cy="2606040"/>
+            <a:off x="640080" y="2194560"/>
+            <a:ext cx="5440680" cy="4206240"/>
           </a:xfrm>
           <a:prstGeom prst="roundRect">
             <a:avLst/>
@@ -14252,7 +14401,7 @@
           <a:solidFill>
             <a:srgbClr val="1B2241"/>
           </a:solidFill>
-          <a:ln>
+          <a:ln w="9525">
             <a:solidFill>
               <a:srgbClr val="161E45"/>
             </a:solidFill>
@@ -14288,8 +14437,8 @@
         </p:nvSpPr>
         <p:spPr>
           <a:xfrm>
-            <a:off x="548640" y="1783080"/>
-            <a:ext cx="3886200" cy="64008"/>
+            <a:off x="640080" y="2194560"/>
+            <a:ext cx="5440680" cy="82296"/>
           </a:xfrm>
           <a:prstGeom prst="rect">
             <a:avLst/>
@@ -14331,8 +14480,8 @@
         </p:nvSpPr>
         <p:spPr>
           <a:xfrm>
-            <a:off x="777240" y="2029968"/>
-            <a:ext cx="3429000" cy="2057400"/>
+            <a:off x="868680" y="2423160"/>
+            <a:ext cx="5074920" cy="3840479"/>
           </a:xfrm>
           <a:prstGeom prst="rect">
             <a:avLst/>
@@ -14340,16 +14489,19 @@
           <a:noFill/>
         </p:spPr>
         <p:txBody>
-          <a:bodyPr wrap="none" lIns="73152" rIns="73152" tIns="36576">
+          <a:bodyPr wrap="square" tIns="54864" bIns="54864">
             <a:spAutoFit/>
           </a:bodyPr>
           <a:lstStyle/>
           <a:p>
             <a:pPr>
+              <a:lnSpc>
+                <a:spcPct val="115000"/>
+              </a:lnSpc>
               <a:spcAft>
-                <a:spcPts val="500"/>
+                <a:spcPts val="700"/>
               </a:spcAft>
-              <a:defRPr sz="1300">
+              <a:defRPr sz="1400">
                 <a:solidFill>
                   <a:srgbClr val="F5F7FF"/>
                 </a:solidFill>
@@ -14357,15 +14509,18 @@
               </a:defRPr>
             </a:pPr>
             <a:r>
-              <a:t>• Can a saved or scheduled prompt do it?</a:t>
+              <a:t>•  Can a saved or scheduled prompt do it?</a:t>
             </a:r>
           </a:p>
           <a:p>
             <a:pPr>
+              <a:lnSpc>
+                <a:spcPct val="115000"/>
+              </a:lnSpc>
               <a:spcAft>
-                <a:spcPts val="500"/>
+                <a:spcPts val="700"/>
               </a:spcAft>
-              <a:defRPr sz="1300">
+              <a:defRPr sz="1400">
                 <a:solidFill>
                   <a:srgbClr val="F5F7FF"/>
                 </a:solidFill>
@@ -14373,15 +14528,18 @@
               </a:defRPr>
             </a:pPr>
             <a:r>
-              <a:t>• Is there already a ready Microsoft agent?</a:t>
+              <a:t>•  Is there already a ready Microsoft agent?</a:t>
             </a:r>
           </a:p>
           <a:p>
             <a:pPr>
+              <a:lnSpc>
+                <a:spcPct val="115000"/>
+              </a:lnSpc>
               <a:spcAft>
-                <a:spcPts val="500"/>
+                <a:spcPts val="700"/>
               </a:spcAft>
-              <a:defRPr sz="1300">
+              <a:defRPr sz="1400">
                 <a:solidFill>
                   <a:srgbClr val="F5F7FF"/>
                 </a:solidFill>
@@ -14389,15 +14547,18 @@
               </a:defRPr>
             </a:pPr>
             <a:r>
-              <a:t>• Does Cowork already cover the full process?</a:t>
+              <a:t>•  Does Cowork already cover the full process?</a:t>
             </a:r>
           </a:p>
           <a:p>
             <a:pPr>
+              <a:lnSpc>
+                <a:spcPct val="115000"/>
+              </a:lnSpc>
               <a:spcAft>
-                <a:spcPts val="500"/>
+                <a:spcPts val="700"/>
               </a:spcAft>
-              <a:defRPr sz="1300">
+              <a:defRPr sz="1400">
                 <a:solidFill>
                   <a:srgbClr val="F5F7FF"/>
                 </a:solidFill>
@@ -14405,7 +14566,7 @@
               </a:defRPr>
             </a:pPr>
             <a:r>
-              <a:t>• Use Agent Builder or Copilot Studio</a:t>
+              <a:t>•  Use Agent Builder or Copilot Studio</a:t>
             </a:r>
           </a:p>
         </p:txBody>
@@ -14418,8 +14579,8 @@
         </p:nvSpPr>
         <p:spPr>
           <a:xfrm>
-            <a:off x="4709160" y="1783080"/>
-            <a:ext cx="3886200" cy="2606040"/>
+            <a:off x="6263640" y="2194560"/>
+            <a:ext cx="5440680" cy="4206240"/>
           </a:xfrm>
           <a:prstGeom prst="roundRect">
             <a:avLst/>
@@ -14427,7 +14588,7 @@
           <a:solidFill>
             <a:srgbClr val="1B2241"/>
           </a:solidFill>
-          <a:ln>
+          <a:ln w="9525">
             <a:solidFill>
               <a:srgbClr val="161E45"/>
             </a:solidFill>
@@ -14463,8 +14624,8 @@
         </p:nvSpPr>
         <p:spPr>
           <a:xfrm>
-            <a:off x="4709160" y="1783080"/>
-            <a:ext cx="3886200" cy="64008"/>
+            <a:off x="6263640" y="2194560"/>
+            <a:ext cx="5440680" cy="82296"/>
           </a:xfrm>
           <a:prstGeom prst="rect">
             <a:avLst/>
@@ -14506,8 +14667,8 @@
         </p:nvSpPr>
         <p:spPr>
           <a:xfrm>
-            <a:off x="4983480" y="2057400"/>
-            <a:ext cx="3108960" cy="274320"/>
+            <a:off x="6492240" y="2468879"/>
+            <a:ext cx="5029200" cy="365760"/>
           </a:xfrm>
           <a:prstGeom prst="rect">
             <a:avLst/>
@@ -14515,13 +14676,13 @@
           <a:noFill/>
         </p:spPr>
         <p:txBody>
-          <a:bodyPr wrap="square" lIns="27432" rIns="27432" tIns="18288" bIns="18288">
+          <a:bodyPr wrap="square" lIns="45720" rIns="45720" tIns="27432" bIns="27432">
             <a:spAutoFit/>
           </a:bodyPr>
           <a:lstStyle/>
           <a:p>
             <a:r>
-              <a:rPr sz="1500" b="1">
+              <a:rPr sz="1700" b="1">
                 <a:solidFill>
                   <a:srgbClr val="F5F7FF"/>
                 </a:solidFill>
@@ -14540,8 +14701,8 @@
         </p:nvSpPr>
         <p:spPr>
           <a:xfrm>
-            <a:off x="4983480" y="2514600"/>
-            <a:ext cx="3017520" cy="731520"/>
+            <a:off x="6492240" y="2971800"/>
+            <a:ext cx="5029200" cy="1463040"/>
           </a:xfrm>
           <a:prstGeom prst="rect">
             <a:avLst/>
@@ -14549,13 +14710,13 @@
           <a:noFill/>
         </p:spPr>
         <p:txBody>
-          <a:bodyPr wrap="square" lIns="27432" rIns="27432" tIns="18288" bIns="18288">
+          <a:bodyPr wrap="square" lIns="45720" rIns="45720" tIns="27432" bIns="27432">
             <a:spAutoFit/>
           </a:bodyPr>
           <a:lstStyle/>
           <a:p>
             <a:r>
-              <a:rPr sz="1400" b="0">
+              <a:rPr sz="1500" b="0">
                 <a:solidFill>
                   <a:srgbClr val="AEB8E0"/>
                 </a:solidFill>
@@ -14604,8 +14765,8 @@
         </p:nvSpPr>
         <p:spPr>
           <a:xfrm>
-            <a:off x="502920" y="384048"/>
-            <a:ext cx="8138160" cy="713232"/>
+            <a:off x="640080" y="502920"/>
+            <a:ext cx="10972800" cy="822960"/>
           </a:xfrm>
         </p:spPr>
         <p:txBody>
@@ -14614,7 +14775,7 @@
           <a:p>
             <a:pPr algn="l"/>
             <a:r>
-              <a:rPr sz="2200" b="1">
+              <a:rPr sz="2800" b="1">
                 <a:solidFill>
                   <a:srgbClr val="F5F7FF"/>
                 </a:solidFill>
@@ -14633,8 +14794,8 @@
         </p:nvSpPr>
         <p:spPr>
           <a:xfrm>
-            <a:off x="502920" y="201168"/>
-            <a:ext cx="6400800" cy="201168"/>
+            <a:off x="640080" y="256032"/>
+            <a:ext cx="9144000" cy="256032"/>
           </a:xfrm>
           <a:prstGeom prst="rect">
             <a:avLst/>
@@ -14642,13 +14803,13 @@
           <a:noFill/>
         </p:spPr>
         <p:txBody>
-          <a:bodyPr wrap="square" lIns="27432" rIns="27432" tIns="18288" bIns="18288">
+          <a:bodyPr wrap="square" lIns="45720" rIns="45720" tIns="27432" bIns="27432">
             <a:spAutoFit/>
           </a:bodyPr>
           <a:lstStyle/>
           <a:p>
             <a:r>
-              <a:rPr sz="900" b="1">
+              <a:rPr sz="1100" b="1">
                 <a:solidFill>
                   <a:srgbClr val="AEB8E0"/>
                 </a:solidFill>
@@ -14667,8 +14828,8 @@
         </p:nvSpPr>
         <p:spPr>
           <a:xfrm>
-            <a:off x="502920" y="1115568"/>
-            <a:ext cx="1097280" cy="45720"/>
+            <a:off x="640080" y="1371600"/>
+            <a:ext cx="1463040" cy="54864"/>
           </a:xfrm>
           <a:prstGeom prst="rect">
             <a:avLst/>
@@ -14710,8 +14871,8 @@
         </p:nvSpPr>
         <p:spPr>
           <a:xfrm>
-            <a:off x="594360" y="1508760"/>
-            <a:ext cx="2514600" cy="2331720"/>
+            <a:off x="586587" y="1874519"/>
+            <a:ext cx="3520440" cy="3383280"/>
           </a:xfrm>
           <a:prstGeom prst="roundRect">
             <a:avLst/>
@@ -14719,7 +14880,7 @@
           <a:solidFill>
             <a:srgbClr val="1B2241"/>
           </a:solidFill>
-          <a:ln>
+          <a:ln w="9525">
             <a:solidFill>
               <a:srgbClr val="161E45"/>
             </a:solidFill>
@@ -14755,8 +14916,8 @@
         </p:nvSpPr>
         <p:spPr>
           <a:xfrm>
-            <a:off x="594360" y="1508760"/>
-            <a:ext cx="2514600" cy="64008"/>
+            <a:off x="586587" y="1874519"/>
+            <a:ext cx="3520440" cy="82296"/>
           </a:xfrm>
           <a:prstGeom prst="rect">
             <a:avLst/>
@@ -14798,8 +14959,8 @@
         </p:nvSpPr>
         <p:spPr>
           <a:xfrm>
-            <a:off x="822960" y="1783080"/>
-            <a:ext cx="2011680" cy="347472"/>
+            <a:off x="586587" y="2194560"/>
+            <a:ext cx="3520440" cy="548640"/>
           </a:xfrm>
           <a:prstGeom prst="rect">
             <a:avLst/>
@@ -14807,14 +14968,14 @@
           <a:noFill/>
         </p:spPr>
         <p:txBody>
-          <a:bodyPr wrap="square" lIns="27432" rIns="27432" tIns="18288" bIns="18288">
+          <a:bodyPr wrap="square" lIns="45720" rIns="45720" tIns="27432" bIns="27432">
             <a:spAutoFit/>
           </a:bodyPr>
           <a:lstStyle/>
           <a:p>
             <a:pPr algn="ctr"/>
             <a:r>
-              <a:rPr sz="2200" b="1">
+              <a:rPr sz="2800" b="1">
                 <a:solidFill>
                   <a:srgbClr val="3E8E22"/>
                 </a:solidFill>
@@ -14833,8 +14994,8 @@
         </p:nvSpPr>
         <p:spPr>
           <a:xfrm>
-            <a:off x="868680" y="2331720"/>
-            <a:ext cx="1965960" cy="822960"/>
+            <a:off x="860907" y="2926080"/>
+            <a:ext cx="2971800" cy="1828800"/>
           </a:xfrm>
           <a:prstGeom prst="rect">
             <a:avLst/>
@@ -14842,14 +15003,14 @@
           <a:noFill/>
         </p:spPr>
         <p:txBody>
-          <a:bodyPr wrap="square" lIns="27432" rIns="27432" tIns="18288" bIns="18288">
+          <a:bodyPr wrap="square" lIns="45720" rIns="45720" tIns="27432" bIns="27432">
             <a:spAutoFit/>
           </a:bodyPr>
           <a:lstStyle/>
           <a:p>
             <a:pPr algn="ctr"/>
             <a:r>
-              <a:rPr sz="1400" b="0">
+              <a:rPr sz="1500" b="0">
                 <a:solidFill>
                   <a:srgbClr val="AEB8E0"/>
                 </a:solidFill>
@@ -14868,8 +15029,8 @@
         </p:nvSpPr>
         <p:spPr>
           <a:xfrm>
-            <a:off x="3429000" y="1508760"/>
-            <a:ext cx="2514600" cy="2331720"/>
+            <a:off x="4335627" y="1874519"/>
+            <a:ext cx="3520440" cy="3383280"/>
           </a:xfrm>
           <a:prstGeom prst="roundRect">
             <a:avLst/>
@@ -14877,7 +15038,7 @@
           <a:solidFill>
             <a:srgbClr val="1B2241"/>
           </a:solidFill>
-          <a:ln>
+          <a:ln w="9525">
             <a:solidFill>
               <a:srgbClr val="161E45"/>
             </a:solidFill>
@@ -14913,8 +15074,8 @@
         </p:nvSpPr>
         <p:spPr>
           <a:xfrm>
-            <a:off x="3429000" y="1508760"/>
-            <a:ext cx="2514600" cy="64008"/>
+            <a:off x="4335627" y="1874519"/>
+            <a:ext cx="3520440" cy="82296"/>
           </a:xfrm>
           <a:prstGeom prst="rect">
             <a:avLst/>
@@ -14956,8 +15117,8 @@
         </p:nvSpPr>
         <p:spPr>
           <a:xfrm>
-            <a:off x="3657600" y="1783080"/>
-            <a:ext cx="2011680" cy="347472"/>
+            <a:off x="4335627" y="2194560"/>
+            <a:ext cx="3520440" cy="548640"/>
           </a:xfrm>
           <a:prstGeom prst="rect">
             <a:avLst/>
@@ -14965,14 +15126,14 @@
           <a:noFill/>
         </p:spPr>
         <p:txBody>
-          <a:bodyPr wrap="square" lIns="27432" rIns="27432" tIns="18288" bIns="18288">
+          <a:bodyPr wrap="square" lIns="45720" rIns="45720" tIns="27432" bIns="27432">
             <a:spAutoFit/>
           </a:bodyPr>
           <a:lstStyle/>
           <a:p>
             <a:pPr algn="ctr"/>
             <a:r>
-              <a:rPr sz="2200" b="1">
+              <a:rPr sz="2800" b="1">
                 <a:solidFill>
                   <a:srgbClr val="0E8E92"/>
                 </a:solidFill>
@@ -14991,8 +15152,8 @@
         </p:nvSpPr>
         <p:spPr>
           <a:xfrm>
-            <a:off x="3703320" y="2331720"/>
-            <a:ext cx="1965960" cy="822960"/>
+            <a:off x="4609947" y="2926080"/>
+            <a:ext cx="2971800" cy="1828800"/>
           </a:xfrm>
           <a:prstGeom prst="rect">
             <a:avLst/>
@@ -15000,14 +15161,14 @@
           <a:noFill/>
         </p:spPr>
         <p:txBody>
-          <a:bodyPr wrap="square" lIns="27432" rIns="27432" tIns="18288" bIns="18288">
+          <a:bodyPr wrap="square" lIns="45720" rIns="45720" tIns="27432" bIns="27432">
             <a:spAutoFit/>
           </a:bodyPr>
           <a:lstStyle/>
           <a:p>
             <a:pPr algn="ctr"/>
             <a:r>
-              <a:rPr sz="1400" b="0">
+              <a:rPr sz="1500" b="0">
                 <a:solidFill>
                   <a:srgbClr val="AEB8E0"/>
                 </a:solidFill>
@@ -15026,8 +15187,8 @@
         </p:nvSpPr>
         <p:spPr>
           <a:xfrm>
-            <a:off x="6263640" y="1508760"/>
-            <a:ext cx="2514600" cy="2331720"/>
+            <a:off x="8084667" y="1874519"/>
+            <a:ext cx="3520440" cy="3383280"/>
           </a:xfrm>
           <a:prstGeom prst="roundRect">
             <a:avLst/>
@@ -15035,7 +15196,7 @@
           <a:solidFill>
             <a:srgbClr val="1B2241"/>
           </a:solidFill>
-          <a:ln>
+          <a:ln w="9525">
             <a:solidFill>
               <a:srgbClr val="161E45"/>
             </a:solidFill>
@@ -15071,8 +15232,8 @@
         </p:nvSpPr>
         <p:spPr>
           <a:xfrm>
-            <a:off x="6263640" y="1508760"/>
-            <a:ext cx="2514600" cy="64008"/>
+            <a:off x="8084667" y="1874519"/>
+            <a:ext cx="3520440" cy="82296"/>
           </a:xfrm>
           <a:prstGeom prst="rect">
             <a:avLst/>
@@ -15114,8 +15275,8 @@
         </p:nvSpPr>
         <p:spPr>
           <a:xfrm>
-            <a:off x="6492240" y="1783080"/>
-            <a:ext cx="2011680" cy="347472"/>
+            <a:off x="8084667" y="2194560"/>
+            <a:ext cx="3520440" cy="548640"/>
           </a:xfrm>
           <a:prstGeom prst="rect">
             <a:avLst/>
@@ -15123,14 +15284,14 @@
           <a:noFill/>
         </p:spPr>
         <p:txBody>
-          <a:bodyPr wrap="square" lIns="27432" rIns="27432" tIns="18288" bIns="18288">
+          <a:bodyPr wrap="square" lIns="45720" rIns="45720" tIns="27432" bIns="27432">
             <a:spAutoFit/>
           </a:bodyPr>
           <a:lstStyle/>
           <a:p>
             <a:pPr algn="ctr"/>
             <a:r>
-              <a:rPr sz="2200" b="1">
+              <a:rPr sz="2800" b="1">
                 <a:solidFill>
                   <a:srgbClr val="C73E78"/>
                 </a:solidFill>
@@ -15149,8 +15310,8 @@
         </p:nvSpPr>
         <p:spPr>
           <a:xfrm>
-            <a:off x="6537960" y="2331720"/>
-            <a:ext cx="1965960" cy="822960"/>
+            <a:off x="8358987" y="2926080"/>
+            <a:ext cx="2971800" cy="1828800"/>
           </a:xfrm>
           <a:prstGeom prst="rect">
             <a:avLst/>
@@ -15158,14 +15319,14 @@
           <a:noFill/>
         </p:spPr>
         <p:txBody>
-          <a:bodyPr wrap="square" lIns="27432" rIns="27432" tIns="18288" bIns="18288">
+          <a:bodyPr wrap="square" lIns="45720" rIns="45720" tIns="27432" bIns="27432">
             <a:spAutoFit/>
           </a:bodyPr>
           <a:lstStyle/>
           <a:p>
             <a:pPr algn="ctr"/>
             <a:r>
-              <a:rPr sz="1400" b="0">
+              <a:rPr sz="1500" b="0">
                 <a:solidFill>
                   <a:srgbClr val="AEB8E0"/>
                 </a:solidFill>
@@ -15184,8 +15345,8 @@
         </p:nvSpPr>
         <p:spPr>
           <a:xfrm>
-            <a:off x="731520" y="4251960"/>
-            <a:ext cx="7680960" cy="320040"/>
+            <a:off x="822960" y="5897880"/>
+            <a:ext cx="10515600" cy="365760"/>
           </a:xfrm>
           <a:prstGeom prst="rect">
             <a:avLst/>
@@ -15193,7 +15354,7 @@
           <a:noFill/>
         </p:spPr>
         <p:txBody>
-          <a:bodyPr wrap="square" lIns="27432" rIns="27432" tIns="18288" bIns="18288">
+          <a:bodyPr wrap="square" lIns="45720" rIns="45720" tIns="27432" bIns="27432">
             <a:spAutoFit/>
           </a:bodyPr>
           <a:lstStyle/>
@@ -15249,8 +15410,8 @@
         </p:nvSpPr>
         <p:spPr>
           <a:xfrm>
-            <a:off x="502920" y="384048"/>
-            <a:ext cx="8138160" cy="713232"/>
+            <a:off x="640080" y="502920"/>
+            <a:ext cx="10972800" cy="822960"/>
           </a:xfrm>
         </p:spPr>
         <p:txBody>
@@ -15259,7 +15420,7 @@
           <a:p>
             <a:pPr algn="l"/>
             <a:r>
-              <a:rPr sz="2200" b="1">
+              <a:rPr sz="2800" b="1">
                 <a:solidFill>
                   <a:srgbClr val="F5F7FF"/>
                 </a:solidFill>
@@ -15278,8 +15439,8 @@
         </p:nvSpPr>
         <p:spPr>
           <a:xfrm>
-            <a:off x="502920" y="201168"/>
-            <a:ext cx="6400800" cy="201168"/>
+            <a:off x="640080" y="256032"/>
+            <a:ext cx="9144000" cy="256032"/>
           </a:xfrm>
           <a:prstGeom prst="rect">
             <a:avLst/>
@@ -15287,13 +15448,13 @@
           <a:noFill/>
         </p:spPr>
         <p:txBody>
-          <a:bodyPr wrap="square" lIns="27432" rIns="27432" tIns="18288" bIns="18288">
+          <a:bodyPr wrap="square" lIns="45720" rIns="45720" tIns="27432" bIns="27432">
             <a:spAutoFit/>
           </a:bodyPr>
           <a:lstStyle/>
           <a:p>
             <a:r>
-              <a:rPr sz="900" b="1">
+              <a:rPr sz="1100" b="1">
                 <a:solidFill>
                   <a:srgbClr val="AEB8E0"/>
                 </a:solidFill>
@@ -15312,8 +15473,8 @@
         </p:nvSpPr>
         <p:spPr>
           <a:xfrm>
-            <a:off x="502920" y="1115568"/>
-            <a:ext cx="1097280" cy="45720"/>
+            <a:off x="640080" y="1371600"/>
+            <a:ext cx="1463040" cy="54864"/>
           </a:xfrm>
           <a:prstGeom prst="rect">
             <a:avLst/>
@@ -15355,8 +15516,8 @@
         </p:nvSpPr>
         <p:spPr>
           <a:xfrm>
-            <a:off x="548640" y="1261872"/>
-            <a:ext cx="2636520" cy="3456432"/>
+            <a:off x="640080" y="1691640"/>
+            <a:ext cx="3688080" cy="4709160"/>
           </a:xfrm>
           <a:prstGeom prst="roundRect">
             <a:avLst/>
@@ -15364,7 +15525,7 @@
           <a:solidFill>
             <a:srgbClr val="1B2241"/>
           </a:solidFill>
-          <a:ln>
+          <a:ln w="9525">
             <a:solidFill>
               <a:srgbClr val="161E45"/>
             </a:solidFill>
@@ -15400,8 +15561,8 @@
         </p:nvSpPr>
         <p:spPr>
           <a:xfrm>
-            <a:off x="548640" y="1261872"/>
-            <a:ext cx="2636520" cy="64008"/>
+            <a:off x="640080" y="1691640"/>
+            <a:ext cx="3688080" cy="82296"/>
           </a:xfrm>
           <a:prstGeom prst="rect">
             <a:avLst/>
@@ -15443,8 +15604,8 @@
         </p:nvSpPr>
         <p:spPr>
           <a:xfrm>
-            <a:off x="685800" y="1463040"/>
-            <a:ext cx="2362200" cy="274320"/>
+            <a:off x="822959" y="1874520"/>
+            <a:ext cx="3322320" cy="365760"/>
           </a:xfrm>
           <a:prstGeom prst="rect">
             <a:avLst/>
@@ -15452,13 +15613,13 @@
           <a:noFill/>
         </p:spPr>
         <p:txBody>
-          <a:bodyPr wrap="square" lIns="27432" rIns="27432" tIns="18288" bIns="18288">
+          <a:bodyPr wrap="square" lIns="45720" rIns="45720" tIns="27432" bIns="27432">
             <a:spAutoFit/>
           </a:bodyPr>
           <a:lstStyle/>
           <a:p>
             <a:r>
-              <a:rPr sz="1300" b="1">
+              <a:rPr sz="1600" b="1">
                 <a:solidFill>
                   <a:srgbClr val="3E8E22"/>
                 </a:solidFill>
@@ -15477,8 +15638,8 @@
         </p:nvSpPr>
         <p:spPr>
           <a:xfrm>
-            <a:off x="713232" y="1828800"/>
-            <a:ext cx="2307336" cy="228600"/>
+            <a:off x="822959" y="2423160"/>
+            <a:ext cx="3322320" cy="594360"/>
           </a:xfrm>
           <a:prstGeom prst="rect">
             <a:avLst/>
@@ -15486,13 +15647,13 @@
           <a:noFill/>
         </p:spPr>
         <p:txBody>
-          <a:bodyPr wrap="square" lIns="27432" rIns="27432" tIns="18288" bIns="18288">
+          <a:bodyPr wrap="square" lIns="45720" rIns="45720" tIns="27432" bIns="27432">
             <a:spAutoFit/>
           </a:bodyPr>
           <a:lstStyle/>
           <a:p>
             <a:r>
-              <a:rPr sz="1000" b="1">
+              <a:rPr sz="1300" b="1">
                 <a:solidFill>
                   <a:srgbClr val="F5F7FF"/>
                 </a:solidFill>
@@ -15511,8 +15672,8 @@
         </p:nvSpPr>
         <p:spPr>
           <a:xfrm>
-            <a:off x="713232" y="2048256"/>
-            <a:ext cx="2307336" cy="301752"/>
+            <a:off x="822959" y="3017520"/>
+            <a:ext cx="3322320" cy="502919"/>
           </a:xfrm>
           <a:prstGeom prst="rect">
             <a:avLst/>
@@ -15520,13 +15681,13 @@
           <a:noFill/>
         </p:spPr>
         <p:txBody>
-          <a:bodyPr wrap="square" lIns="27432" rIns="27432" tIns="18288" bIns="18288">
+          <a:bodyPr wrap="square" lIns="45720" rIns="45720" tIns="27432" bIns="27432">
             <a:spAutoFit/>
           </a:bodyPr>
           <a:lstStyle/>
           <a:p>
             <a:r>
-              <a:rPr sz="900" b="0">
+              <a:rPr sz="1100" b="0">
                 <a:solidFill>
                   <a:srgbClr val="AEB8E0"/>
                 </a:solidFill>
@@ -15545,8 +15706,8 @@
         </p:nvSpPr>
         <p:spPr>
           <a:xfrm>
-            <a:off x="713232" y="2487168"/>
-            <a:ext cx="2307336" cy="228600"/>
+            <a:off x="822959" y="3566160"/>
+            <a:ext cx="3322320" cy="594360"/>
           </a:xfrm>
           <a:prstGeom prst="rect">
             <a:avLst/>
@@ -15554,13 +15715,13 @@
           <a:noFill/>
         </p:spPr>
         <p:txBody>
-          <a:bodyPr wrap="square" lIns="27432" rIns="27432" tIns="18288" bIns="18288">
+          <a:bodyPr wrap="square" lIns="45720" rIns="45720" tIns="27432" bIns="27432">
             <a:spAutoFit/>
           </a:bodyPr>
           <a:lstStyle/>
           <a:p>
             <a:r>
-              <a:rPr sz="1000" b="1">
+              <a:rPr sz="1300" b="1">
                 <a:solidFill>
                   <a:srgbClr val="F5F7FF"/>
                 </a:solidFill>
@@ -15579,8 +15740,8 @@
         </p:nvSpPr>
         <p:spPr>
           <a:xfrm>
-            <a:off x="713232" y="2706624"/>
-            <a:ext cx="2307336" cy="301752"/>
+            <a:off x="822959" y="4160520"/>
+            <a:ext cx="3322320" cy="502919"/>
           </a:xfrm>
           <a:prstGeom prst="rect">
             <a:avLst/>
@@ -15588,13 +15749,13 @@
           <a:noFill/>
         </p:spPr>
         <p:txBody>
-          <a:bodyPr wrap="square" lIns="27432" rIns="27432" tIns="18288" bIns="18288">
+          <a:bodyPr wrap="square" lIns="45720" rIns="45720" tIns="27432" bIns="27432">
             <a:spAutoFit/>
           </a:bodyPr>
           <a:lstStyle/>
           <a:p>
             <a:r>
-              <a:rPr sz="900" b="0">
+              <a:rPr sz="1100" b="0">
                 <a:solidFill>
                   <a:srgbClr val="AEB8E0"/>
                 </a:solidFill>
@@ -15613,8 +15774,8 @@
         </p:nvSpPr>
         <p:spPr>
           <a:xfrm>
-            <a:off x="713232" y="3145535"/>
-            <a:ext cx="2307336" cy="228600"/>
+            <a:off x="822959" y="4709160"/>
+            <a:ext cx="3322320" cy="594360"/>
           </a:xfrm>
           <a:prstGeom prst="rect">
             <a:avLst/>
@@ -15622,13 +15783,13 @@
           <a:noFill/>
         </p:spPr>
         <p:txBody>
-          <a:bodyPr wrap="square" lIns="27432" rIns="27432" tIns="18288" bIns="18288">
+          <a:bodyPr wrap="square" lIns="45720" rIns="45720" tIns="27432" bIns="27432">
             <a:spAutoFit/>
           </a:bodyPr>
           <a:lstStyle/>
           <a:p>
             <a:r>
-              <a:rPr sz="1000" b="1">
+              <a:rPr sz="1300" b="1">
                 <a:solidFill>
                   <a:srgbClr val="F5F7FF"/>
                 </a:solidFill>
@@ -15647,8 +15808,8 @@
         </p:nvSpPr>
         <p:spPr>
           <a:xfrm>
-            <a:off x="713232" y="3364991"/>
-            <a:ext cx="2307336" cy="301752"/>
+            <a:off x="822959" y="5303520"/>
+            <a:ext cx="3322320" cy="502919"/>
           </a:xfrm>
           <a:prstGeom prst="rect">
             <a:avLst/>
@@ -15656,13 +15817,13 @@
           <a:noFill/>
         </p:spPr>
         <p:txBody>
-          <a:bodyPr wrap="square" lIns="27432" rIns="27432" tIns="18288" bIns="18288">
+          <a:bodyPr wrap="square" lIns="45720" rIns="45720" tIns="27432" bIns="27432">
             <a:spAutoFit/>
           </a:bodyPr>
           <a:lstStyle/>
           <a:p>
             <a:r>
-              <a:rPr sz="900" b="0">
+              <a:rPr sz="1100" b="0">
                 <a:solidFill>
                   <a:srgbClr val="AEB8E0"/>
                 </a:solidFill>
@@ -15681,8 +15842,8 @@
         </p:nvSpPr>
         <p:spPr>
           <a:xfrm>
-            <a:off x="3340608" y="1261872"/>
-            <a:ext cx="2636520" cy="3456432"/>
+            <a:off x="4556760" y="1691640"/>
+            <a:ext cx="3688080" cy="4709160"/>
           </a:xfrm>
           <a:prstGeom prst="roundRect">
             <a:avLst/>
@@ -15690,7 +15851,7 @@
           <a:solidFill>
             <a:srgbClr val="1B2241"/>
           </a:solidFill>
-          <a:ln>
+          <a:ln w="9525">
             <a:solidFill>
               <a:srgbClr val="161E45"/>
             </a:solidFill>
@@ -15726,8 +15887,8 @@
         </p:nvSpPr>
         <p:spPr>
           <a:xfrm>
-            <a:off x="3340608" y="1261872"/>
-            <a:ext cx="2636520" cy="64008"/>
+            <a:off x="4556760" y="1691640"/>
+            <a:ext cx="3688080" cy="82296"/>
           </a:xfrm>
           <a:prstGeom prst="rect">
             <a:avLst/>
@@ -15769,8 +15930,8 @@
         </p:nvSpPr>
         <p:spPr>
           <a:xfrm>
-            <a:off x="3477768" y="1463040"/>
-            <a:ext cx="2362200" cy="274320"/>
+            <a:off x="4739640" y="1874520"/>
+            <a:ext cx="3322320" cy="365760"/>
           </a:xfrm>
           <a:prstGeom prst="rect">
             <a:avLst/>
@@ -15778,13 +15939,13 @@
           <a:noFill/>
         </p:spPr>
         <p:txBody>
-          <a:bodyPr wrap="square" lIns="27432" rIns="27432" tIns="18288" bIns="18288">
+          <a:bodyPr wrap="square" lIns="45720" rIns="45720" tIns="27432" bIns="27432">
             <a:spAutoFit/>
           </a:bodyPr>
           <a:lstStyle/>
           <a:p>
             <a:r>
-              <a:rPr sz="1300" b="1">
+              <a:rPr sz="1600" b="1">
                 <a:solidFill>
                   <a:srgbClr val="3E8E22"/>
                 </a:solidFill>
@@ -15803,8 +15964,8 @@
         </p:nvSpPr>
         <p:spPr>
           <a:xfrm>
-            <a:off x="3505200" y="1828800"/>
-            <a:ext cx="2307336" cy="228600"/>
+            <a:off x="4739640" y="2423160"/>
+            <a:ext cx="3322320" cy="640080"/>
           </a:xfrm>
           <a:prstGeom prst="rect">
             <a:avLst/>
@@ -15812,13 +15973,13 @@
           <a:noFill/>
         </p:spPr>
         <p:txBody>
-          <a:bodyPr wrap="square" lIns="27432" rIns="27432" tIns="18288" bIns="18288">
+          <a:bodyPr wrap="square" lIns="45720" rIns="45720" tIns="27432" bIns="27432">
             <a:spAutoFit/>
           </a:bodyPr>
           <a:lstStyle/>
           <a:p>
             <a:r>
-              <a:rPr sz="1000" b="1">
+              <a:rPr sz="1400" b="1">
                 <a:solidFill>
                   <a:srgbClr val="F5F7FF"/>
                 </a:solidFill>
@@ -15837,8 +15998,8 @@
         </p:nvSpPr>
         <p:spPr>
           <a:xfrm>
-            <a:off x="3505200" y="2048256"/>
-            <a:ext cx="2307336" cy="301752"/>
+            <a:off x="4739640" y="3063240"/>
+            <a:ext cx="3322320" cy="685800"/>
           </a:xfrm>
           <a:prstGeom prst="rect">
             <a:avLst/>
@@ -15846,13 +16007,13 @@
           <a:noFill/>
         </p:spPr>
         <p:txBody>
-          <a:bodyPr wrap="square" lIns="27432" rIns="27432" tIns="18288" bIns="18288">
+          <a:bodyPr wrap="square" lIns="45720" rIns="45720" tIns="27432" bIns="27432">
             <a:spAutoFit/>
           </a:bodyPr>
           <a:lstStyle/>
           <a:p>
             <a:r>
-              <a:rPr sz="900" b="0">
+              <a:rPr sz="1200" b="0">
                 <a:solidFill>
                   <a:srgbClr val="AEB8E0"/>
                 </a:solidFill>
@@ -15871,8 +16032,8 @@
         </p:nvSpPr>
         <p:spPr>
           <a:xfrm>
-            <a:off x="3505200" y="2487168"/>
-            <a:ext cx="2307336" cy="228600"/>
+            <a:off x="4739640" y="3794760"/>
+            <a:ext cx="3322320" cy="640080"/>
           </a:xfrm>
           <a:prstGeom prst="rect">
             <a:avLst/>
@@ -15880,13 +16041,13 @@
           <a:noFill/>
         </p:spPr>
         <p:txBody>
-          <a:bodyPr wrap="square" lIns="27432" rIns="27432" tIns="18288" bIns="18288">
+          <a:bodyPr wrap="square" lIns="45720" rIns="45720" tIns="27432" bIns="27432">
             <a:spAutoFit/>
           </a:bodyPr>
           <a:lstStyle/>
           <a:p>
             <a:r>
-              <a:rPr sz="1000" b="1">
+              <a:rPr sz="1400" b="1">
                 <a:solidFill>
                   <a:srgbClr val="F5F7FF"/>
                 </a:solidFill>
@@ -15905,8 +16066,8 @@
         </p:nvSpPr>
         <p:spPr>
           <a:xfrm>
-            <a:off x="3505200" y="2706624"/>
-            <a:ext cx="2307336" cy="301752"/>
+            <a:off x="4739640" y="4434840"/>
+            <a:ext cx="3322320" cy="685800"/>
           </a:xfrm>
           <a:prstGeom prst="rect">
             <a:avLst/>
@@ -15914,13 +16075,13 @@
           <a:noFill/>
         </p:spPr>
         <p:txBody>
-          <a:bodyPr wrap="square" lIns="27432" rIns="27432" tIns="18288" bIns="18288">
+          <a:bodyPr wrap="square" lIns="45720" rIns="45720" tIns="27432" bIns="27432">
             <a:spAutoFit/>
           </a:bodyPr>
           <a:lstStyle/>
           <a:p>
             <a:r>
-              <a:rPr sz="900" b="0">
+              <a:rPr sz="1200" b="0">
                 <a:solidFill>
                   <a:srgbClr val="AEB8E0"/>
                 </a:solidFill>
@@ -15939,8 +16100,8 @@
         </p:nvSpPr>
         <p:spPr>
           <a:xfrm>
-            <a:off x="6132576" y="1261872"/>
-            <a:ext cx="2636520" cy="3456432"/>
+            <a:off x="8473440" y="1691640"/>
+            <a:ext cx="3688080" cy="4709160"/>
           </a:xfrm>
           <a:prstGeom prst="roundRect">
             <a:avLst/>
@@ -15948,7 +16109,7 @@
           <a:solidFill>
             <a:srgbClr val="1B2241"/>
           </a:solidFill>
-          <a:ln>
+          <a:ln w="9525">
             <a:solidFill>
               <a:srgbClr val="161E45"/>
             </a:solidFill>
@@ -15984,8 +16145,8 @@
         </p:nvSpPr>
         <p:spPr>
           <a:xfrm>
-            <a:off x="6132576" y="1261872"/>
-            <a:ext cx="2636520" cy="64008"/>
+            <a:off x="8473440" y="1691640"/>
+            <a:ext cx="3688080" cy="82296"/>
           </a:xfrm>
           <a:prstGeom prst="rect">
             <a:avLst/>
@@ -16027,8 +16188,8 @@
         </p:nvSpPr>
         <p:spPr>
           <a:xfrm>
-            <a:off x="6269736" y="1463040"/>
-            <a:ext cx="2362200" cy="274320"/>
+            <a:off x="8656319" y="1874520"/>
+            <a:ext cx="3322320" cy="365760"/>
           </a:xfrm>
           <a:prstGeom prst="rect">
             <a:avLst/>
@@ -16036,13 +16197,13 @@
           <a:noFill/>
         </p:spPr>
         <p:txBody>
-          <a:bodyPr wrap="square" lIns="27432" rIns="27432" tIns="18288" bIns="18288">
+          <a:bodyPr wrap="square" lIns="45720" rIns="45720" tIns="27432" bIns="27432">
             <a:spAutoFit/>
           </a:bodyPr>
           <a:lstStyle/>
           <a:p>
             <a:r>
-              <a:rPr sz="1300" b="1">
+              <a:rPr sz="1600" b="1">
                 <a:solidFill>
                   <a:srgbClr val="3E8E22"/>
                 </a:solidFill>
@@ -16061,8 +16222,8 @@
         </p:nvSpPr>
         <p:spPr>
           <a:xfrm>
-            <a:off x="6297168" y="1828800"/>
-            <a:ext cx="2307336" cy="228600"/>
+            <a:off x="8656319" y="2423160"/>
+            <a:ext cx="3322320" cy="640080"/>
           </a:xfrm>
           <a:prstGeom prst="rect">
             <a:avLst/>
@@ -16070,13 +16231,13 @@
           <a:noFill/>
         </p:spPr>
         <p:txBody>
-          <a:bodyPr wrap="square" lIns="27432" rIns="27432" tIns="18288" bIns="18288">
+          <a:bodyPr wrap="square" lIns="45720" rIns="45720" tIns="27432" bIns="27432">
             <a:spAutoFit/>
           </a:bodyPr>
           <a:lstStyle/>
           <a:p>
             <a:r>
-              <a:rPr sz="1000" b="1">
+              <a:rPr sz="1400" b="1">
                 <a:solidFill>
                   <a:srgbClr val="F5F7FF"/>
                 </a:solidFill>
@@ -16095,8 +16256,8 @@
         </p:nvSpPr>
         <p:spPr>
           <a:xfrm>
-            <a:off x="6297168" y="2048256"/>
-            <a:ext cx="2307336" cy="301752"/>
+            <a:off x="8656319" y="3063240"/>
+            <a:ext cx="3322320" cy="685800"/>
           </a:xfrm>
           <a:prstGeom prst="rect">
             <a:avLst/>
@@ -16104,13 +16265,13 @@
           <a:noFill/>
         </p:spPr>
         <p:txBody>
-          <a:bodyPr wrap="square" lIns="27432" rIns="27432" tIns="18288" bIns="18288">
+          <a:bodyPr wrap="square" lIns="45720" rIns="45720" tIns="27432" bIns="27432">
             <a:spAutoFit/>
           </a:bodyPr>
           <a:lstStyle/>
           <a:p>
             <a:r>
-              <a:rPr sz="900" b="0">
+              <a:rPr sz="1200" b="0">
                 <a:solidFill>
                   <a:srgbClr val="AEB8E0"/>
                 </a:solidFill>
